--- a/2026_SMDM/02_Theory.pptx
+++ b/2026_SMDM/02_Theory.pptx
@@ -5,7 +5,7 @@
     <p:sldMasterId id="2147483648" r:id="rId4"/>
   </p:sldMasterIdLst>
   <p:notesMasterIdLst>
-    <p:notesMasterId r:id="rId41"/>
+    <p:notesMasterId r:id="rId42"/>
   </p:notesMasterIdLst>
   <p:sldIdLst>
     <p:sldId id="1096" r:id="rId5"/>
@@ -33,17 +33,18 @@
     <p:sldId id="1068" r:id="rId27"/>
     <p:sldId id="1069" r:id="rId28"/>
     <p:sldId id="1084" r:id="rId29"/>
-    <p:sldId id="1072" r:id="rId30"/>
-    <p:sldId id="1054" r:id="rId31"/>
-    <p:sldId id="1083" r:id="rId32"/>
-    <p:sldId id="1081" r:id="rId33"/>
-    <p:sldId id="1082" r:id="rId34"/>
-    <p:sldId id="1087" r:id="rId35"/>
-    <p:sldId id="1085" r:id="rId36"/>
-    <p:sldId id="333" r:id="rId37"/>
-    <p:sldId id="1086" r:id="rId38"/>
-    <p:sldId id="1079" r:id="rId39"/>
-    <p:sldId id="1097" r:id="rId40"/>
+    <p:sldId id="1083" r:id="rId30"/>
+    <p:sldId id="1081" r:id="rId31"/>
+    <p:sldId id="1082" r:id="rId32"/>
+    <p:sldId id="1087" r:id="rId33"/>
+    <p:sldId id="1085" r:id="rId34"/>
+    <p:sldId id="333" r:id="rId35"/>
+    <p:sldId id="1086" r:id="rId36"/>
+    <p:sldId id="1098" r:id="rId37"/>
+    <p:sldId id="1072" r:id="rId38"/>
+    <p:sldId id="1054" r:id="rId39"/>
+    <p:sldId id="1079" r:id="rId40"/>
+    <p:sldId id="1097" r:id="rId41"/>
   </p:sldIdLst>
   <p:sldSz cx="12192000" cy="6858000"/>
   <p:notesSz cx="6858000" cy="9144000"/>
@@ -243,7 +244,7 @@
           <a:p>
             <a:fld id="{E033252C-ECEF-0044-BF19-FBFB46CE84A2}" type="datetimeFigureOut">
               <a:rPr lang="en-US" smtClean="0"/>
-              <a:t>6/12/25</a:t>
+              <a:t>6/27/26</a:t>
             </a:fld>
             <a:endParaRPr lang="en-US"/>
           </a:p>
@@ -766,7 +767,7 @@
           <a:p>
             <a:fld id="{6A8FB48A-BFC4-2846-8228-6201ABA4D0C5}" type="datetimeFigureOut">
               <a:rPr lang="en-US" smtClean="0"/>
-              <a:t>6/12/25</a:t>
+              <a:t>6/27/26</a:t>
             </a:fld>
             <a:endParaRPr lang="en-US"/>
           </a:p>
@@ -964,7 +965,7 @@
           <a:p>
             <a:fld id="{6A8FB48A-BFC4-2846-8228-6201ABA4D0C5}" type="datetimeFigureOut">
               <a:rPr lang="en-US" smtClean="0"/>
-              <a:t>6/12/25</a:t>
+              <a:t>6/27/26</a:t>
             </a:fld>
             <a:endParaRPr lang="en-US"/>
           </a:p>
@@ -1172,7 +1173,7 @@
           <a:p>
             <a:fld id="{6A8FB48A-BFC4-2846-8228-6201ABA4D0C5}" type="datetimeFigureOut">
               <a:rPr lang="en-US" smtClean="0"/>
-              <a:t>6/12/25</a:t>
+              <a:t>6/27/26</a:t>
             </a:fld>
             <a:endParaRPr lang="en-US"/>
           </a:p>
@@ -1370,7 +1371,7 @@
           <a:p>
             <a:fld id="{6A8FB48A-BFC4-2846-8228-6201ABA4D0C5}" type="datetimeFigureOut">
               <a:rPr lang="en-US" smtClean="0"/>
-              <a:t>6/12/25</a:t>
+              <a:t>6/27/26</a:t>
             </a:fld>
             <a:endParaRPr lang="en-US"/>
           </a:p>
@@ -1645,7 +1646,7 @@
           <a:p>
             <a:fld id="{6A8FB48A-BFC4-2846-8228-6201ABA4D0C5}" type="datetimeFigureOut">
               <a:rPr lang="en-US" smtClean="0"/>
-              <a:t>6/12/25</a:t>
+              <a:t>6/27/26</a:t>
             </a:fld>
             <a:endParaRPr lang="en-US"/>
           </a:p>
@@ -1910,7 +1911,7 @@
           <a:p>
             <a:fld id="{6A8FB48A-BFC4-2846-8228-6201ABA4D0C5}" type="datetimeFigureOut">
               <a:rPr lang="en-US" smtClean="0"/>
-              <a:t>6/12/25</a:t>
+              <a:t>6/27/26</a:t>
             </a:fld>
             <a:endParaRPr lang="en-US"/>
           </a:p>
@@ -2322,7 +2323,7 @@
           <a:p>
             <a:fld id="{6A8FB48A-BFC4-2846-8228-6201ABA4D0C5}" type="datetimeFigureOut">
               <a:rPr lang="en-US" smtClean="0"/>
-              <a:t>6/12/25</a:t>
+              <a:t>6/27/26</a:t>
             </a:fld>
             <a:endParaRPr lang="en-US"/>
           </a:p>
@@ -2463,7 +2464,7 @@
           <a:p>
             <a:fld id="{6A8FB48A-BFC4-2846-8228-6201ABA4D0C5}" type="datetimeFigureOut">
               <a:rPr lang="en-US" smtClean="0"/>
-              <a:t>6/12/25</a:t>
+              <a:t>6/27/26</a:t>
             </a:fld>
             <a:endParaRPr lang="en-US"/>
           </a:p>
@@ -2576,7 +2577,7 @@
           <a:p>
             <a:fld id="{6A8FB48A-BFC4-2846-8228-6201ABA4D0C5}" type="datetimeFigureOut">
               <a:rPr lang="en-US" smtClean="0"/>
-              <a:t>6/12/25</a:t>
+              <a:t>6/27/26</a:t>
             </a:fld>
             <a:endParaRPr lang="en-US"/>
           </a:p>
@@ -2887,7 +2888,7 @@
           <a:p>
             <a:fld id="{6A8FB48A-BFC4-2846-8228-6201ABA4D0C5}" type="datetimeFigureOut">
               <a:rPr lang="en-US" smtClean="0"/>
-              <a:t>6/12/25</a:t>
+              <a:t>6/27/26</a:t>
             </a:fld>
             <a:endParaRPr lang="en-US"/>
           </a:p>
@@ -3175,7 +3176,7 @@
           <a:p>
             <a:fld id="{6A8FB48A-BFC4-2846-8228-6201ABA4D0C5}" type="datetimeFigureOut">
               <a:rPr lang="en-US" smtClean="0"/>
-              <a:t>6/12/25</a:t>
+              <a:t>6/27/26</a:t>
             </a:fld>
             <a:endParaRPr lang="en-US"/>
           </a:p>
@@ -3416,7 +3417,7 @@
           <a:p>
             <a:fld id="{6A8FB48A-BFC4-2846-8228-6201ABA4D0C5}" type="datetimeFigureOut">
               <a:rPr lang="en-US" smtClean="0"/>
-              <a:t>6/12/25</a:t>
+              <a:t>6/27/26</a:t>
             </a:fld>
             <a:endParaRPr lang="en-US"/>
           </a:p>
@@ -3839,668 +3840,6 @@
           <a:chExt cx="0" cy="0"/>
         </a:xfrm>
       </p:grpSpPr>
-      <p:graphicFrame>
-        <p:nvGraphicFramePr>
-          <p:cNvPr id="4" name="Content Placeholder 3">
-            <a:extLst>
-              <a:ext uri="{FF2B5EF4-FFF2-40B4-BE49-F238E27FC236}">
-                <a16:creationId xmlns:a16="http://schemas.microsoft.com/office/drawing/2014/main" id="{655314A2-2BED-36EA-B4B2-DECEE9EBBB31}"/>
-              </a:ext>
-            </a:extLst>
-          </p:cNvPr>
-          <p:cNvGraphicFramePr>
-            <a:graphicFrameLocks noGrp="1"/>
-          </p:cNvGraphicFramePr>
-          <p:nvPr>
-            <p:ph idx="1"/>
-          </p:nvPr>
-        </p:nvGraphicFramePr>
-        <p:xfrm>
-          <a:off x="1208690" y="942340"/>
-          <a:ext cx="10720551" cy="4973320"/>
-        </p:xfrm>
-        <a:graphic>
-          <a:graphicData uri="http://schemas.openxmlformats.org/drawingml/2006/table">
-            <a:tbl>
-              <a:tblPr firstRow="1" bandRow="1">
-                <a:tableStyleId>{21E4AEA4-8DFA-4A89-87EB-49C32662AFE0}</a:tableStyleId>
-              </a:tblPr>
-              <a:tblGrid>
-                <a:gridCol w="1717110">
-                  <a:extLst>
-                    <a:ext uri="{9D8B030D-6E8A-4147-A177-3AD203B41FA5}">
-                      <a16:colId xmlns:a16="http://schemas.microsoft.com/office/drawing/2014/main" val="4182014441"/>
-                    </a:ext>
-                  </a:extLst>
-                </a:gridCol>
-                <a:gridCol w="5976462">
-                  <a:extLst>
-                    <a:ext uri="{9D8B030D-6E8A-4147-A177-3AD203B41FA5}">
-                      <a16:colId xmlns:a16="http://schemas.microsoft.com/office/drawing/2014/main" val="906180283"/>
-                    </a:ext>
-                  </a:extLst>
-                </a:gridCol>
-                <a:gridCol w="3026979">
-                  <a:extLst>
-                    <a:ext uri="{9D8B030D-6E8A-4147-A177-3AD203B41FA5}">
-                      <a16:colId xmlns:a16="http://schemas.microsoft.com/office/drawing/2014/main" val="2769721792"/>
-                    </a:ext>
-                  </a:extLst>
-                </a:gridCol>
-              </a:tblGrid>
-              <a:tr h="370840">
-                <a:tc>
-                  <a:txBody>
-                    <a:bodyPr/>
-                    <a:lstStyle/>
-                    <a:p>
-                      <a:r>
-                        <a:rPr lang="en-US" dirty="0"/>
-                        <a:t>Time</a:t>
-                      </a:r>
-                    </a:p>
-                  </a:txBody>
-                  <a:tcPr/>
-                </a:tc>
-                <a:tc>
-                  <a:txBody>
-                    <a:bodyPr/>
-                    <a:lstStyle/>
-                    <a:p>
-                      <a:r>
-                        <a:rPr lang="en-US" dirty="0"/>
-                        <a:t>Description</a:t>
-                      </a:r>
-                    </a:p>
-                  </a:txBody>
-                  <a:tcPr/>
-                </a:tc>
-                <a:tc>
-                  <a:txBody>
-                    <a:bodyPr/>
-                    <a:lstStyle/>
-                    <a:p>
-                      <a:r>
-                        <a:rPr lang="en-US" dirty="0"/>
-                        <a:t>Discussant</a:t>
-                      </a:r>
-                    </a:p>
-                  </a:txBody>
-                  <a:tcPr/>
-                </a:tc>
-                <a:extLst>
-                  <a:ext uri="{0D108BD9-81ED-4DB2-BD59-A6C34878D82A}">
-                    <a16:rowId xmlns:a16="http://schemas.microsoft.com/office/drawing/2014/main" val="1700444250"/>
-                  </a:ext>
-                </a:extLst>
-              </a:tr>
-              <a:tr h="370840">
-                <a:tc>
-                  <a:txBody>
-                    <a:bodyPr/>
-                    <a:lstStyle/>
-                    <a:p>
-                      <a:r>
-                        <a:rPr lang="en-US" dirty="0"/>
-                        <a:t>[15 min]</a:t>
-                      </a:r>
-                    </a:p>
-                  </a:txBody>
-                  <a:tcPr/>
-                </a:tc>
-                <a:tc>
-                  <a:txBody>
-                    <a:bodyPr/>
-                    <a:lstStyle/>
-                    <a:p>
-                      <a:r>
-                        <a:rPr lang="en-US" sz="1800" kern="1200" dirty="0">
-                          <a:solidFill>
-                            <a:schemeClr val="dk1"/>
-                          </a:solidFill>
-                          <a:effectLst/>
-                          <a:latin typeface="+mn-lt"/>
-                          <a:ea typeface="+mn-ea"/>
-                          <a:cs typeface="+mn-cs"/>
-                        </a:rPr>
-                        <a:t>(0) Introductions and administrivia </a:t>
-                      </a:r>
-                      <a:endParaRPr lang="en-US" dirty="0"/>
-                    </a:p>
-                  </a:txBody>
-                  <a:tcPr/>
-                </a:tc>
-                <a:tc>
-                  <a:txBody>
-                    <a:bodyPr/>
-                    <a:lstStyle/>
-                    <a:p>
-                      <a:r>
-                        <a:rPr lang="en-US" dirty="0" err="1"/>
-                        <a:t>Trikalinos</a:t>
-                      </a:r>
-                      <a:endParaRPr lang="en-US" dirty="0"/>
-                    </a:p>
-                  </a:txBody>
-                  <a:tcPr/>
-                </a:tc>
-                <a:extLst>
-                  <a:ext uri="{0D108BD9-81ED-4DB2-BD59-A6C34878D82A}">
-                    <a16:rowId xmlns:a16="http://schemas.microsoft.com/office/drawing/2014/main" val="2490995723"/>
-                  </a:ext>
-                </a:extLst>
-              </a:tr>
-              <a:tr h="370840">
-                <a:tc>
-                  <a:txBody>
-                    <a:bodyPr/>
-                    <a:lstStyle/>
-                    <a:p>
-                      <a:r>
-                        <a:rPr lang="en-US" dirty="0"/>
-                        <a:t>[25 min]</a:t>
-                      </a:r>
-                    </a:p>
-                  </a:txBody>
-                  <a:tcPr/>
-                </a:tc>
-                <a:tc>
-                  <a:txBody>
-                    <a:bodyPr/>
-                    <a:lstStyle/>
-                    <a:p>
-                      <a:r>
-                        <a:rPr lang="en-US" sz="1800" kern="1200" dirty="0">
-                          <a:solidFill>
-                            <a:schemeClr val="dk1"/>
-                          </a:solidFill>
-                          <a:effectLst/>
-                          <a:latin typeface="+mn-lt"/>
-                          <a:ea typeface="+mn-ea"/>
-                          <a:cs typeface="+mn-cs"/>
-                        </a:rPr>
-                        <a:t>(1) DES as a composition of point processes</a:t>
-                      </a:r>
-                    </a:p>
-                  </a:txBody>
-                  <a:tcPr/>
-                </a:tc>
-                <a:tc>
-                  <a:txBody>
-                    <a:bodyPr/>
-                    <a:lstStyle/>
-                    <a:p>
-                      <a:r>
-                        <a:rPr lang="en-US" dirty="0" err="1"/>
-                        <a:t>Alarid</a:t>
-                      </a:r>
-                      <a:r>
-                        <a:rPr lang="en-US" dirty="0"/>
-                        <a:t>-Escudero</a:t>
-                      </a:r>
-                    </a:p>
-                  </a:txBody>
-                  <a:tcPr/>
-                </a:tc>
-                <a:extLst>
-                  <a:ext uri="{0D108BD9-81ED-4DB2-BD59-A6C34878D82A}">
-                    <a16:rowId xmlns:a16="http://schemas.microsoft.com/office/drawing/2014/main" val="2065491183"/>
-                  </a:ext>
-                </a:extLst>
-              </a:tr>
-              <a:tr h="370840">
-                <a:tc>
-                  <a:txBody>
-                    <a:bodyPr/>
-                    <a:lstStyle/>
-                    <a:p>
-                      <a:r>
-                        <a:rPr lang="en-US" dirty="0"/>
-                        <a:t>[30 min]</a:t>
-                      </a:r>
-                    </a:p>
-                  </a:txBody>
-                  <a:tcPr/>
-                </a:tc>
-                <a:tc>
-                  <a:txBody>
-                    <a:bodyPr/>
-                    <a:lstStyle/>
-                    <a:p>
-                      <a:pPr marL="0" marR="0" lvl="0" indent="0" algn="l" defTabSz="914400" rtl="0" eaLnBrk="1" fontAlgn="auto" latinLnBrk="0" hangingPunct="1">
-                        <a:lnSpc>
-                          <a:spcPct val="100000"/>
-                        </a:lnSpc>
-                        <a:spcBef>
-                          <a:spcPts val="0"/>
-                        </a:spcBef>
-                        <a:spcAft>
-                          <a:spcPts val="0"/>
-                        </a:spcAft>
-                        <a:buClrTx/>
-                        <a:buSzTx/>
-                        <a:buFontTx/>
-                        <a:buNone/>
-                        <a:tabLst/>
-                        <a:defRPr/>
-                      </a:pPr>
-                      <a:r>
-                        <a:rPr lang="en-US" sz="1800" kern="1200" dirty="0">
-                          <a:solidFill>
-                            <a:schemeClr val="dk1"/>
-                          </a:solidFill>
-                          <a:effectLst/>
-                          <a:latin typeface="+mn-lt"/>
-                          <a:ea typeface="+mn-ea"/>
-                          <a:cs typeface="+mn-cs"/>
-                        </a:rPr>
-                        <a:t>(2) NHPPPs – key properties</a:t>
-                      </a:r>
-                    </a:p>
-                  </a:txBody>
-                  <a:tcPr/>
-                </a:tc>
-                <a:tc>
-                  <a:txBody>
-                    <a:bodyPr/>
-                    <a:lstStyle/>
-                    <a:p>
-                      <a:r>
-                        <a:rPr lang="en-US" dirty="0" err="1"/>
-                        <a:t>Trikalinos</a:t>
-                      </a:r>
-                      <a:endParaRPr lang="en-US" dirty="0"/>
-                    </a:p>
-                  </a:txBody>
-                  <a:tcPr/>
-                </a:tc>
-                <a:extLst>
-                  <a:ext uri="{0D108BD9-81ED-4DB2-BD59-A6C34878D82A}">
-                    <a16:rowId xmlns:a16="http://schemas.microsoft.com/office/drawing/2014/main" val="2757944147"/>
-                  </a:ext>
-                </a:extLst>
-              </a:tr>
-              <a:tr h="370840">
-                <a:tc>
-                  <a:txBody>
-                    <a:bodyPr/>
-                    <a:lstStyle/>
-                    <a:p>
-                      <a:r>
-                        <a:rPr lang="en-US" dirty="0"/>
-                        <a:t>[30 min]</a:t>
-                      </a:r>
-                    </a:p>
-                  </a:txBody>
-                  <a:tcPr/>
-                </a:tc>
-                <a:tc>
-                  <a:txBody>
-                    <a:bodyPr/>
-                    <a:lstStyle/>
-                    <a:p>
-                      <a:r>
-                        <a:rPr lang="en-US" sz="1800" kern="1200" dirty="0">
-                          <a:solidFill>
-                            <a:schemeClr val="dk1"/>
-                          </a:solidFill>
-                          <a:effectLst/>
-                          <a:latin typeface="+mn-lt"/>
-                          <a:ea typeface="+mn-ea"/>
-                          <a:cs typeface="+mn-cs"/>
-                        </a:rPr>
-                        <a:t>(3) Sampling from NHPPPs</a:t>
-                      </a:r>
-                      <a:endParaRPr lang="en-US" dirty="0"/>
-                    </a:p>
-                  </a:txBody>
-                  <a:tcPr/>
-                </a:tc>
-                <a:tc>
-                  <a:txBody>
-                    <a:bodyPr/>
-                    <a:lstStyle/>
-                    <a:p>
-                      <a:r>
-                        <a:rPr lang="en-US" dirty="0" err="1"/>
-                        <a:t>Sereda</a:t>
-                      </a:r>
-                      <a:endParaRPr lang="en-US" dirty="0"/>
-                    </a:p>
-                  </a:txBody>
-                  <a:tcPr/>
-                </a:tc>
-                <a:extLst>
-                  <a:ext uri="{0D108BD9-81ED-4DB2-BD59-A6C34878D82A}">
-                    <a16:rowId xmlns:a16="http://schemas.microsoft.com/office/drawing/2014/main" val="1442363784"/>
-                  </a:ext>
-                </a:extLst>
-              </a:tr>
-              <a:tr h="370840">
-                <a:tc>
-                  <a:txBody>
-                    <a:bodyPr/>
-                    <a:lstStyle/>
-                    <a:p>
-                      <a:r>
-                        <a:rPr lang="en-US" dirty="0"/>
-                        <a:t>[15 min]</a:t>
-                      </a:r>
-                    </a:p>
-                  </a:txBody>
-                  <a:tcPr/>
-                </a:tc>
-                <a:tc>
-                  <a:txBody>
-                    <a:bodyPr/>
-                    <a:lstStyle/>
-                    <a:p>
-                      <a:pPr marL="0" marR="0" lvl="0" indent="0" algn="l" defTabSz="914400" rtl="0" eaLnBrk="1" fontAlgn="auto" latinLnBrk="0" hangingPunct="1">
-                        <a:lnSpc>
-                          <a:spcPct val="100000"/>
-                        </a:lnSpc>
-                        <a:spcBef>
-                          <a:spcPts val="0"/>
-                        </a:spcBef>
-                        <a:spcAft>
-                          <a:spcPts val="0"/>
-                        </a:spcAft>
-                        <a:buClrTx/>
-                        <a:buSzTx/>
-                        <a:buFontTx/>
-                        <a:buNone/>
-                        <a:tabLst/>
-                        <a:defRPr/>
-                      </a:pPr>
-                      <a:r>
-                        <a:rPr lang="en-US" b="1" dirty="0"/>
-                        <a:t>Break</a:t>
-                      </a:r>
-                    </a:p>
-                  </a:txBody>
-                  <a:tcPr/>
-                </a:tc>
-                <a:tc>
-                  <a:txBody>
-                    <a:bodyPr/>
-                    <a:lstStyle/>
-                    <a:p>
-                      <a:endParaRPr lang="en-US" dirty="0"/>
-                    </a:p>
-                  </a:txBody>
-                  <a:tcPr/>
-                </a:tc>
-                <a:extLst>
-                  <a:ext uri="{0D108BD9-81ED-4DB2-BD59-A6C34878D82A}">
-                    <a16:rowId xmlns:a16="http://schemas.microsoft.com/office/drawing/2014/main" val="1269228105"/>
-                  </a:ext>
-                </a:extLst>
-              </a:tr>
-              <a:tr h="370840">
-                <a:tc>
-                  <a:txBody>
-                    <a:bodyPr/>
-                    <a:lstStyle/>
-                    <a:p>
-                      <a:r>
-                        <a:rPr lang="en-US" dirty="0"/>
-                        <a:t>[80 min]</a:t>
-                      </a:r>
-                    </a:p>
-                  </a:txBody>
-                  <a:tcPr/>
-                </a:tc>
-                <a:tc>
-                  <a:txBody>
-                    <a:bodyPr/>
-                    <a:lstStyle/>
-                    <a:p>
-                      <a:r>
-                        <a:rPr lang="en-US" sz="1800" kern="1200" dirty="0">
-                          <a:solidFill>
-                            <a:schemeClr val="dk1"/>
-                          </a:solidFill>
-                          <a:effectLst/>
-                          <a:latin typeface="+mn-lt"/>
-                          <a:ea typeface="+mn-ea"/>
-                          <a:cs typeface="+mn-cs"/>
-                        </a:rPr>
-                        <a:t>(4) Guided exercise: </a:t>
-                      </a:r>
-                    </a:p>
-                    <a:p>
-                      <a:pPr marL="285750" indent="-285750">
-                        <a:buFontTx/>
-                        <a:buChar char="-"/>
-                      </a:pPr>
-                      <a:r>
-                        <a:rPr lang="en-US" sz="1800" kern="1200" dirty="0">
-                          <a:solidFill>
-                            <a:schemeClr val="dk1"/>
-                          </a:solidFill>
-                          <a:effectLst/>
-                          <a:latin typeface="+mn-lt"/>
-                          <a:ea typeface="+mn-ea"/>
-                          <a:cs typeface="+mn-cs"/>
-                        </a:rPr>
-                        <a:t>Implement a simple cancer natural history DES for one person</a:t>
-                      </a:r>
-                    </a:p>
-                    <a:p>
-                      <a:pPr marL="285750" indent="-285750">
-                        <a:buFontTx/>
-                        <a:buChar char="-"/>
-                      </a:pPr>
-                      <a:r>
-                        <a:rPr lang="en-US" sz="1800" kern="1200" dirty="0">
-                          <a:solidFill>
-                            <a:schemeClr val="dk1"/>
-                          </a:solidFill>
-                          <a:effectLst/>
-                          <a:latin typeface="+mn-lt"/>
-                          <a:ea typeface="+mn-ea"/>
-                          <a:cs typeface="+mn-cs"/>
-                        </a:rPr>
-                        <a:t>The many-person case</a:t>
-                      </a:r>
-                    </a:p>
-                    <a:p>
-                      <a:pPr marL="285750" indent="-285750">
-                        <a:buFontTx/>
-                        <a:buChar char="-"/>
-                      </a:pPr>
-                      <a:r>
-                        <a:rPr lang="en-US" sz="1800" kern="1200" dirty="0">
-                          <a:solidFill>
-                            <a:schemeClr val="dk1"/>
-                          </a:solidFill>
-                          <a:effectLst/>
-                          <a:latin typeface="+mn-lt"/>
-                          <a:ea typeface="+mn-ea"/>
-                          <a:cs typeface="+mn-cs"/>
-                        </a:rPr>
-                        <a:t>Packaging </a:t>
-                      </a:r>
-                    </a:p>
-                  </a:txBody>
-                  <a:tcPr/>
-                </a:tc>
-                <a:tc>
-                  <a:txBody>
-                    <a:bodyPr/>
-                    <a:lstStyle/>
-                    <a:p>
-                      <a:r>
-                        <a:rPr lang="en-US" dirty="0"/>
-                        <a:t>[All]</a:t>
-                      </a:r>
-                    </a:p>
-                    <a:p>
-                      <a:r>
-                        <a:rPr lang="en-US" dirty="0" err="1"/>
-                        <a:t>Chrysanthopoulou</a:t>
-                      </a:r>
-                      <a:endParaRPr lang="en-US" dirty="0"/>
-                    </a:p>
-                    <a:p>
-                      <a:endParaRPr lang="en-US" dirty="0"/>
-                    </a:p>
-                    <a:p>
-                      <a:r>
-                        <a:rPr lang="en-US" dirty="0" err="1"/>
-                        <a:t>Sereda</a:t>
-                      </a:r>
-                      <a:r>
-                        <a:rPr lang="en-US" dirty="0"/>
-                        <a:t>/</a:t>
-                      </a:r>
-                      <a:r>
-                        <a:rPr lang="en-US" dirty="0" err="1"/>
-                        <a:t>Alarid</a:t>
-                      </a:r>
-                      <a:r>
-                        <a:rPr lang="en-US" dirty="0"/>
-                        <a:t>-Escudero</a:t>
-                      </a:r>
-                    </a:p>
-                    <a:p>
-                      <a:r>
-                        <a:rPr lang="en-US" dirty="0" err="1"/>
-                        <a:t>Trikalinos</a:t>
-                      </a:r>
-                      <a:endParaRPr lang="en-US" dirty="0"/>
-                    </a:p>
-                  </a:txBody>
-                  <a:tcPr/>
-                </a:tc>
-                <a:extLst>
-                  <a:ext uri="{0D108BD9-81ED-4DB2-BD59-A6C34878D82A}">
-                    <a16:rowId xmlns:a16="http://schemas.microsoft.com/office/drawing/2014/main" val="1448491104"/>
-                  </a:ext>
-                </a:extLst>
-              </a:tr>
-              <a:tr h="370840">
-                <a:tc>
-                  <a:txBody>
-                    <a:bodyPr/>
-                    <a:lstStyle/>
-                    <a:p>
-                      <a:r>
-                        <a:rPr lang="en-US" dirty="0"/>
-                        <a:t>[10 min]</a:t>
-                      </a:r>
-                    </a:p>
-                  </a:txBody>
-                  <a:tcPr/>
-                </a:tc>
-                <a:tc>
-                  <a:txBody>
-                    <a:bodyPr/>
-                    <a:lstStyle/>
-                    <a:p>
-                      <a:pPr marL="0" marR="0" lvl="0" indent="0" algn="l" defTabSz="914400" rtl="0" eaLnBrk="1" fontAlgn="auto" latinLnBrk="0" hangingPunct="1">
-                        <a:lnSpc>
-                          <a:spcPct val="100000"/>
-                        </a:lnSpc>
-                        <a:spcBef>
-                          <a:spcPts val="0"/>
-                        </a:spcBef>
-                        <a:spcAft>
-                          <a:spcPts val="0"/>
-                        </a:spcAft>
-                        <a:buClrTx/>
-                        <a:buSzTx/>
-                        <a:buFontTx/>
-                        <a:buNone/>
-                        <a:tabLst/>
-                        <a:defRPr/>
-                      </a:pPr>
-                      <a:r>
-                        <a:rPr lang="en-US" sz="1800" kern="1200" dirty="0">
-                          <a:solidFill>
-                            <a:schemeClr val="dk1"/>
-                          </a:solidFill>
-                          <a:effectLst/>
-                          <a:latin typeface="+mn-lt"/>
-                          <a:ea typeface="+mn-ea"/>
-                          <a:cs typeface="+mn-cs"/>
-                        </a:rPr>
-                        <a:t>(5) Advanced Topic Teaser on self-excitatory processes: point processes that are not NHPPPs and when you may need them</a:t>
-                      </a:r>
-                    </a:p>
-                  </a:txBody>
-                  <a:tcPr/>
-                </a:tc>
-                <a:tc>
-                  <a:txBody>
-                    <a:bodyPr/>
-                    <a:lstStyle/>
-                    <a:p>
-                      <a:r>
-                        <a:rPr lang="en-US" dirty="0" err="1"/>
-                        <a:t>Trikalinos</a:t>
-                      </a:r>
-                      <a:endParaRPr lang="en-US" dirty="0"/>
-                    </a:p>
-                  </a:txBody>
-                  <a:tcPr/>
-                </a:tc>
-                <a:extLst>
-                  <a:ext uri="{0D108BD9-81ED-4DB2-BD59-A6C34878D82A}">
-                    <a16:rowId xmlns:a16="http://schemas.microsoft.com/office/drawing/2014/main" val="3766472740"/>
-                  </a:ext>
-                </a:extLst>
-              </a:tr>
-              <a:tr h="370840">
-                <a:tc>
-                  <a:txBody>
-                    <a:bodyPr/>
-                    <a:lstStyle/>
-                    <a:p>
-                      <a:r>
-                        <a:rPr lang="en-US" dirty="0"/>
-                        <a:t>[15 min]</a:t>
-                      </a:r>
-                    </a:p>
-                  </a:txBody>
-                  <a:tcPr/>
-                </a:tc>
-                <a:tc>
-                  <a:txBody>
-                    <a:bodyPr/>
-                    <a:lstStyle/>
-                    <a:p>
-                      <a:r>
-                        <a:rPr lang="en-US" dirty="0"/>
-                        <a:t>General Q &amp; A</a:t>
-                      </a:r>
-                    </a:p>
-                  </a:txBody>
-                  <a:tcPr/>
-                </a:tc>
-                <a:tc>
-                  <a:txBody>
-                    <a:bodyPr/>
-                    <a:lstStyle/>
-                    <a:p>
-                      <a:r>
-                        <a:rPr lang="en-US" dirty="0"/>
-                        <a:t>All</a:t>
-                      </a:r>
-                    </a:p>
-                  </a:txBody>
-                  <a:tcPr/>
-                </a:tc>
-                <a:extLst>
-                  <a:ext uri="{0D108BD9-81ED-4DB2-BD59-A6C34878D82A}">
-                    <a16:rowId xmlns:a16="http://schemas.microsoft.com/office/drawing/2014/main" val="3034331301"/>
-                  </a:ext>
-                </a:extLst>
-              </a:tr>
-            </a:tbl>
-          </a:graphicData>
-        </a:graphic>
-      </p:graphicFrame>
       <p:sp>
         <p:nvSpPr>
           <p:cNvPr id="5" name="Right Arrow 4">
@@ -4554,12 +3893,1437 @@
           </a:p>
         </p:txBody>
       </p:sp>
+      <mc:AlternateContent xmlns:mc="http://schemas.openxmlformats.org/markup-compatibility/2006">
+        <mc:Choice xmlns:a14="http://schemas.microsoft.com/office/drawing/2010/main" Requires="a14">
+          <p:graphicFrame>
+            <p:nvGraphicFramePr>
+              <p:cNvPr id="7" name="Content Placeholder 3">
+                <a:extLst>
+                  <a:ext uri="{FF2B5EF4-FFF2-40B4-BE49-F238E27FC236}">
+                    <a16:creationId xmlns:a16="http://schemas.microsoft.com/office/drawing/2014/main" id="{6D8E4368-29FE-EEA6-435E-CAA2903FE0D7}"/>
+                  </a:ext>
+                </a:extLst>
+              </p:cNvPr>
+              <p:cNvGraphicFramePr>
+                <a:graphicFrameLocks/>
+              </p:cNvGraphicFramePr>
+              <p:nvPr>
+                <p:extLst>
+                  <p:ext uri="{D42A27DB-BD31-4B8C-83A1-F6EECF244321}">
+                    <p14:modId xmlns:p14="http://schemas.microsoft.com/office/powerpoint/2010/main" val="260976388"/>
+                  </p:ext>
+                </p:extLst>
+              </p:nvPr>
+            </p:nvGraphicFramePr>
+            <p:xfrm>
+              <a:off x="1208690" y="942340"/>
+              <a:ext cx="10720551" cy="4699000"/>
+            </p:xfrm>
+            <a:graphic>
+              <a:graphicData uri="http://schemas.openxmlformats.org/drawingml/2006/table">
+                <a:tbl>
+                  <a:tblPr firstRow="1" bandRow="1">
+                    <a:tableStyleId>{21E4AEA4-8DFA-4A89-87EB-49C32662AFE0}</a:tableStyleId>
+                  </a:tblPr>
+                  <a:tblGrid>
+                    <a:gridCol w="1717110">
+                      <a:extLst>
+                        <a:ext uri="{9D8B030D-6E8A-4147-A177-3AD203B41FA5}">
+                          <a16:colId xmlns:a16="http://schemas.microsoft.com/office/drawing/2014/main" val="4182014441"/>
+                        </a:ext>
+                      </a:extLst>
+                    </a:gridCol>
+                    <a:gridCol w="5976462">
+                      <a:extLst>
+                        <a:ext uri="{9D8B030D-6E8A-4147-A177-3AD203B41FA5}">
+                          <a16:colId xmlns:a16="http://schemas.microsoft.com/office/drawing/2014/main" val="906180283"/>
+                        </a:ext>
+                      </a:extLst>
+                    </a:gridCol>
+                    <a:gridCol w="3026979">
+                      <a:extLst>
+                        <a:ext uri="{9D8B030D-6E8A-4147-A177-3AD203B41FA5}">
+                          <a16:colId xmlns:a16="http://schemas.microsoft.com/office/drawing/2014/main" val="2769721792"/>
+                        </a:ext>
+                      </a:extLst>
+                    </a:gridCol>
+                  </a:tblGrid>
+                  <a:tr h="370840">
+                    <a:tc>
+                      <a:txBody>
+                        <a:bodyPr/>
+                        <a:lstStyle/>
+                        <a:p>
+                          <a:r>
+                            <a:rPr lang="en-US" dirty="0"/>
+                            <a:t>Time</a:t>
+                          </a:r>
+                        </a:p>
+                      </a:txBody>
+                      <a:tcPr/>
+                    </a:tc>
+                    <a:tc>
+                      <a:txBody>
+                        <a:bodyPr/>
+                        <a:lstStyle/>
+                        <a:p>
+                          <a:r>
+                            <a:rPr lang="en-US" dirty="0"/>
+                            <a:t>Description</a:t>
+                          </a:r>
+                        </a:p>
+                      </a:txBody>
+                      <a:tcPr/>
+                    </a:tc>
+                    <a:tc>
+                      <a:txBody>
+                        <a:bodyPr/>
+                        <a:lstStyle/>
+                        <a:p>
+                          <a:r>
+                            <a:rPr lang="en-US" dirty="0"/>
+                            <a:t>Discussant</a:t>
+                          </a:r>
+                        </a:p>
+                      </a:txBody>
+                      <a:tcPr/>
+                    </a:tc>
+                    <a:extLst>
+                      <a:ext uri="{0D108BD9-81ED-4DB2-BD59-A6C34878D82A}">
+                        <a16:rowId xmlns:a16="http://schemas.microsoft.com/office/drawing/2014/main" val="1700444250"/>
+                      </a:ext>
+                    </a:extLst>
+                  </a:tr>
+                  <a:tr h="370840">
+                    <a:tc>
+                      <a:txBody>
+                        <a:bodyPr/>
+                        <a:lstStyle/>
+                        <a:p>
+                          <a:r>
+                            <a:rPr lang="en-US" dirty="0"/>
+                            <a:t>[15 min]</a:t>
+                          </a:r>
+                        </a:p>
+                      </a:txBody>
+                      <a:tcPr/>
+                    </a:tc>
+                    <a:tc>
+                      <a:txBody>
+                        <a:bodyPr/>
+                        <a:lstStyle/>
+                        <a:p>
+                          <a:r>
+                            <a:rPr lang="en-US" sz="1800" kern="1200" dirty="0">
+                              <a:solidFill>
+                                <a:schemeClr val="dk1"/>
+                              </a:solidFill>
+                              <a:effectLst/>
+                              <a:latin typeface="+mn-lt"/>
+                              <a:ea typeface="+mn-ea"/>
+                              <a:cs typeface="+mn-cs"/>
+                            </a:rPr>
+                            <a:t>(0) Introductions and administrivia </a:t>
+                          </a:r>
+                          <a:endParaRPr lang="en-US" dirty="0"/>
+                        </a:p>
+                      </a:txBody>
+                      <a:tcPr/>
+                    </a:tc>
+                    <a:tc>
+                      <a:txBody>
+                        <a:bodyPr/>
+                        <a:lstStyle/>
+                        <a:p>
+                          <a:r>
+                            <a:rPr lang="en-US" dirty="0" err="1"/>
+                            <a:t>Trikalinos</a:t>
+                          </a:r>
+                          <a:endParaRPr lang="en-US" dirty="0"/>
+                        </a:p>
+                      </a:txBody>
+                      <a:tcPr/>
+                    </a:tc>
+                    <a:extLst>
+                      <a:ext uri="{0D108BD9-81ED-4DB2-BD59-A6C34878D82A}">
+                        <a16:rowId xmlns:a16="http://schemas.microsoft.com/office/drawing/2014/main" val="2490995723"/>
+                      </a:ext>
+                    </a:extLst>
+                  </a:tr>
+                  <a:tr h="370840">
+                    <a:tc>
+                      <a:txBody>
+                        <a:bodyPr/>
+                        <a:lstStyle/>
+                        <a:p>
+                          <a:r>
+                            <a:rPr lang="en-US" dirty="0"/>
+                            <a:t>[25 min]</a:t>
+                          </a:r>
+                        </a:p>
+                      </a:txBody>
+                      <a:tcPr/>
+                    </a:tc>
+                    <a:tc>
+                      <a:txBody>
+                        <a:bodyPr/>
+                        <a:lstStyle/>
+                        <a:p>
+                          <a:r>
+                            <a:rPr lang="en-US" sz="1800" kern="1200" dirty="0">
+                              <a:solidFill>
+                                <a:schemeClr val="dk1"/>
+                              </a:solidFill>
+                              <a:effectLst/>
+                              <a:latin typeface="+mn-lt"/>
+                              <a:ea typeface="+mn-ea"/>
+                              <a:cs typeface="+mn-cs"/>
+                            </a:rPr>
+                            <a:t>(1) DES as a composition of point processes</a:t>
+                          </a:r>
+                        </a:p>
+                      </a:txBody>
+                      <a:tcPr/>
+                    </a:tc>
+                    <a:tc>
+                      <a:txBody>
+                        <a:bodyPr/>
+                        <a:lstStyle/>
+                        <a:p>
+                          <a:r>
+                            <a:rPr lang="en-US" dirty="0" err="1"/>
+                            <a:t>Alarid</a:t>
+                          </a:r>
+                          <a:r>
+                            <a:rPr lang="en-US" dirty="0"/>
+                            <a:t>-Escudero</a:t>
+                          </a:r>
+                        </a:p>
+                      </a:txBody>
+                      <a:tcPr/>
+                    </a:tc>
+                    <a:extLst>
+                      <a:ext uri="{0D108BD9-81ED-4DB2-BD59-A6C34878D82A}">
+                        <a16:rowId xmlns:a16="http://schemas.microsoft.com/office/drawing/2014/main" val="2065491183"/>
+                      </a:ext>
+                    </a:extLst>
+                  </a:tr>
+                  <a:tr h="370840">
+                    <a:tc>
+                      <a:txBody>
+                        <a:bodyPr/>
+                        <a:lstStyle/>
+                        <a:p>
+                          <a:r>
+                            <a:rPr lang="en-US" dirty="0"/>
+                            <a:t>[30 min]</a:t>
+                          </a:r>
+                        </a:p>
+                      </a:txBody>
+                      <a:tcPr/>
+                    </a:tc>
+                    <a:tc>
+                      <a:txBody>
+                        <a:bodyPr/>
+                        <a:lstStyle/>
+                        <a:p>
+                          <a:pPr marL="0" marR="0" lvl="0" indent="0" algn="l" defTabSz="914400" rtl="0" eaLnBrk="1" fontAlgn="auto" latinLnBrk="0" hangingPunct="1">
+                            <a:lnSpc>
+                              <a:spcPct val="100000"/>
+                            </a:lnSpc>
+                            <a:spcBef>
+                              <a:spcPts val="0"/>
+                            </a:spcBef>
+                            <a:spcAft>
+                              <a:spcPts val="0"/>
+                            </a:spcAft>
+                            <a:buClrTx/>
+                            <a:buSzTx/>
+                            <a:buFontTx/>
+                            <a:buNone/>
+                            <a:tabLst/>
+                            <a:defRPr/>
+                          </a:pPr>
+                          <a:r>
+                            <a:rPr lang="en-US" sz="1800" kern="1200" dirty="0">
+                              <a:solidFill>
+                                <a:schemeClr val="dk1"/>
+                              </a:solidFill>
+                              <a:effectLst/>
+                              <a:latin typeface="+mn-lt"/>
+                              <a:ea typeface="+mn-ea"/>
+                              <a:cs typeface="+mn-cs"/>
+                            </a:rPr>
+                            <a:t>(2) NHPPPs – key properties</a:t>
+                          </a:r>
+                        </a:p>
+                      </a:txBody>
+                      <a:tcPr/>
+                    </a:tc>
+                    <a:tc>
+                      <a:txBody>
+                        <a:bodyPr/>
+                        <a:lstStyle/>
+                        <a:p>
+                          <a:r>
+                            <a:rPr lang="en-US" dirty="0" err="1"/>
+                            <a:t>Trikalinos</a:t>
+                          </a:r>
+                          <a:endParaRPr lang="en-US" dirty="0"/>
+                        </a:p>
+                      </a:txBody>
+                      <a:tcPr/>
+                    </a:tc>
+                    <a:extLst>
+                      <a:ext uri="{0D108BD9-81ED-4DB2-BD59-A6C34878D82A}">
+                        <a16:rowId xmlns:a16="http://schemas.microsoft.com/office/drawing/2014/main" val="2757944147"/>
+                      </a:ext>
+                    </a:extLst>
+                  </a:tr>
+                  <a:tr h="370840">
+                    <a:tc>
+                      <a:txBody>
+                        <a:bodyPr/>
+                        <a:lstStyle/>
+                        <a:p>
+                          <a:r>
+                            <a:rPr lang="en-US" dirty="0"/>
+                            <a:t>[30 min]</a:t>
+                          </a:r>
+                        </a:p>
+                      </a:txBody>
+                      <a:tcPr/>
+                    </a:tc>
+                    <a:tc>
+                      <a:txBody>
+                        <a:bodyPr/>
+                        <a:lstStyle/>
+                        <a:p>
+                          <a:r>
+                            <a:rPr lang="en-US" sz="1800" kern="1200" dirty="0">
+                              <a:solidFill>
+                                <a:schemeClr val="dk1"/>
+                              </a:solidFill>
+                              <a:effectLst/>
+                              <a:latin typeface="+mn-lt"/>
+                              <a:ea typeface="+mn-ea"/>
+                              <a:cs typeface="+mn-cs"/>
+                            </a:rPr>
+                            <a:t>(3) Sampling from NHPPPs</a:t>
+                          </a:r>
+                          <a:endParaRPr lang="en-US" dirty="0"/>
+                        </a:p>
+                      </a:txBody>
+                      <a:tcPr/>
+                    </a:tc>
+                    <a:tc>
+                      <a:txBody>
+                        <a:bodyPr/>
+                        <a:lstStyle/>
+                        <a:p>
+                          <a:pPr marL="0" marR="0" lvl="0" indent="0" algn="l" defTabSz="914400" rtl="0" eaLnBrk="1" fontAlgn="auto" latinLnBrk="0" hangingPunct="1">
+                            <a:lnSpc>
+                              <a:spcPct val="100000"/>
+                            </a:lnSpc>
+                            <a:spcBef>
+                              <a:spcPts val="0"/>
+                            </a:spcBef>
+                            <a:spcAft>
+                              <a:spcPts val="0"/>
+                            </a:spcAft>
+                            <a:buClrTx/>
+                            <a:buSzTx/>
+                            <a:buFontTx/>
+                            <a:buNone/>
+                            <a:tabLst/>
+                            <a:defRPr/>
+                          </a:pPr>
+                          <a:r>
+                            <a:rPr lang="en-US" dirty="0"/>
+                            <a:t>Trikalinos</a:t>
+                          </a:r>
+                        </a:p>
+                      </a:txBody>
+                      <a:tcPr/>
+                    </a:tc>
+                    <a:extLst>
+                      <a:ext uri="{0D108BD9-81ED-4DB2-BD59-A6C34878D82A}">
+                        <a16:rowId xmlns:a16="http://schemas.microsoft.com/office/drawing/2014/main" val="1442363784"/>
+                      </a:ext>
+                    </a:extLst>
+                  </a:tr>
+                  <a:tr h="370840">
+                    <a:tc>
+                      <a:txBody>
+                        <a:bodyPr/>
+                        <a:lstStyle/>
+                        <a:p>
+                          <a:r>
+                            <a:rPr lang="en-US" dirty="0"/>
+                            <a:t>[15 min]</a:t>
+                          </a:r>
+                        </a:p>
+                      </a:txBody>
+                      <a:tcPr/>
+                    </a:tc>
+                    <a:tc>
+                      <a:txBody>
+                        <a:bodyPr/>
+                        <a:lstStyle/>
+                        <a:p>
+                          <a:pPr marL="0" marR="0" lvl="0" indent="0" algn="l" defTabSz="914400" rtl="0" eaLnBrk="1" fontAlgn="auto" latinLnBrk="0" hangingPunct="1">
+                            <a:lnSpc>
+                              <a:spcPct val="100000"/>
+                            </a:lnSpc>
+                            <a:spcBef>
+                              <a:spcPts val="0"/>
+                            </a:spcBef>
+                            <a:spcAft>
+                              <a:spcPts val="0"/>
+                            </a:spcAft>
+                            <a:buClrTx/>
+                            <a:buSzTx/>
+                            <a:buFontTx/>
+                            <a:buNone/>
+                            <a:tabLst/>
+                            <a:defRPr/>
+                          </a:pPr>
+                          <a:r>
+                            <a:rPr lang="en-US" b="1" dirty="0"/>
+                            <a:t>Break</a:t>
+                          </a:r>
+                        </a:p>
+                      </a:txBody>
+                      <a:tcPr/>
+                    </a:tc>
+                    <a:tc>
+                      <a:txBody>
+                        <a:bodyPr/>
+                        <a:lstStyle/>
+                        <a:p>
+                          <a:endParaRPr lang="en-US" dirty="0"/>
+                        </a:p>
+                      </a:txBody>
+                      <a:tcPr/>
+                    </a:tc>
+                    <a:extLst>
+                      <a:ext uri="{0D108BD9-81ED-4DB2-BD59-A6C34878D82A}">
+                        <a16:rowId xmlns:a16="http://schemas.microsoft.com/office/drawing/2014/main" val="1269228105"/>
+                      </a:ext>
+                    </a:extLst>
+                  </a:tr>
+                  <a:tr h="370840">
+                    <a:tc>
+                      <a:txBody>
+                        <a:bodyPr/>
+                        <a:lstStyle/>
+                        <a:p>
+                          <a:r>
+                            <a:rPr lang="en-US" dirty="0"/>
+                            <a:t>[80 min]</a:t>
+                          </a:r>
+                        </a:p>
+                      </a:txBody>
+                      <a:tcPr/>
+                    </a:tc>
+                    <a:tc>
+                      <a:txBody>
+                        <a:bodyPr/>
+                        <a:lstStyle/>
+                        <a:p>
+                          <a:r>
+                            <a:rPr lang="en-US" sz="1800" kern="1200" dirty="0">
+                              <a:solidFill>
+                                <a:schemeClr val="dk1"/>
+                              </a:solidFill>
+                              <a:effectLst/>
+                              <a:latin typeface="+mn-lt"/>
+                              <a:ea typeface="+mn-ea"/>
+                              <a:cs typeface="+mn-cs"/>
+                            </a:rPr>
+                            <a:t>(4) Working with code</a:t>
+                          </a:r>
+                        </a:p>
+                        <a:p>
+                          <a:r>
+                            <a:rPr lang="en-US" sz="1800" kern="1200" dirty="0">
+                              <a:solidFill>
+                                <a:schemeClr val="dk1"/>
+                              </a:solidFill>
+                              <a:effectLst/>
+                              <a:latin typeface="+mn-lt"/>
+                              <a:ea typeface="+mn-ea"/>
+                              <a:cs typeface="+mn-cs"/>
+                            </a:rPr>
+                            <a:t>-- Base </a:t>
+                          </a:r>
+                          <a:r>
+                            <a:rPr lang="en-US" sz="1800" kern="1200" dirty="0">
+                              <a:solidFill>
+                                <a:schemeClr val="dk1"/>
+                              </a:solidFill>
+                              <a:effectLst/>
+                              <a:latin typeface="Courier New" panose="02070309020205020404" pitchFamily="49" charset="0"/>
+                              <a:ea typeface="+mn-ea"/>
+                              <a:cs typeface="Courier New" panose="02070309020205020404" pitchFamily="49" charset="0"/>
+                            </a:rPr>
+                            <a:t>R</a:t>
+                          </a:r>
+                          <a:r>
+                            <a:rPr lang="en-US" sz="1800" kern="1200" dirty="0">
+                              <a:solidFill>
+                                <a:schemeClr val="dk1"/>
+                              </a:solidFill>
+                              <a:effectLst/>
+                              <a:latin typeface="+mn-lt"/>
+                              <a:ea typeface="+mn-ea"/>
+                              <a:cs typeface="+mn-cs"/>
+                            </a:rPr>
+                            <a:t> vs </a:t>
+                          </a:r>
+                          <a:r>
+                            <a:rPr lang="en-US" sz="1800" kern="1200" dirty="0" err="1">
+                              <a:solidFill>
+                                <a:schemeClr val="dk1"/>
+                              </a:solidFill>
+                              <a:effectLst/>
+                              <a:latin typeface="Courier New" panose="02070309020205020404" pitchFamily="49" charset="0"/>
+                              <a:ea typeface="+mn-ea"/>
+                              <a:cs typeface="Courier New" panose="02070309020205020404" pitchFamily="49" charset="0"/>
+                            </a:rPr>
+                            <a:t>nhppp</a:t>
+                          </a:r>
+                          <a:r>
+                            <a:rPr lang="en-US" sz="1800" kern="1200" dirty="0">
+                              <a:solidFill>
+                                <a:schemeClr val="dk1"/>
+                              </a:solidFill>
+                              <a:effectLst/>
+                              <a:latin typeface="+mn-lt"/>
+                              <a:ea typeface="+mn-ea"/>
+                              <a:cs typeface="+mn-cs"/>
+                            </a:rPr>
+                            <a:t>:  Simulate first vs all events in </a:t>
+                          </a:r>
+                          <a14:m>
+                            <m:oMath xmlns:m="http://schemas.openxmlformats.org/officeDocument/2006/math">
+                              <m:r>
+                                <a:rPr lang="en-US" sz="1800" b="0" i="1" kern="1200" smtClean="0">
+                                  <a:solidFill>
+                                    <a:schemeClr val="dk1"/>
+                                  </a:solidFill>
+                                  <a:effectLst/>
+                                  <a:latin typeface="Cambria Math" panose="02040503050406030204" pitchFamily="18" charset="0"/>
+                                  <a:ea typeface="+mn-ea"/>
+                                  <a:cs typeface="+mn-cs"/>
+                                </a:rPr>
+                                <m:t>(</m:t>
+                              </m:r>
+                              <m:r>
+                                <m:rPr>
+                                  <m:sty m:val="p"/>
+                                </m:rPr>
+                                <a:rPr lang="en-US" sz="1800" b="0" i="1" kern="1200" smtClean="0">
+                                  <a:solidFill>
+                                    <a:schemeClr val="dk1"/>
+                                  </a:solidFill>
+                                  <a:effectLst/>
+                                  <a:latin typeface="Cambria Math" panose="02040503050406030204" pitchFamily="18" charset="0"/>
+                                  <a:ea typeface="+mn-ea"/>
+                                  <a:cs typeface="+mn-cs"/>
+                                </a:rPr>
+                                <m:t>a</m:t>
+                              </m:r>
+                              <m:r>
+                                <a:rPr lang="en-US" sz="1800" b="0" i="1" kern="1200" smtClean="0">
+                                  <a:solidFill>
+                                    <a:schemeClr val="dk1"/>
+                                  </a:solidFill>
+                                  <a:effectLst/>
+                                  <a:latin typeface="Cambria Math" panose="02040503050406030204" pitchFamily="18" charset="0"/>
+                                  <a:ea typeface="+mn-ea"/>
+                                  <a:cs typeface="+mn-cs"/>
+                                </a:rPr>
+                                <m:t>,</m:t>
+                              </m:r>
+                              <m:r>
+                                <m:rPr>
+                                  <m:sty m:val="p"/>
+                                </m:rPr>
+                                <a:rPr lang="en-US" sz="1800" b="0" i="1" kern="1200" smtClean="0">
+                                  <a:solidFill>
+                                    <a:schemeClr val="dk1"/>
+                                  </a:solidFill>
+                                  <a:effectLst/>
+                                  <a:latin typeface="Cambria Math" panose="02040503050406030204" pitchFamily="18" charset="0"/>
+                                  <a:ea typeface="+mn-ea"/>
+                                  <a:cs typeface="+mn-cs"/>
+                                </a:rPr>
+                                <m:t>b</m:t>
+                              </m:r>
+                              <m:r>
+                                <a:rPr lang="en-US" sz="1800" b="0" i="1" kern="1200" smtClean="0">
+                                  <a:solidFill>
+                                    <a:schemeClr val="dk1"/>
+                                  </a:solidFill>
+                                  <a:effectLst/>
+                                  <a:latin typeface="Cambria Math" panose="02040503050406030204" pitchFamily="18" charset="0"/>
+                                  <a:ea typeface="+mn-ea"/>
+                                  <a:cs typeface="+mn-cs"/>
+                                </a:rPr>
+                                <m:t>]</m:t>
+                              </m:r>
+                            </m:oMath>
+                          </a14:m>
+                          <a:endParaRPr lang="en-US" sz="1800" kern="1200" dirty="0">
+                            <a:solidFill>
+                              <a:schemeClr val="dk1"/>
+                            </a:solidFill>
+                            <a:effectLst/>
+                            <a:latin typeface="+mn-lt"/>
+                            <a:ea typeface="+mn-ea"/>
+                            <a:cs typeface="+mn-cs"/>
+                          </a:endParaRPr>
+                        </a:p>
+                        <a:p>
+                          <a:r>
+                            <a:rPr lang="en-US" sz="1800" kern="1200" dirty="0">
+                              <a:solidFill>
+                                <a:schemeClr val="dk1"/>
+                              </a:solidFill>
+                              <a:effectLst/>
+                              <a:latin typeface="+mn-lt"/>
+                              <a:ea typeface="+mn-ea"/>
+                              <a:cs typeface="+mn-cs"/>
+                            </a:rPr>
+                            <a:t>-- Packaging a simple cancer DES </a:t>
+                          </a:r>
+                        </a:p>
+                        <a:p>
+                          <a:r>
+                            <a:rPr lang="en-US" sz="1800" kern="1200" dirty="0">
+                              <a:solidFill>
+                                <a:schemeClr val="dk1"/>
+                              </a:solidFill>
+                              <a:effectLst/>
+                              <a:latin typeface="+mn-lt"/>
+                              <a:ea typeface="+mn-ea"/>
+                              <a:cs typeface="+mn-cs"/>
+                            </a:rPr>
+                            <a:t>-- The vectorized case </a:t>
+                          </a:r>
+                        </a:p>
+                      </a:txBody>
+                      <a:tcPr/>
+                    </a:tc>
+                    <a:tc>
+                      <a:txBody>
+                        <a:bodyPr/>
+                        <a:lstStyle/>
+                        <a:p>
+                          <a:r>
+                            <a:rPr lang="en-US" dirty="0"/>
+                            <a:t>[All]</a:t>
+                          </a:r>
+                        </a:p>
+                        <a:p>
+                          <a:r>
+                            <a:rPr lang="en-US" dirty="0"/>
+                            <a:t>Trikalinos</a:t>
+                          </a:r>
+                        </a:p>
+                        <a:p>
+                          <a:r>
+                            <a:rPr lang="en-US" dirty="0"/>
+                            <a:t>Sereda</a:t>
+                          </a:r>
+                        </a:p>
+                        <a:p>
+                          <a:pPr marL="0" marR="0" lvl="0" indent="0" algn="l" defTabSz="914400" rtl="0" eaLnBrk="1" fontAlgn="auto" latinLnBrk="0" hangingPunct="1">
+                            <a:lnSpc>
+                              <a:spcPct val="100000"/>
+                            </a:lnSpc>
+                            <a:spcBef>
+                              <a:spcPts val="0"/>
+                            </a:spcBef>
+                            <a:spcAft>
+                              <a:spcPts val="0"/>
+                            </a:spcAft>
+                            <a:buClrTx/>
+                            <a:buSzTx/>
+                            <a:buFontTx/>
+                            <a:buNone/>
+                            <a:tabLst/>
+                            <a:defRPr/>
+                          </a:pPr>
+                          <a:r>
+                            <a:rPr lang="en-US" dirty="0"/>
+                            <a:t>Sereda</a:t>
+                          </a:r>
+                        </a:p>
+                      </a:txBody>
+                      <a:tcPr/>
+                    </a:tc>
+                    <a:extLst>
+                      <a:ext uri="{0D108BD9-81ED-4DB2-BD59-A6C34878D82A}">
+                        <a16:rowId xmlns:a16="http://schemas.microsoft.com/office/drawing/2014/main" val="1448491104"/>
+                      </a:ext>
+                    </a:extLst>
+                  </a:tr>
+                  <a:tr h="370840">
+                    <a:tc>
+                      <a:txBody>
+                        <a:bodyPr/>
+                        <a:lstStyle/>
+                        <a:p>
+                          <a:r>
+                            <a:rPr lang="en-US" dirty="0"/>
+                            <a:t>[5 min]</a:t>
+                          </a:r>
+                        </a:p>
+                      </a:txBody>
+                      <a:tcPr/>
+                    </a:tc>
+                    <a:tc>
+                      <a:txBody>
+                        <a:bodyPr/>
+                        <a:lstStyle/>
+                        <a:p>
+                          <a:pPr marL="0" marR="0" lvl="0" indent="0" algn="l" defTabSz="914400" rtl="0" eaLnBrk="1" fontAlgn="auto" latinLnBrk="0" hangingPunct="1">
+                            <a:lnSpc>
+                              <a:spcPct val="100000"/>
+                            </a:lnSpc>
+                            <a:spcBef>
+                              <a:spcPts val="0"/>
+                            </a:spcBef>
+                            <a:spcAft>
+                              <a:spcPts val="0"/>
+                            </a:spcAft>
+                            <a:buClrTx/>
+                            <a:buSzTx/>
+                            <a:buFontTx/>
+                            <a:buNone/>
+                            <a:tabLst/>
+                            <a:defRPr/>
+                          </a:pPr>
+                          <a:r>
+                            <a:rPr lang="en-US" sz="1800" kern="1200" dirty="0">
+                              <a:solidFill>
+                                <a:schemeClr val="dk1"/>
+                              </a:solidFill>
+                              <a:effectLst/>
+                              <a:latin typeface="+mn-lt"/>
+                              <a:ea typeface="+mn-ea"/>
+                              <a:cs typeface="+mn-cs"/>
+                            </a:rPr>
+                            <a:t>(5) Advanced Topic Teaser on self-excitatory processes: point processes that are not NHPPPs and when you may need them</a:t>
+                          </a:r>
+                        </a:p>
+                      </a:txBody>
+                      <a:tcPr/>
+                    </a:tc>
+                    <a:tc>
+                      <a:txBody>
+                        <a:bodyPr/>
+                        <a:lstStyle/>
+                        <a:p>
+                          <a:r>
+                            <a:rPr lang="en-US" dirty="0"/>
+                            <a:t>Trikalinos</a:t>
+                          </a:r>
+                        </a:p>
+                      </a:txBody>
+                      <a:tcPr/>
+                    </a:tc>
+                    <a:extLst>
+                      <a:ext uri="{0D108BD9-81ED-4DB2-BD59-A6C34878D82A}">
+                        <a16:rowId xmlns:a16="http://schemas.microsoft.com/office/drawing/2014/main" val="3766472740"/>
+                      </a:ext>
+                    </a:extLst>
+                  </a:tr>
+                  <a:tr h="370840">
+                    <a:tc>
+                      <a:txBody>
+                        <a:bodyPr/>
+                        <a:lstStyle/>
+                        <a:p>
+                          <a:r>
+                            <a:rPr lang="en-US" dirty="0"/>
+                            <a:t>[15 min]</a:t>
+                          </a:r>
+                        </a:p>
+                      </a:txBody>
+                      <a:tcPr/>
+                    </a:tc>
+                    <a:tc>
+                      <a:txBody>
+                        <a:bodyPr/>
+                        <a:lstStyle/>
+                        <a:p>
+                          <a:r>
+                            <a:rPr lang="en-US" dirty="0"/>
+                            <a:t>General Q &amp; A</a:t>
+                          </a:r>
+                        </a:p>
+                      </a:txBody>
+                      <a:tcPr/>
+                    </a:tc>
+                    <a:tc>
+                      <a:txBody>
+                        <a:bodyPr/>
+                        <a:lstStyle/>
+                        <a:p>
+                          <a:r>
+                            <a:rPr lang="en-US" dirty="0"/>
+                            <a:t>All</a:t>
+                          </a:r>
+                        </a:p>
+                      </a:txBody>
+                      <a:tcPr/>
+                    </a:tc>
+                    <a:extLst>
+                      <a:ext uri="{0D108BD9-81ED-4DB2-BD59-A6C34878D82A}">
+                        <a16:rowId xmlns:a16="http://schemas.microsoft.com/office/drawing/2014/main" val="3034331301"/>
+                      </a:ext>
+                    </a:extLst>
+                  </a:tr>
+                </a:tbl>
+              </a:graphicData>
+            </a:graphic>
+          </p:graphicFrame>
+        </mc:Choice>
+        <mc:Fallback>
+          <p:graphicFrame>
+            <p:nvGraphicFramePr>
+              <p:cNvPr id="7" name="Content Placeholder 3">
+                <a:extLst>
+                  <a:ext uri="{FF2B5EF4-FFF2-40B4-BE49-F238E27FC236}">
+                    <a16:creationId xmlns:a16="http://schemas.microsoft.com/office/drawing/2014/main" id="{6D8E4368-29FE-EEA6-435E-CAA2903FE0D7}"/>
+                  </a:ext>
+                </a:extLst>
+              </p:cNvPr>
+              <p:cNvGraphicFramePr>
+                <a:graphicFrameLocks/>
+              </p:cNvGraphicFramePr>
+              <p:nvPr>
+                <p:extLst>
+                  <p:ext uri="{D42A27DB-BD31-4B8C-83A1-F6EECF244321}">
+                    <p14:modId xmlns:p14="http://schemas.microsoft.com/office/powerpoint/2010/main" val="260976388"/>
+                  </p:ext>
+                </p:extLst>
+              </p:nvPr>
+            </p:nvGraphicFramePr>
+            <p:xfrm>
+              <a:off x="1208690" y="942340"/>
+              <a:ext cx="10720551" cy="4699000"/>
+            </p:xfrm>
+            <a:graphic>
+              <a:graphicData uri="http://schemas.openxmlformats.org/drawingml/2006/table">
+                <a:tbl>
+                  <a:tblPr firstRow="1" bandRow="1">
+                    <a:tableStyleId>{21E4AEA4-8DFA-4A89-87EB-49C32662AFE0}</a:tableStyleId>
+                  </a:tblPr>
+                  <a:tblGrid>
+                    <a:gridCol w="1717110">
+                      <a:extLst>
+                        <a:ext uri="{9D8B030D-6E8A-4147-A177-3AD203B41FA5}">
+                          <a16:colId xmlns:a16="http://schemas.microsoft.com/office/drawing/2014/main" val="4182014441"/>
+                        </a:ext>
+                      </a:extLst>
+                    </a:gridCol>
+                    <a:gridCol w="5976462">
+                      <a:extLst>
+                        <a:ext uri="{9D8B030D-6E8A-4147-A177-3AD203B41FA5}">
+                          <a16:colId xmlns:a16="http://schemas.microsoft.com/office/drawing/2014/main" val="906180283"/>
+                        </a:ext>
+                      </a:extLst>
+                    </a:gridCol>
+                    <a:gridCol w="3026979">
+                      <a:extLst>
+                        <a:ext uri="{9D8B030D-6E8A-4147-A177-3AD203B41FA5}">
+                          <a16:colId xmlns:a16="http://schemas.microsoft.com/office/drawing/2014/main" val="2769721792"/>
+                        </a:ext>
+                      </a:extLst>
+                    </a:gridCol>
+                  </a:tblGrid>
+                  <a:tr h="370840">
+                    <a:tc>
+                      <a:txBody>
+                        <a:bodyPr/>
+                        <a:lstStyle/>
+                        <a:p>
+                          <a:r>
+                            <a:rPr lang="en-US" dirty="0"/>
+                            <a:t>Time</a:t>
+                          </a:r>
+                        </a:p>
+                      </a:txBody>
+                      <a:tcPr/>
+                    </a:tc>
+                    <a:tc>
+                      <a:txBody>
+                        <a:bodyPr/>
+                        <a:lstStyle/>
+                        <a:p>
+                          <a:r>
+                            <a:rPr lang="en-US" dirty="0"/>
+                            <a:t>Description</a:t>
+                          </a:r>
+                        </a:p>
+                      </a:txBody>
+                      <a:tcPr/>
+                    </a:tc>
+                    <a:tc>
+                      <a:txBody>
+                        <a:bodyPr/>
+                        <a:lstStyle/>
+                        <a:p>
+                          <a:r>
+                            <a:rPr lang="en-US" dirty="0"/>
+                            <a:t>Discussant</a:t>
+                          </a:r>
+                        </a:p>
+                      </a:txBody>
+                      <a:tcPr/>
+                    </a:tc>
+                    <a:extLst>
+                      <a:ext uri="{0D108BD9-81ED-4DB2-BD59-A6C34878D82A}">
+                        <a16:rowId xmlns:a16="http://schemas.microsoft.com/office/drawing/2014/main" val="1700444250"/>
+                      </a:ext>
+                    </a:extLst>
+                  </a:tr>
+                  <a:tr h="370840">
+                    <a:tc>
+                      <a:txBody>
+                        <a:bodyPr/>
+                        <a:lstStyle/>
+                        <a:p>
+                          <a:r>
+                            <a:rPr lang="en-US" dirty="0"/>
+                            <a:t>[15 min]</a:t>
+                          </a:r>
+                        </a:p>
+                      </a:txBody>
+                      <a:tcPr/>
+                    </a:tc>
+                    <a:tc>
+                      <a:txBody>
+                        <a:bodyPr/>
+                        <a:lstStyle/>
+                        <a:p>
+                          <a:r>
+                            <a:rPr lang="en-US" sz="1800" kern="1200" dirty="0">
+                              <a:solidFill>
+                                <a:schemeClr val="dk1"/>
+                              </a:solidFill>
+                              <a:effectLst/>
+                              <a:latin typeface="+mn-lt"/>
+                              <a:ea typeface="+mn-ea"/>
+                              <a:cs typeface="+mn-cs"/>
+                            </a:rPr>
+                            <a:t>(0) Introductions and administrivia </a:t>
+                          </a:r>
+                          <a:endParaRPr lang="en-US" dirty="0"/>
+                        </a:p>
+                      </a:txBody>
+                      <a:tcPr/>
+                    </a:tc>
+                    <a:tc>
+                      <a:txBody>
+                        <a:bodyPr/>
+                        <a:lstStyle/>
+                        <a:p>
+                          <a:r>
+                            <a:rPr lang="en-US" dirty="0" err="1"/>
+                            <a:t>Trikalinos</a:t>
+                          </a:r>
+                          <a:endParaRPr lang="en-US" dirty="0"/>
+                        </a:p>
+                      </a:txBody>
+                      <a:tcPr/>
+                    </a:tc>
+                    <a:extLst>
+                      <a:ext uri="{0D108BD9-81ED-4DB2-BD59-A6C34878D82A}">
+                        <a16:rowId xmlns:a16="http://schemas.microsoft.com/office/drawing/2014/main" val="2490995723"/>
+                      </a:ext>
+                    </a:extLst>
+                  </a:tr>
+                  <a:tr h="370840">
+                    <a:tc>
+                      <a:txBody>
+                        <a:bodyPr/>
+                        <a:lstStyle/>
+                        <a:p>
+                          <a:r>
+                            <a:rPr lang="en-US" dirty="0"/>
+                            <a:t>[25 min]</a:t>
+                          </a:r>
+                        </a:p>
+                      </a:txBody>
+                      <a:tcPr/>
+                    </a:tc>
+                    <a:tc>
+                      <a:txBody>
+                        <a:bodyPr/>
+                        <a:lstStyle/>
+                        <a:p>
+                          <a:r>
+                            <a:rPr lang="en-US" sz="1800" kern="1200" dirty="0">
+                              <a:solidFill>
+                                <a:schemeClr val="dk1"/>
+                              </a:solidFill>
+                              <a:effectLst/>
+                              <a:latin typeface="+mn-lt"/>
+                              <a:ea typeface="+mn-ea"/>
+                              <a:cs typeface="+mn-cs"/>
+                            </a:rPr>
+                            <a:t>(1) DES as a composition of point processes</a:t>
+                          </a:r>
+                        </a:p>
+                      </a:txBody>
+                      <a:tcPr/>
+                    </a:tc>
+                    <a:tc>
+                      <a:txBody>
+                        <a:bodyPr/>
+                        <a:lstStyle/>
+                        <a:p>
+                          <a:r>
+                            <a:rPr lang="en-US" dirty="0" err="1"/>
+                            <a:t>Alarid</a:t>
+                          </a:r>
+                          <a:r>
+                            <a:rPr lang="en-US" dirty="0"/>
+                            <a:t>-Escudero</a:t>
+                          </a:r>
+                        </a:p>
+                      </a:txBody>
+                      <a:tcPr/>
+                    </a:tc>
+                    <a:extLst>
+                      <a:ext uri="{0D108BD9-81ED-4DB2-BD59-A6C34878D82A}">
+                        <a16:rowId xmlns:a16="http://schemas.microsoft.com/office/drawing/2014/main" val="2065491183"/>
+                      </a:ext>
+                    </a:extLst>
+                  </a:tr>
+                  <a:tr h="370840">
+                    <a:tc>
+                      <a:txBody>
+                        <a:bodyPr/>
+                        <a:lstStyle/>
+                        <a:p>
+                          <a:r>
+                            <a:rPr lang="en-US" dirty="0"/>
+                            <a:t>[30 min]</a:t>
+                          </a:r>
+                        </a:p>
+                      </a:txBody>
+                      <a:tcPr/>
+                    </a:tc>
+                    <a:tc>
+                      <a:txBody>
+                        <a:bodyPr/>
+                        <a:lstStyle/>
+                        <a:p>
+                          <a:pPr marL="0" marR="0" lvl="0" indent="0" algn="l" defTabSz="914400" rtl="0" eaLnBrk="1" fontAlgn="auto" latinLnBrk="0" hangingPunct="1">
+                            <a:lnSpc>
+                              <a:spcPct val="100000"/>
+                            </a:lnSpc>
+                            <a:spcBef>
+                              <a:spcPts val="0"/>
+                            </a:spcBef>
+                            <a:spcAft>
+                              <a:spcPts val="0"/>
+                            </a:spcAft>
+                            <a:buClrTx/>
+                            <a:buSzTx/>
+                            <a:buFontTx/>
+                            <a:buNone/>
+                            <a:tabLst/>
+                            <a:defRPr/>
+                          </a:pPr>
+                          <a:r>
+                            <a:rPr lang="en-US" sz="1800" kern="1200" dirty="0">
+                              <a:solidFill>
+                                <a:schemeClr val="dk1"/>
+                              </a:solidFill>
+                              <a:effectLst/>
+                              <a:latin typeface="+mn-lt"/>
+                              <a:ea typeface="+mn-ea"/>
+                              <a:cs typeface="+mn-cs"/>
+                            </a:rPr>
+                            <a:t>(2) NHPPPs – key properties</a:t>
+                          </a:r>
+                        </a:p>
+                      </a:txBody>
+                      <a:tcPr/>
+                    </a:tc>
+                    <a:tc>
+                      <a:txBody>
+                        <a:bodyPr/>
+                        <a:lstStyle/>
+                        <a:p>
+                          <a:r>
+                            <a:rPr lang="en-US" dirty="0" err="1"/>
+                            <a:t>Trikalinos</a:t>
+                          </a:r>
+                          <a:endParaRPr lang="en-US" dirty="0"/>
+                        </a:p>
+                      </a:txBody>
+                      <a:tcPr/>
+                    </a:tc>
+                    <a:extLst>
+                      <a:ext uri="{0D108BD9-81ED-4DB2-BD59-A6C34878D82A}">
+                        <a16:rowId xmlns:a16="http://schemas.microsoft.com/office/drawing/2014/main" val="2757944147"/>
+                      </a:ext>
+                    </a:extLst>
+                  </a:tr>
+                  <a:tr h="370840">
+                    <a:tc>
+                      <a:txBody>
+                        <a:bodyPr/>
+                        <a:lstStyle/>
+                        <a:p>
+                          <a:r>
+                            <a:rPr lang="en-US" dirty="0"/>
+                            <a:t>[30 min]</a:t>
+                          </a:r>
+                        </a:p>
+                      </a:txBody>
+                      <a:tcPr/>
+                    </a:tc>
+                    <a:tc>
+                      <a:txBody>
+                        <a:bodyPr/>
+                        <a:lstStyle/>
+                        <a:p>
+                          <a:r>
+                            <a:rPr lang="en-US" sz="1800" kern="1200" dirty="0">
+                              <a:solidFill>
+                                <a:schemeClr val="dk1"/>
+                              </a:solidFill>
+                              <a:effectLst/>
+                              <a:latin typeface="+mn-lt"/>
+                              <a:ea typeface="+mn-ea"/>
+                              <a:cs typeface="+mn-cs"/>
+                            </a:rPr>
+                            <a:t>(3) Sampling from NHPPPs</a:t>
+                          </a:r>
+                          <a:endParaRPr lang="en-US" dirty="0"/>
+                        </a:p>
+                      </a:txBody>
+                      <a:tcPr/>
+                    </a:tc>
+                    <a:tc>
+                      <a:txBody>
+                        <a:bodyPr/>
+                        <a:lstStyle/>
+                        <a:p>
+                          <a:pPr marL="0" marR="0" lvl="0" indent="0" algn="l" defTabSz="914400" rtl="0" eaLnBrk="1" fontAlgn="auto" latinLnBrk="0" hangingPunct="1">
+                            <a:lnSpc>
+                              <a:spcPct val="100000"/>
+                            </a:lnSpc>
+                            <a:spcBef>
+                              <a:spcPts val="0"/>
+                            </a:spcBef>
+                            <a:spcAft>
+                              <a:spcPts val="0"/>
+                            </a:spcAft>
+                            <a:buClrTx/>
+                            <a:buSzTx/>
+                            <a:buFontTx/>
+                            <a:buNone/>
+                            <a:tabLst/>
+                            <a:defRPr/>
+                          </a:pPr>
+                          <a:r>
+                            <a:rPr lang="en-US" dirty="0"/>
+                            <a:t>Trikalinos</a:t>
+                          </a:r>
+                        </a:p>
+                      </a:txBody>
+                      <a:tcPr/>
+                    </a:tc>
+                    <a:extLst>
+                      <a:ext uri="{0D108BD9-81ED-4DB2-BD59-A6C34878D82A}">
+                        <a16:rowId xmlns:a16="http://schemas.microsoft.com/office/drawing/2014/main" val="1442363784"/>
+                      </a:ext>
+                    </a:extLst>
+                  </a:tr>
+                  <a:tr h="370840">
+                    <a:tc>
+                      <a:txBody>
+                        <a:bodyPr/>
+                        <a:lstStyle/>
+                        <a:p>
+                          <a:r>
+                            <a:rPr lang="en-US" dirty="0"/>
+                            <a:t>[15 min]</a:t>
+                          </a:r>
+                        </a:p>
+                      </a:txBody>
+                      <a:tcPr/>
+                    </a:tc>
+                    <a:tc>
+                      <a:txBody>
+                        <a:bodyPr/>
+                        <a:lstStyle/>
+                        <a:p>
+                          <a:pPr marL="0" marR="0" lvl="0" indent="0" algn="l" defTabSz="914400" rtl="0" eaLnBrk="1" fontAlgn="auto" latinLnBrk="0" hangingPunct="1">
+                            <a:lnSpc>
+                              <a:spcPct val="100000"/>
+                            </a:lnSpc>
+                            <a:spcBef>
+                              <a:spcPts val="0"/>
+                            </a:spcBef>
+                            <a:spcAft>
+                              <a:spcPts val="0"/>
+                            </a:spcAft>
+                            <a:buClrTx/>
+                            <a:buSzTx/>
+                            <a:buFontTx/>
+                            <a:buNone/>
+                            <a:tabLst/>
+                            <a:defRPr/>
+                          </a:pPr>
+                          <a:r>
+                            <a:rPr lang="en-US" b="1" dirty="0"/>
+                            <a:t>Break</a:t>
+                          </a:r>
+                        </a:p>
+                      </a:txBody>
+                      <a:tcPr/>
+                    </a:tc>
+                    <a:tc>
+                      <a:txBody>
+                        <a:bodyPr/>
+                        <a:lstStyle/>
+                        <a:p>
+                          <a:endParaRPr lang="en-US" dirty="0"/>
+                        </a:p>
+                      </a:txBody>
+                      <a:tcPr/>
+                    </a:tc>
+                    <a:extLst>
+                      <a:ext uri="{0D108BD9-81ED-4DB2-BD59-A6C34878D82A}">
+                        <a16:rowId xmlns:a16="http://schemas.microsoft.com/office/drawing/2014/main" val="1269228105"/>
+                      </a:ext>
+                    </a:extLst>
+                  </a:tr>
+                  <a:tr h="1188720">
+                    <a:tc>
+                      <a:txBody>
+                        <a:bodyPr/>
+                        <a:lstStyle/>
+                        <a:p>
+                          <a:r>
+                            <a:rPr lang="en-US" dirty="0"/>
+                            <a:t>[80 min]</a:t>
+                          </a:r>
+                        </a:p>
+                      </a:txBody>
+                      <a:tcPr/>
+                    </a:tc>
+                    <a:tc>
+                      <a:txBody>
+                        <a:bodyPr/>
+                        <a:lstStyle/>
+                        <a:p>
+                          <a:endParaRPr lang="en-US"/>
+                        </a:p>
+                      </a:txBody>
+                      <a:tcPr>
+                        <a:blipFill>
+                          <a:blip r:embed="rId2"/>
+                          <a:stretch>
+                            <a:fillRect l="-28875" t="-189362" r="-51168" b="-114894"/>
+                          </a:stretch>
+                        </a:blipFill>
+                      </a:tcPr>
+                    </a:tc>
+                    <a:tc>
+                      <a:txBody>
+                        <a:bodyPr/>
+                        <a:lstStyle/>
+                        <a:p>
+                          <a:r>
+                            <a:rPr lang="en-US" dirty="0"/>
+                            <a:t>[All]</a:t>
+                          </a:r>
+                        </a:p>
+                        <a:p>
+                          <a:r>
+                            <a:rPr lang="en-US" dirty="0"/>
+                            <a:t>Trikalinos</a:t>
+                          </a:r>
+                        </a:p>
+                        <a:p>
+                          <a:r>
+                            <a:rPr lang="en-US" dirty="0"/>
+                            <a:t>Sereda</a:t>
+                          </a:r>
+                        </a:p>
+                        <a:p>
+                          <a:pPr marL="0" marR="0" lvl="0" indent="0" algn="l" defTabSz="914400" rtl="0" eaLnBrk="1" fontAlgn="auto" latinLnBrk="0" hangingPunct="1">
+                            <a:lnSpc>
+                              <a:spcPct val="100000"/>
+                            </a:lnSpc>
+                            <a:spcBef>
+                              <a:spcPts val="0"/>
+                            </a:spcBef>
+                            <a:spcAft>
+                              <a:spcPts val="0"/>
+                            </a:spcAft>
+                            <a:buClrTx/>
+                            <a:buSzTx/>
+                            <a:buFontTx/>
+                            <a:buNone/>
+                            <a:tabLst/>
+                            <a:defRPr/>
+                          </a:pPr>
+                          <a:r>
+                            <a:rPr lang="en-US" dirty="0"/>
+                            <a:t>Sereda</a:t>
+                          </a:r>
+                        </a:p>
+                      </a:txBody>
+                      <a:tcPr/>
+                    </a:tc>
+                    <a:extLst>
+                      <a:ext uri="{0D108BD9-81ED-4DB2-BD59-A6C34878D82A}">
+                        <a16:rowId xmlns:a16="http://schemas.microsoft.com/office/drawing/2014/main" val="1448491104"/>
+                      </a:ext>
+                    </a:extLst>
+                  </a:tr>
+                  <a:tr h="914400">
+                    <a:tc>
+                      <a:txBody>
+                        <a:bodyPr/>
+                        <a:lstStyle/>
+                        <a:p>
+                          <a:r>
+                            <a:rPr lang="en-US" dirty="0"/>
+                            <a:t>[5 min]</a:t>
+                          </a:r>
+                        </a:p>
+                      </a:txBody>
+                      <a:tcPr/>
+                    </a:tc>
+                    <a:tc>
+                      <a:txBody>
+                        <a:bodyPr/>
+                        <a:lstStyle/>
+                        <a:p>
+                          <a:pPr marL="0" marR="0" lvl="0" indent="0" algn="l" defTabSz="914400" rtl="0" eaLnBrk="1" fontAlgn="auto" latinLnBrk="0" hangingPunct="1">
+                            <a:lnSpc>
+                              <a:spcPct val="100000"/>
+                            </a:lnSpc>
+                            <a:spcBef>
+                              <a:spcPts val="0"/>
+                            </a:spcBef>
+                            <a:spcAft>
+                              <a:spcPts val="0"/>
+                            </a:spcAft>
+                            <a:buClrTx/>
+                            <a:buSzTx/>
+                            <a:buFontTx/>
+                            <a:buNone/>
+                            <a:tabLst/>
+                            <a:defRPr/>
+                          </a:pPr>
+                          <a:r>
+                            <a:rPr lang="en-US" sz="1800" kern="1200" dirty="0">
+                              <a:solidFill>
+                                <a:schemeClr val="dk1"/>
+                              </a:solidFill>
+                              <a:effectLst/>
+                              <a:latin typeface="+mn-lt"/>
+                              <a:ea typeface="+mn-ea"/>
+                              <a:cs typeface="+mn-cs"/>
+                            </a:rPr>
+                            <a:t>(5) Advanced Topic Teaser on self-excitatory processes: point processes that are not NHPPPs and when you may need them</a:t>
+                          </a:r>
+                        </a:p>
+                      </a:txBody>
+                      <a:tcPr/>
+                    </a:tc>
+                    <a:tc>
+                      <a:txBody>
+                        <a:bodyPr/>
+                        <a:lstStyle/>
+                        <a:p>
+                          <a:r>
+                            <a:rPr lang="en-US" dirty="0"/>
+                            <a:t>Trikalinos</a:t>
+                          </a:r>
+                        </a:p>
+                      </a:txBody>
+                      <a:tcPr/>
+                    </a:tc>
+                    <a:extLst>
+                      <a:ext uri="{0D108BD9-81ED-4DB2-BD59-A6C34878D82A}">
+                        <a16:rowId xmlns:a16="http://schemas.microsoft.com/office/drawing/2014/main" val="3766472740"/>
+                      </a:ext>
+                    </a:extLst>
+                  </a:tr>
+                  <a:tr h="370840">
+                    <a:tc>
+                      <a:txBody>
+                        <a:bodyPr/>
+                        <a:lstStyle/>
+                        <a:p>
+                          <a:r>
+                            <a:rPr lang="en-US" dirty="0"/>
+                            <a:t>[15 min]</a:t>
+                          </a:r>
+                        </a:p>
+                      </a:txBody>
+                      <a:tcPr/>
+                    </a:tc>
+                    <a:tc>
+                      <a:txBody>
+                        <a:bodyPr/>
+                        <a:lstStyle/>
+                        <a:p>
+                          <a:r>
+                            <a:rPr lang="en-US" dirty="0"/>
+                            <a:t>General Q &amp; A</a:t>
+                          </a:r>
+                        </a:p>
+                      </a:txBody>
+                      <a:tcPr/>
+                    </a:tc>
+                    <a:tc>
+                      <a:txBody>
+                        <a:bodyPr/>
+                        <a:lstStyle/>
+                        <a:p>
+                          <a:r>
+                            <a:rPr lang="en-US" dirty="0"/>
+                            <a:t>All</a:t>
+                          </a:r>
+                        </a:p>
+                      </a:txBody>
+                      <a:tcPr/>
+                    </a:tc>
+                    <a:extLst>
+                      <a:ext uri="{0D108BD9-81ED-4DB2-BD59-A6C34878D82A}">
+                        <a16:rowId xmlns:a16="http://schemas.microsoft.com/office/drawing/2014/main" val="3034331301"/>
+                      </a:ext>
+                    </a:extLst>
+                  </a:tr>
+                </a:tbl>
+              </a:graphicData>
+            </a:graphic>
+          </p:graphicFrame>
+        </mc:Fallback>
+      </mc:AlternateContent>
       <p:sp>
         <p:nvSpPr>
-          <p:cNvPr id="3" name="TextBox 2">
+          <p:cNvPr id="8" name="TextBox 7">
             <a:extLst>
               <a:ext uri="{FF2B5EF4-FFF2-40B4-BE49-F238E27FC236}">
-                <a16:creationId xmlns:a16="http://schemas.microsoft.com/office/drawing/2014/main" id="{B380354A-241B-4487-1B74-C4EDB47A554C}"/>
+                <a16:creationId xmlns:a16="http://schemas.microsoft.com/office/drawing/2014/main" id="{1D927027-1B47-B6BA-E979-DCB33A3478B0}"/>
               </a:ext>
             </a:extLst>
           </p:cNvPr>
@@ -4584,7 +5348,7 @@
           <a:p>
             <a:r>
               <a:rPr lang="en-US" sz="2400" dirty="0"/>
-              <a:t>Sunday 15</a:t>
+              <a:t>Sunday 28</a:t>
             </a:r>
             <a:r>
               <a:rPr lang="en-US" sz="2400" baseline="30000" dirty="0"/>
@@ -4592,7 +5356,17 @@
             </a:r>
             <a:r>
               <a:rPr lang="en-US" sz="2400" dirty="0"/>
-              <a:t> of June, 9:00 to 12:30</a:t>
+              <a:t> of June, 8:35 to 12:</a:t>
+            </a:r>
+            <a:r>
+              <a:rPr lang="en-US" sz="2400" dirty="0">
+                <a:sym typeface="Wingdings" pitchFamily="2" charset="2"/>
+              </a:rPr>
+              <a:t>0</a:t>
+            </a:r>
+            <a:r>
+              <a:rPr lang="en-US" sz="2400" dirty="0"/>
+              <a:t>0</a:t>
             </a:r>
           </a:p>
         </p:txBody>
@@ -8610,7 +9384,7 @@
           <p:nvPr/>
         </p:nvPicPr>
         <p:blipFill>
-          <a:blip r:embed="rId4"/>
+          <a:blip r:embed="rId2"/>
           <a:stretch>
             <a:fillRect/>
           </a:stretch>
@@ -9305,7 +10079,7 @@
           <p:nvPr/>
         </p:nvPicPr>
         <p:blipFill>
-          <a:blip r:embed="rId4"/>
+          <a:blip r:embed="rId2"/>
           <a:stretch>
             <a:fillRect/>
           </a:stretch>
@@ -10002,7 +10776,7 @@
           <p:nvPr/>
         </p:nvPicPr>
         <p:blipFill>
-          <a:blip r:embed="rId4"/>
+          <a:blip r:embed="rId2"/>
           <a:stretch>
             <a:fillRect/>
           </a:stretch>
@@ -10706,7 +11480,7 @@
           <p:nvPr/>
         </p:nvPicPr>
         <p:blipFill>
-          <a:blip r:embed="rId4"/>
+          <a:blip r:embed="rId2"/>
           <a:stretch>
             <a:fillRect/>
           </a:stretch>
@@ -11435,15 +12209,23 @@
               <a:buNone/>
             </a:pPr>
             <a:r>
-              <a:rPr lang="en-US"/>
-              <a:t>A histogram of the event times for 100 instantiations </a:t>
+              <a:rPr lang="en-US" dirty="0"/>
+              <a:t>A histogram of </a:t>
+            </a:r>
+            <a:r>
+              <a:rPr lang="en-US" i="1" dirty="0"/>
+              <a:t>pooled</a:t>
+            </a:r>
+            <a:r>
+              <a:rPr lang="en-US" dirty="0"/>
+              <a:t> event times for 100 instantiations </a:t>
             </a:r>
           </a:p>
           <a:p>
             <a:pPr marL="0" indent="0">
               <a:buNone/>
             </a:pPr>
-            <a:endParaRPr lang="en-US"/>
+            <a:endParaRPr lang="en-US" dirty="0"/>
           </a:p>
         </p:txBody>
       </p:sp>
@@ -11971,8 +12753,8 @@
           </p:sp>
         </mc:Fallback>
       </mc:AlternateContent>
-      <mc:AlternateContent xmlns:mc="http://schemas.openxmlformats.org/markup-compatibility/2006">
-        <mc:Choice xmlns:a14="http://schemas.microsoft.com/office/drawing/2010/main" Requires="a14">
+      <mc:AlternateContent xmlns:mc="http://schemas.openxmlformats.org/markup-compatibility/2006" xmlns:a14="http://schemas.microsoft.com/office/drawing/2010/main">
+        <mc:Choice Requires="a14">
           <p:sp>
             <p:nvSpPr>
               <p:cNvPr id="8" name="Content Placeholder 7">
@@ -11992,7 +12774,7 @@
             <p:spPr/>
             <p:txBody>
               <a:bodyPr>
-                <a:normAutofit fontScale="92500" lnSpcReduction="10000"/>
+                <a:normAutofit fontScale="92500"/>
               </a:bodyPr>
               <a:lstStyle/>
               <a:p>
@@ -12063,13 +12845,13 @@
                 </a:pPr>
                 <a:r>
                   <a:rPr lang="en-US" dirty="0"/>
-                  <a:t>(It is the same quantity as the hazard function in survival analysis)</a:t>
+                  <a:t>(It is the same object as the hazard rate function in survival analysis)</a:t>
                 </a:r>
               </a:p>
             </p:txBody>
           </p:sp>
         </mc:Choice>
-        <mc:Fallback>
+        <mc:Fallback xmlns="">
           <p:sp>
             <p:nvSpPr>
               <p:cNvPr id="8" name="Content Placeholder 7">
@@ -12090,7 +12872,7 @@
               <a:blipFill>
                 <a:blip r:embed="rId3"/>
                 <a:stretch>
-                  <a:fillRect l="-2200" t="-2616"/>
+                  <a:fillRect l="-2200" t="-2035" r="-1711"/>
                 </a:stretch>
               </a:blipFill>
             </p:spPr>
@@ -12138,41 +12920,117 @@
           </a:xfrm>
         </p:spPr>
       </p:pic>
-      <p:sp>
-        <p:nvSpPr>
-          <p:cNvPr id="9" name="TextBox 8">
-            <a:extLst>
-              <a:ext uri="{FF2B5EF4-FFF2-40B4-BE49-F238E27FC236}">
-                <a16:creationId xmlns:a16="http://schemas.microsoft.com/office/drawing/2014/main" id="{712678A5-FEE8-C84F-2902-7532FE6EF28E}"/>
-              </a:ext>
-            </a:extLst>
-          </p:cNvPr>
-          <p:cNvSpPr txBox="1"/>
-          <p:nvPr/>
-        </p:nvSpPr>
-        <p:spPr>
-          <a:xfrm>
-            <a:off x="6333565" y="5903259"/>
-            <a:ext cx="5593977" cy="646331"/>
-          </a:xfrm>
-          <a:prstGeom prst="rect">
-            <a:avLst/>
-          </a:prstGeom>
-          <a:noFill/>
-        </p:spPr>
-        <p:txBody>
-          <a:bodyPr wrap="square" rtlCol="0">
-            <a:spAutoFit/>
-          </a:bodyPr>
-          <a:lstStyle/>
-          <a:p>
-            <a:r>
-              <a:rPr lang="en-US" i="1" dirty="0"/>
-              <a:t>The intensity function is scaled by the expected number of events in the interval to be on the same plot</a:t>
-            </a:r>
-          </a:p>
-        </p:txBody>
-      </p:sp>
+      <mc:AlternateContent xmlns:mc="http://schemas.openxmlformats.org/markup-compatibility/2006" xmlns:a14="http://schemas.microsoft.com/office/drawing/2010/main">
+        <mc:Choice Requires="a14">
+          <p:sp>
+            <p:nvSpPr>
+              <p:cNvPr id="9" name="TextBox 8">
+                <a:extLst>
+                  <a:ext uri="{FF2B5EF4-FFF2-40B4-BE49-F238E27FC236}">
+                    <a16:creationId xmlns:a16="http://schemas.microsoft.com/office/drawing/2014/main" id="{712678A5-FEE8-C84F-2902-7532FE6EF28E}"/>
+                  </a:ext>
+                </a:extLst>
+              </p:cNvPr>
+              <p:cNvSpPr txBox="1"/>
+              <p:nvPr/>
+            </p:nvSpPr>
+            <p:spPr>
+              <a:xfrm>
+                <a:off x="6333565" y="5903259"/>
+                <a:ext cx="5593977" cy="646331"/>
+              </a:xfrm>
+              <a:prstGeom prst="rect">
+                <a:avLst/>
+              </a:prstGeom>
+              <a:noFill/>
+            </p:spPr>
+            <p:txBody>
+              <a:bodyPr wrap="square" rtlCol="0">
+                <a:spAutoFit/>
+              </a:bodyPr>
+              <a:lstStyle/>
+              <a:p>
+                <a14:m>
+                  <m:oMath xmlns:m="http://schemas.openxmlformats.org/officeDocument/2006/math">
+                    <m:r>
+                      <a:rPr lang="en-US" i="1">
+                        <a:latin typeface="Cambria Math" panose="02040503050406030204" pitchFamily="18" charset="0"/>
+                      </a:rPr>
+                      <m:t>𝑓</m:t>
+                    </m:r>
+                    <m:r>
+                      <a:rPr lang="en-US" b="0" i="1" smtClean="0">
+                        <a:latin typeface="Cambria Math" panose="02040503050406030204" pitchFamily="18" charset="0"/>
+                      </a:rPr>
+                      <m:t>(</m:t>
+                    </m:r>
+                    <m:r>
+                      <a:rPr lang="en-US" b="0" i="1" smtClean="0">
+                        <a:latin typeface="Cambria Math" panose="02040503050406030204" pitchFamily="18" charset="0"/>
+                      </a:rPr>
+                      <m:t>𝑡</m:t>
+                    </m:r>
+                    <m:r>
+                      <a:rPr lang="en-US" b="0" i="1" smtClean="0">
+                        <a:latin typeface="Cambria Math" panose="02040503050406030204" pitchFamily="18" charset="0"/>
+                      </a:rPr>
+                      <m:t>): </m:t>
+                    </m:r>
+                  </m:oMath>
+                </a14:m>
+                <a:r>
+                  <a:rPr lang="en-US" i="1" dirty="0"/>
+                  <a:t>The intensity function scaled by the expected number of events in the interval</a:t>
+                </a:r>
+              </a:p>
+            </p:txBody>
+          </p:sp>
+        </mc:Choice>
+        <mc:Fallback xmlns="">
+          <p:sp>
+            <p:nvSpPr>
+              <p:cNvPr id="9" name="TextBox 8">
+                <a:extLst>
+                  <a:ext uri="{FF2B5EF4-FFF2-40B4-BE49-F238E27FC236}">
+                    <a16:creationId xmlns:a16="http://schemas.microsoft.com/office/drawing/2014/main" id="{712678A5-FEE8-C84F-2902-7532FE6EF28E}"/>
+                  </a:ext>
+                </a:extLst>
+              </p:cNvPr>
+              <p:cNvSpPr txBox="1">
+                <a:spLocks noRot="1" noChangeAspect="1" noMove="1" noResize="1" noEditPoints="1" noAdjustHandles="1" noChangeArrowheads="1" noChangeShapeType="1" noTextEdit="1"/>
+              </p:cNvSpPr>
+              <p:nvPr/>
+            </p:nvSpPr>
+            <p:spPr>
+              <a:xfrm>
+                <a:off x="6333565" y="5903259"/>
+                <a:ext cx="5593977" cy="646331"/>
+              </a:xfrm>
+              <a:prstGeom prst="rect">
+                <a:avLst/>
+              </a:prstGeom>
+              <a:blipFill>
+                <a:blip r:embed="rId5"/>
+                <a:stretch>
+                  <a:fillRect l="-905" t="-3846" b="-13462"/>
+                </a:stretch>
+              </a:blipFill>
+            </p:spPr>
+            <p:txBody>
+              <a:bodyPr/>
+              <a:lstStyle/>
+              <a:p>
+                <a:r>
+                  <a:rPr lang="en-US">
+                    <a:noFill/>
+                  </a:rPr>
+                  <a:t> </a:t>
+                </a:r>
+              </a:p>
+            </p:txBody>
+          </p:sp>
+        </mc:Fallback>
+      </mc:AlternateContent>
       <mc:AlternateContent xmlns:mc="http://schemas.openxmlformats.org/markup-compatibility/2006" xmlns:a14="http://schemas.microsoft.com/office/drawing/2010/main">
         <mc:Choice Requires="a14">
           <p:sp>
@@ -12189,8 +13047,8 @@
             </p:nvSpPr>
             <p:spPr>
               <a:xfrm>
-                <a:off x="10850962" y="3580777"/>
-                <a:ext cx="643959" cy="369332"/>
+                <a:off x="8644270" y="2496256"/>
+                <a:ext cx="1599412" cy="669094"/>
               </a:xfrm>
               <a:prstGeom prst="rect">
                 <a:avLst/>
@@ -12217,7 +13075,7 @@
                           </a:solidFill>
                           <a:latin typeface="Cambria Math" panose="02040503050406030204" pitchFamily="18" charset="0"/>
                         </a:rPr>
-                        <m:t>𝜆</m:t>
+                        <m:t>𝑓</m:t>
                       </m:r>
                       <m:d>
                         <m:dPr>
@@ -12242,6 +13100,98 @@
                           </m:r>
                         </m:e>
                       </m:d>
+                      <m:r>
+                        <a:rPr lang="en-US" b="0" i="1" smtClean="0">
+                          <a:solidFill>
+                            <a:srgbClr val="FF0000"/>
+                          </a:solidFill>
+                          <a:latin typeface="Cambria Math" panose="02040503050406030204" pitchFamily="18" charset="0"/>
+                        </a:rPr>
+                        <m:t>=</m:t>
+                      </m:r>
+                      <m:f>
+                        <m:fPr>
+                          <m:ctrlPr>
+                            <a:rPr lang="en-US" b="0" i="1" smtClean="0">
+                              <a:solidFill>
+                                <a:srgbClr val="FF0000"/>
+                              </a:solidFill>
+                              <a:latin typeface="Cambria Math" panose="02040503050406030204" pitchFamily="18" charset="0"/>
+                            </a:rPr>
+                          </m:ctrlPr>
+                        </m:fPr>
+                        <m:num>
+                          <m:r>
+                            <a:rPr lang="en-US" i="1">
+                              <a:solidFill>
+                                <a:srgbClr val="FF0000"/>
+                              </a:solidFill>
+                              <a:latin typeface="Cambria Math" panose="02040503050406030204" pitchFamily="18" charset="0"/>
+                            </a:rPr>
+                            <m:t>𝜆</m:t>
+                          </m:r>
+                          <m:d>
+                            <m:dPr>
+                              <m:ctrlPr>
+                                <a:rPr lang="en-US" i="1">
+                                  <a:solidFill>
+                                    <a:srgbClr val="FF0000"/>
+                                  </a:solidFill>
+                                  <a:latin typeface="Cambria Math" panose="02040503050406030204" pitchFamily="18" charset="0"/>
+                                </a:rPr>
+                              </m:ctrlPr>
+                            </m:dPr>
+                            <m:e>
+                              <m:r>
+                                <a:rPr lang="en-US" i="1">
+                                  <a:solidFill>
+                                    <a:srgbClr val="FF0000"/>
+                                  </a:solidFill>
+                                  <a:latin typeface="Cambria Math" panose="02040503050406030204" pitchFamily="18" charset="0"/>
+                                </a:rPr>
+                                <m:t>𝑡</m:t>
+                              </m:r>
+                            </m:e>
+                          </m:d>
+                        </m:num>
+                        <m:den>
+                          <m:r>
+                            <m:rPr>
+                              <m:sty m:val="p"/>
+                            </m:rPr>
+                            <a:rPr lang="en-US" b="0" i="0" smtClean="0">
+                              <a:solidFill>
+                                <a:srgbClr val="FF0000"/>
+                              </a:solidFill>
+                              <a:latin typeface="Cambria Math" panose="02040503050406030204" pitchFamily="18" charset="0"/>
+                            </a:rPr>
+                            <m:t>Λ</m:t>
+                          </m:r>
+                          <m:d>
+                            <m:dPr>
+                              <m:ctrlPr>
+                                <a:rPr lang="en-US" b="0" i="1" smtClean="0">
+                                  <a:solidFill>
+                                    <a:srgbClr val="FF0000"/>
+                                  </a:solidFill>
+                                  <a:latin typeface="Cambria Math" panose="02040503050406030204" pitchFamily="18" charset="0"/>
+                                </a:rPr>
+                              </m:ctrlPr>
+                            </m:dPr>
+                            <m:e>
+                              <m:r>
+                                <a:rPr lang="en-US" b="0" i="1" smtClean="0">
+                                  <a:solidFill>
+                                    <a:srgbClr val="FF0000"/>
+                                  </a:solidFill>
+                                  <a:latin typeface="Cambria Math" panose="02040503050406030204" pitchFamily="18" charset="0"/>
+                                </a:rPr>
+                                <m:t>0,5</m:t>
+                              </m:r>
+                            </m:e>
+                          </m:d>
+                        </m:den>
+                      </m:f>
                     </m:oMath>
                   </m:oMathPara>
                 </a14:m>
@@ -12271,14 +13221,14 @@
             </p:nvSpPr>
             <p:spPr>
               <a:xfrm>
-                <a:off x="10850962" y="3580777"/>
-                <a:ext cx="643959" cy="369332"/>
+                <a:off x="8644270" y="2496256"/>
+                <a:ext cx="1599412" cy="669094"/>
               </a:xfrm>
               <a:prstGeom prst="rect">
                 <a:avLst/>
               </a:prstGeom>
               <a:blipFill>
-                <a:blip r:embed="rId5"/>
+                <a:blip r:embed="rId6"/>
                 <a:stretch>
                   <a:fillRect/>
                 </a:stretch>
@@ -12539,1215 +13489,6 @@
       </p:grpSpPr>
       <p:sp>
         <p:nvSpPr>
-          <p:cNvPr id="5" name="Title 4">
-            <a:extLst>
-              <a:ext uri="{FF2B5EF4-FFF2-40B4-BE49-F238E27FC236}">
-                <a16:creationId xmlns:a16="http://schemas.microsoft.com/office/drawing/2014/main" id="{AA847EBF-6073-F229-4FCC-20C325052BF1}"/>
-              </a:ext>
-            </a:extLst>
-          </p:cNvPr>
-          <p:cNvSpPr>
-            <a:spLocks noGrp="1"/>
-          </p:cNvSpPr>
-          <p:nvPr>
-            <p:ph type="title"/>
-          </p:nvPr>
-        </p:nvSpPr>
-        <p:spPr/>
-        <p:txBody>
-          <a:bodyPr/>
-          <a:lstStyle/>
-          <a:p>
-            <a:r>
-              <a:rPr lang="en-US" dirty="0"/>
-              <a:t>All events vs earliest event in the example</a:t>
-            </a:r>
-          </a:p>
-        </p:txBody>
-      </p:sp>
-      <p:sp>
-        <p:nvSpPr>
-          <p:cNvPr id="2" name="Text Placeholder 1">
-            <a:extLst>
-              <a:ext uri="{FF2B5EF4-FFF2-40B4-BE49-F238E27FC236}">
-                <a16:creationId xmlns:a16="http://schemas.microsoft.com/office/drawing/2014/main" id="{D92138C8-46BE-7AE2-E687-732D59006BDF}"/>
-              </a:ext>
-            </a:extLst>
-          </p:cNvPr>
-          <p:cNvSpPr>
-            <a:spLocks noGrp="1"/>
-          </p:cNvSpPr>
-          <p:nvPr>
-            <p:ph type="body" idx="1"/>
-          </p:nvPr>
-        </p:nvSpPr>
-        <p:spPr/>
-        <p:txBody>
-          <a:bodyPr/>
-          <a:lstStyle/>
-          <a:p>
-            <a:r>
-              <a:rPr lang="en-US" dirty="0"/>
-              <a:t>All events, 10K instantiations</a:t>
-            </a:r>
-          </a:p>
-        </p:txBody>
-      </p:sp>
-      <p:sp>
-        <p:nvSpPr>
-          <p:cNvPr id="4" name="Text Placeholder 3">
-            <a:extLst>
-              <a:ext uri="{FF2B5EF4-FFF2-40B4-BE49-F238E27FC236}">
-                <a16:creationId xmlns:a16="http://schemas.microsoft.com/office/drawing/2014/main" id="{37E89C0F-59FB-904E-8031-358CA39577A0}"/>
-              </a:ext>
-            </a:extLst>
-          </p:cNvPr>
-          <p:cNvSpPr>
-            <a:spLocks noGrp="1"/>
-          </p:cNvSpPr>
-          <p:nvPr>
-            <p:ph type="body" sz="quarter" idx="3"/>
-          </p:nvPr>
-        </p:nvSpPr>
-        <p:spPr/>
-        <p:txBody>
-          <a:bodyPr/>
-          <a:lstStyle/>
-          <a:p>
-            <a:r>
-              <a:rPr lang="en-US" dirty="0"/>
-              <a:t>Earliest event, 10K instantiations</a:t>
-            </a:r>
-          </a:p>
-        </p:txBody>
-      </p:sp>
-      <p:pic>
-        <p:nvPicPr>
-          <p:cNvPr id="15" name="Content Placeholder 14">
-            <a:extLst>
-              <a:ext uri="{FF2B5EF4-FFF2-40B4-BE49-F238E27FC236}">
-                <a16:creationId xmlns:a16="http://schemas.microsoft.com/office/drawing/2014/main" id="{D4FB3511-E2B2-17F7-92E4-E490E9C8C5CE}"/>
-              </a:ext>
-            </a:extLst>
-          </p:cNvPr>
-          <p:cNvPicPr>
-            <a:picLocks noGrp="1" noChangeAspect="1"/>
-          </p:cNvPicPr>
-          <p:nvPr>
-            <p:ph sz="quarter" idx="4"/>
-          </p:nvPr>
-        </p:nvPicPr>
-        <p:blipFill>
-          <a:blip r:embed="rId2"/>
-          <a:stretch>
-            <a:fillRect/>
-          </a:stretch>
-        </p:blipFill>
-        <p:spPr>
-          <a:xfrm>
-            <a:off x="6477794" y="2975769"/>
-            <a:ext cx="4572000" cy="2743200"/>
-          </a:xfrm>
-        </p:spPr>
-      </p:pic>
-      <p:pic>
-        <p:nvPicPr>
-          <p:cNvPr id="13" name="Content Placeholder 12">
-            <a:extLst>
-              <a:ext uri="{FF2B5EF4-FFF2-40B4-BE49-F238E27FC236}">
-                <a16:creationId xmlns:a16="http://schemas.microsoft.com/office/drawing/2014/main" id="{64B0C565-3DA6-E21A-2A1B-B190CE0F406C}"/>
-              </a:ext>
-            </a:extLst>
-          </p:cNvPr>
-          <p:cNvPicPr>
-            <a:picLocks noGrp="1" noChangeAspect="1"/>
-          </p:cNvPicPr>
-          <p:nvPr>
-            <p:ph sz="half" idx="2"/>
-          </p:nvPr>
-        </p:nvPicPr>
-        <p:blipFill>
-          <a:blip r:embed="rId3"/>
-          <a:stretch>
-            <a:fillRect/>
-          </a:stretch>
-        </p:blipFill>
-        <p:spPr>
-          <a:xfrm>
-            <a:off x="1132681" y="2975769"/>
-            <a:ext cx="4572000" cy="2743200"/>
-          </a:xfrm>
-        </p:spPr>
-      </p:pic>
-      <p:sp>
-        <p:nvSpPr>
-          <p:cNvPr id="16" name="TextBox 15">
-            <a:extLst>
-              <a:ext uri="{FF2B5EF4-FFF2-40B4-BE49-F238E27FC236}">
-                <a16:creationId xmlns:a16="http://schemas.microsoft.com/office/drawing/2014/main" id="{63F00209-6310-DED9-4A57-CA921A82AC73}"/>
-              </a:ext>
-            </a:extLst>
-          </p:cNvPr>
-          <p:cNvSpPr txBox="1"/>
-          <p:nvPr/>
-        </p:nvSpPr>
-        <p:spPr>
-          <a:xfrm>
-            <a:off x="6477794" y="5866497"/>
-            <a:ext cx="5276193" cy="646331"/>
-          </a:xfrm>
-          <a:prstGeom prst="rect">
-            <a:avLst/>
-          </a:prstGeom>
-          <a:noFill/>
-        </p:spPr>
-        <p:txBody>
-          <a:bodyPr wrap="square" rtlCol="0">
-            <a:spAutoFit/>
-          </a:bodyPr>
-          <a:lstStyle/>
-          <a:p>
-            <a:r>
-              <a:rPr lang="en-US" i="1" dirty="0"/>
-              <a:t>The histogram of the earliest event times does not approach the shape of the intensity function</a:t>
-            </a:r>
-          </a:p>
-        </p:txBody>
-      </p:sp>
-      <mc:AlternateContent xmlns:mc="http://schemas.openxmlformats.org/markup-compatibility/2006" xmlns:a14="http://schemas.microsoft.com/office/drawing/2010/main">
-        <mc:Choice Requires="a14">
-          <p:sp>
-            <p:nvSpPr>
-              <p:cNvPr id="3" name="TextBox 2">
-                <a:extLst>
-                  <a:ext uri="{FF2B5EF4-FFF2-40B4-BE49-F238E27FC236}">
-                    <a16:creationId xmlns:a16="http://schemas.microsoft.com/office/drawing/2014/main" id="{40E8F999-9314-E353-EF79-123D18580CA9}"/>
-                  </a:ext>
-                </a:extLst>
-              </p:cNvPr>
-              <p:cNvSpPr txBox="1"/>
-              <p:nvPr/>
-            </p:nvSpPr>
-            <p:spPr>
-              <a:xfrm>
-                <a:off x="2858814" y="2975769"/>
-                <a:ext cx="2805960" cy="710194"/>
-              </a:xfrm>
-              <a:prstGeom prst="rect">
-                <a:avLst/>
-              </a:prstGeom>
-              <a:noFill/>
-            </p:spPr>
-            <p:txBody>
-              <a:bodyPr wrap="none" rtlCol="0">
-                <a:spAutoFit/>
-              </a:bodyPr>
-              <a:lstStyle/>
-              <a:p>
-                <a:pPr/>
-                <a14:m>
-                  <m:oMathPara xmlns:m="http://schemas.openxmlformats.org/officeDocument/2006/math">
-                    <m:oMathParaPr>
-                      <m:jc m:val="centerGroup"/>
-                    </m:oMathParaPr>
-                    <m:oMath xmlns:m="http://schemas.openxmlformats.org/officeDocument/2006/math">
-                      <m:r>
-                        <a:rPr lang="en-US" b="0" i="1" smtClean="0">
-                          <a:latin typeface="Cambria Math" panose="02040503050406030204" pitchFamily="18" charset="0"/>
-                        </a:rPr>
-                        <m:t>𝜆</m:t>
-                      </m:r>
-                      <m:d>
-                        <m:dPr>
-                          <m:ctrlPr>
-                            <a:rPr lang="en-US" b="0" i="1" smtClean="0">
-                              <a:latin typeface="Cambria Math" panose="02040503050406030204" pitchFamily="18" charset="0"/>
-                            </a:rPr>
-                          </m:ctrlPr>
-                        </m:dPr>
-                        <m:e>
-                          <m:r>
-                            <a:rPr lang="en-US" b="0" i="1" smtClean="0">
-                              <a:latin typeface="Cambria Math" panose="02040503050406030204" pitchFamily="18" charset="0"/>
-                            </a:rPr>
-                            <m:t>𝑡</m:t>
-                          </m:r>
-                        </m:e>
-                      </m:d>
-                      <m:r>
-                        <a:rPr lang="en-US" b="0" i="1" smtClean="0">
-                          <a:latin typeface="Cambria Math" panose="02040503050406030204" pitchFamily="18" charset="0"/>
-                        </a:rPr>
-                        <m:t>=</m:t>
-                      </m:r>
-                      <m:d>
-                        <m:dPr>
-                          <m:begChr m:val="{"/>
-                          <m:endChr m:val=""/>
-                          <m:ctrlPr>
-                            <a:rPr lang="en-US" b="0" i="1" smtClean="0">
-                              <a:latin typeface="Cambria Math" panose="02040503050406030204" pitchFamily="18" charset="0"/>
-                            </a:rPr>
-                          </m:ctrlPr>
-                        </m:dPr>
-                        <m:e>
-                          <m:eqArr>
-                            <m:eqArrPr>
-                              <m:ctrlPr>
-                                <a:rPr lang="en-US" b="0" i="1" smtClean="0">
-                                  <a:latin typeface="Cambria Math" panose="02040503050406030204" pitchFamily="18" charset="0"/>
-                                </a:rPr>
-                              </m:ctrlPr>
-                            </m:eqArrPr>
-                            <m:e>
-                              <m:r>
-                                <a:rPr lang="en-US" b="0" i="1" smtClean="0">
-                                  <a:latin typeface="Cambria Math" panose="02040503050406030204" pitchFamily="18" charset="0"/>
-                                </a:rPr>
-                                <m:t>1,      </m:t>
-                              </m:r>
-                              <m:r>
-                                <a:rPr lang="en-US" b="0" i="1" smtClean="0">
-                                  <a:latin typeface="Cambria Math" panose="02040503050406030204" pitchFamily="18" charset="0"/>
-                                </a:rPr>
-                                <m:t>𝑡</m:t>
-                              </m:r>
-                              <m:r>
-                                <a:rPr lang="en-US" b="0" i="1" smtClean="0">
-                                  <a:latin typeface="Cambria Math" panose="02040503050406030204" pitchFamily="18" charset="0"/>
-                                </a:rPr>
-                                <m:t>∈[1, 5]</m:t>
-                              </m:r>
-                            </m:e>
-                            <m:e>
-                              <m:r>
-                                <a:rPr lang="en-US" b="0" i="1" smtClean="0">
-                                  <a:latin typeface="Cambria Math" panose="02040503050406030204" pitchFamily="18" charset="0"/>
-                                </a:rPr>
-                                <m:t>&amp;0,   </m:t>
-                              </m:r>
-                              <m:r>
-                                <m:rPr>
-                                  <m:sty m:val="p"/>
-                                </m:rPr>
-                                <a:rPr lang="en-US" b="0" i="0" smtClean="0">
-                                  <a:latin typeface="Cambria Math" panose="02040503050406030204" pitchFamily="18" charset="0"/>
-                                </a:rPr>
-                                <m:t>elsewhere</m:t>
-                              </m:r>
-                              <m:r>
-                                <a:rPr lang="en-US" b="0" i="1" smtClean="0">
-                                  <a:latin typeface="Cambria Math" panose="02040503050406030204" pitchFamily="18" charset="0"/>
-                                </a:rPr>
-                                <m:t> </m:t>
-                              </m:r>
-                            </m:e>
-                          </m:eqArr>
-                        </m:e>
-                      </m:d>
-                    </m:oMath>
-                  </m:oMathPara>
-                </a14:m>
-                <a:endParaRPr lang="en-US" dirty="0"/>
-              </a:p>
-            </p:txBody>
-          </p:sp>
-        </mc:Choice>
-        <mc:Fallback xmlns="">
-          <p:sp>
-            <p:nvSpPr>
-              <p:cNvPr id="3" name="TextBox 2">
-                <a:extLst>
-                  <a:ext uri="{FF2B5EF4-FFF2-40B4-BE49-F238E27FC236}">
-                    <a16:creationId xmlns:a16="http://schemas.microsoft.com/office/drawing/2014/main" id="{40E8F999-9314-E353-EF79-123D18580CA9}"/>
-                  </a:ext>
-                </a:extLst>
-              </p:cNvPr>
-              <p:cNvSpPr txBox="1">
-                <a:spLocks noRot="1" noChangeAspect="1" noMove="1" noResize="1" noEditPoints="1" noAdjustHandles="1" noChangeArrowheads="1" noChangeShapeType="1" noTextEdit="1"/>
-              </p:cNvSpPr>
-              <p:nvPr/>
-            </p:nvSpPr>
-            <p:spPr>
-              <a:xfrm>
-                <a:off x="2858814" y="2975769"/>
-                <a:ext cx="2805960" cy="710194"/>
-              </a:xfrm>
-              <a:prstGeom prst="rect">
-                <a:avLst/>
-              </a:prstGeom>
-              <a:blipFill>
-                <a:blip r:embed="rId4"/>
-                <a:stretch>
-                  <a:fillRect l="-12217" t="-191228" b="-277193"/>
-                </a:stretch>
-              </a:blipFill>
-            </p:spPr>
-            <p:txBody>
-              <a:bodyPr/>
-              <a:lstStyle/>
-              <a:p>
-                <a:r>
-                  <a:rPr lang="en-US">
-                    <a:noFill/>
-                  </a:rPr>
-                  <a:t> </a:t>
-                </a:r>
-              </a:p>
-            </p:txBody>
-          </p:sp>
-        </mc:Fallback>
-      </mc:AlternateContent>
-      <mc:AlternateContent xmlns:mc="http://schemas.openxmlformats.org/markup-compatibility/2006" xmlns:a14="http://schemas.microsoft.com/office/drawing/2010/main">
-        <mc:Choice Requires="a14">
-          <p:sp>
-            <p:nvSpPr>
-              <p:cNvPr id="8" name="TextBox 7">
-                <a:extLst>
-                  <a:ext uri="{FF2B5EF4-FFF2-40B4-BE49-F238E27FC236}">
-                    <a16:creationId xmlns:a16="http://schemas.microsoft.com/office/drawing/2014/main" id="{3B7BBE7E-D1B8-CE55-25D7-E03FDD3191EF}"/>
-                  </a:ext>
-                </a:extLst>
-              </p:cNvPr>
-              <p:cNvSpPr txBox="1"/>
-              <p:nvPr/>
-            </p:nvSpPr>
-            <p:spPr>
-              <a:xfrm>
-                <a:off x="8243834" y="2975769"/>
-                <a:ext cx="2805960" cy="710194"/>
-              </a:xfrm>
-              <a:prstGeom prst="rect">
-                <a:avLst/>
-              </a:prstGeom>
-              <a:noFill/>
-            </p:spPr>
-            <p:txBody>
-              <a:bodyPr wrap="none" rtlCol="0">
-                <a:spAutoFit/>
-              </a:bodyPr>
-              <a:lstStyle/>
-              <a:p>
-                <a:pPr/>
-                <a14:m>
-                  <m:oMathPara xmlns:m="http://schemas.openxmlformats.org/officeDocument/2006/math">
-                    <m:oMathParaPr>
-                      <m:jc m:val="centerGroup"/>
-                    </m:oMathParaPr>
-                    <m:oMath xmlns:m="http://schemas.openxmlformats.org/officeDocument/2006/math">
-                      <m:r>
-                        <a:rPr lang="en-US" b="0" i="1" smtClean="0">
-                          <a:latin typeface="Cambria Math" panose="02040503050406030204" pitchFamily="18" charset="0"/>
-                        </a:rPr>
-                        <m:t>𝜆</m:t>
-                      </m:r>
-                      <m:d>
-                        <m:dPr>
-                          <m:ctrlPr>
-                            <a:rPr lang="en-US" b="0" i="1" smtClean="0">
-                              <a:latin typeface="Cambria Math" panose="02040503050406030204" pitchFamily="18" charset="0"/>
-                            </a:rPr>
-                          </m:ctrlPr>
-                        </m:dPr>
-                        <m:e>
-                          <m:r>
-                            <a:rPr lang="en-US" b="0" i="1" smtClean="0">
-                              <a:latin typeface="Cambria Math" panose="02040503050406030204" pitchFamily="18" charset="0"/>
-                            </a:rPr>
-                            <m:t>𝑡</m:t>
-                          </m:r>
-                        </m:e>
-                      </m:d>
-                      <m:r>
-                        <a:rPr lang="en-US" b="0" i="1" smtClean="0">
-                          <a:latin typeface="Cambria Math" panose="02040503050406030204" pitchFamily="18" charset="0"/>
-                        </a:rPr>
-                        <m:t>=</m:t>
-                      </m:r>
-                      <m:d>
-                        <m:dPr>
-                          <m:begChr m:val="{"/>
-                          <m:endChr m:val=""/>
-                          <m:ctrlPr>
-                            <a:rPr lang="en-US" b="0" i="1" smtClean="0">
-                              <a:latin typeface="Cambria Math" panose="02040503050406030204" pitchFamily="18" charset="0"/>
-                            </a:rPr>
-                          </m:ctrlPr>
-                        </m:dPr>
-                        <m:e>
-                          <m:eqArr>
-                            <m:eqArrPr>
-                              <m:ctrlPr>
-                                <a:rPr lang="en-US" b="0" i="1" smtClean="0">
-                                  <a:latin typeface="Cambria Math" panose="02040503050406030204" pitchFamily="18" charset="0"/>
-                                </a:rPr>
-                              </m:ctrlPr>
-                            </m:eqArrPr>
-                            <m:e>
-                              <m:r>
-                                <a:rPr lang="en-US" b="0" i="1" smtClean="0">
-                                  <a:latin typeface="Cambria Math" panose="02040503050406030204" pitchFamily="18" charset="0"/>
-                                </a:rPr>
-                                <m:t>1,      </m:t>
-                              </m:r>
-                              <m:r>
-                                <a:rPr lang="en-US" b="0" i="1" smtClean="0">
-                                  <a:latin typeface="Cambria Math" panose="02040503050406030204" pitchFamily="18" charset="0"/>
-                                </a:rPr>
-                                <m:t>𝑡</m:t>
-                              </m:r>
-                              <m:r>
-                                <a:rPr lang="en-US" b="0" i="1" smtClean="0">
-                                  <a:latin typeface="Cambria Math" panose="02040503050406030204" pitchFamily="18" charset="0"/>
-                                </a:rPr>
-                                <m:t>∈[1, 5]</m:t>
-                              </m:r>
-                            </m:e>
-                            <m:e>
-                              <m:r>
-                                <a:rPr lang="en-US" b="0" i="1" smtClean="0">
-                                  <a:latin typeface="Cambria Math" panose="02040503050406030204" pitchFamily="18" charset="0"/>
-                                </a:rPr>
-                                <m:t>&amp;0,   </m:t>
-                              </m:r>
-                              <m:r>
-                                <m:rPr>
-                                  <m:sty m:val="p"/>
-                                </m:rPr>
-                                <a:rPr lang="en-US" b="0" i="0" smtClean="0">
-                                  <a:latin typeface="Cambria Math" panose="02040503050406030204" pitchFamily="18" charset="0"/>
-                                </a:rPr>
-                                <m:t>elsewhere</m:t>
-                              </m:r>
-                              <m:r>
-                                <a:rPr lang="en-US" b="0" i="1" smtClean="0">
-                                  <a:latin typeface="Cambria Math" panose="02040503050406030204" pitchFamily="18" charset="0"/>
-                                </a:rPr>
-                                <m:t> </m:t>
-                              </m:r>
-                            </m:e>
-                          </m:eqArr>
-                        </m:e>
-                      </m:d>
-                    </m:oMath>
-                  </m:oMathPara>
-                </a14:m>
-                <a:endParaRPr lang="en-US" dirty="0"/>
-              </a:p>
-            </p:txBody>
-          </p:sp>
-        </mc:Choice>
-        <mc:Fallback xmlns="">
-          <p:sp>
-            <p:nvSpPr>
-              <p:cNvPr id="8" name="TextBox 7">
-                <a:extLst>
-                  <a:ext uri="{FF2B5EF4-FFF2-40B4-BE49-F238E27FC236}">
-                    <a16:creationId xmlns:a16="http://schemas.microsoft.com/office/drawing/2014/main" id="{3B7BBE7E-D1B8-CE55-25D7-E03FDD3191EF}"/>
-                  </a:ext>
-                </a:extLst>
-              </p:cNvPr>
-              <p:cNvSpPr txBox="1">
-                <a:spLocks noRot="1" noChangeAspect="1" noMove="1" noResize="1" noEditPoints="1" noAdjustHandles="1" noChangeArrowheads="1" noChangeShapeType="1" noTextEdit="1"/>
-              </p:cNvSpPr>
-              <p:nvPr/>
-            </p:nvSpPr>
-            <p:spPr>
-              <a:xfrm>
-                <a:off x="8243834" y="2975769"/>
-                <a:ext cx="2805960" cy="710194"/>
-              </a:xfrm>
-              <a:prstGeom prst="rect">
-                <a:avLst/>
-              </a:prstGeom>
-              <a:blipFill>
-                <a:blip r:embed="rId5"/>
-                <a:stretch>
-                  <a:fillRect l="-11659" t="-191228" b="-277193"/>
-                </a:stretch>
-              </a:blipFill>
-            </p:spPr>
-            <p:txBody>
-              <a:bodyPr/>
-              <a:lstStyle/>
-              <a:p>
-                <a:r>
-                  <a:rPr lang="en-US">
-                    <a:noFill/>
-                  </a:rPr>
-                  <a:t> </a:t>
-                </a:r>
-              </a:p>
-            </p:txBody>
-          </p:sp>
-        </mc:Fallback>
-      </mc:AlternateContent>
-    </p:spTree>
-    <p:extLst>
-      <p:ext uri="{BB962C8B-B14F-4D97-AF65-F5344CB8AC3E}">
-        <p14:creationId xmlns:p14="http://schemas.microsoft.com/office/powerpoint/2010/main" val="1751563445"/>
-      </p:ext>
-    </p:extLst>
-  </p:cSld>
-  <p:clrMapOvr>
-    <a:masterClrMapping/>
-  </p:clrMapOvr>
-</p:sld>
-</file>
-
-<file path=ppt/slides/slide27.xml><?xml version="1.0" encoding="utf-8"?>
-<p:sld xmlns:a="http://schemas.openxmlformats.org/drawingml/2006/main" xmlns:r="http://schemas.openxmlformats.org/officeDocument/2006/relationships" xmlns:p="http://schemas.openxmlformats.org/presentationml/2006/main">
-  <p:cSld>
-    <p:spTree>
-      <p:nvGrpSpPr>
-        <p:cNvPr id="1" name=""/>
-        <p:cNvGrpSpPr/>
-        <p:nvPr/>
-      </p:nvGrpSpPr>
-      <p:grpSpPr>
-        <a:xfrm>
-          <a:off x="0" y="0"/>
-          <a:ext cx="0" cy="0"/>
-          <a:chOff x="0" y="0"/>
-          <a:chExt cx="0" cy="0"/>
-        </a:xfrm>
-      </p:grpSpPr>
-      <p:sp>
-        <p:nvSpPr>
-          <p:cNvPr id="2" name="Title 1">
-            <a:extLst>
-              <a:ext uri="{FF2B5EF4-FFF2-40B4-BE49-F238E27FC236}">
-                <a16:creationId xmlns:a16="http://schemas.microsoft.com/office/drawing/2014/main" id="{BC06D8A5-F13F-01BB-43BD-C3D449F9AF3C}"/>
-              </a:ext>
-            </a:extLst>
-          </p:cNvPr>
-          <p:cNvSpPr>
-            <a:spLocks noGrp="1"/>
-          </p:cNvSpPr>
-          <p:nvPr>
-            <p:ph type="title"/>
-          </p:nvPr>
-        </p:nvSpPr>
-        <p:spPr/>
-        <p:txBody>
-          <a:bodyPr/>
-          <a:lstStyle/>
-          <a:p>
-            <a:r>
-              <a:rPr lang="en-US" dirty="0"/>
-              <a:t>All events vs earliest event, different example</a:t>
-            </a:r>
-          </a:p>
-        </p:txBody>
-      </p:sp>
-      <p:sp>
-        <p:nvSpPr>
-          <p:cNvPr id="5" name="Text Placeholder 4">
-            <a:extLst>
-              <a:ext uri="{FF2B5EF4-FFF2-40B4-BE49-F238E27FC236}">
-                <a16:creationId xmlns:a16="http://schemas.microsoft.com/office/drawing/2014/main" id="{42A16181-0D8A-71E2-C54B-CBF0E2E23642}"/>
-              </a:ext>
-            </a:extLst>
-          </p:cNvPr>
-          <p:cNvSpPr>
-            <a:spLocks noGrp="1"/>
-          </p:cNvSpPr>
-          <p:nvPr>
-            <p:ph type="body" idx="1"/>
-          </p:nvPr>
-        </p:nvSpPr>
-        <p:spPr/>
-        <p:txBody>
-          <a:bodyPr/>
-          <a:lstStyle/>
-          <a:p>
-            <a:r>
-              <a:rPr lang="en-US" dirty="0"/>
-              <a:t>All events, 100K instantiations</a:t>
-            </a:r>
-          </a:p>
-        </p:txBody>
-      </p:sp>
-      <p:pic>
-        <p:nvPicPr>
-          <p:cNvPr id="13" name="Content Placeholder 12">
-            <a:extLst>
-              <a:ext uri="{FF2B5EF4-FFF2-40B4-BE49-F238E27FC236}">
-                <a16:creationId xmlns:a16="http://schemas.microsoft.com/office/drawing/2014/main" id="{88774C88-5843-D1A4-4ACB-1F0045514924}"/>
-              </a:ext>
-            </a:extLst>
-          </p:cNvPr>
-          <p:cNvPicPr>
-            <a:picLocks noGrp="1" noChangeAspect="1"/>
-          </p:cNvPicPr>
-          <p:nvPr>
-            <p:ph sz="half" idx="2"/>
-          </p:nvPr>
-        </p:nvPicPr>
-        <p:blipFill>
-          <a:blip r:embed="rId2"/>
-          <a:stretch>
-            <a:fillRect/>
-          </a:stretch>
-        </p:blipFill>
-        <p:spPr>
-          <a:xfrm>
-            <a:off x="1132681" y="2975769"/>
-            <a:ext cx="4572000" cy="2743200"/>
-          </a:xfrm>
-        </p:spPr>
-      </p:pic>
-      <p:sp>
-        <p:nvSpPr>
-          <p:cNvPr id="6" name="Text Placeholder 5">
-            <a:extLst>
-              <a:ext uri="{FF2B5EF4-FFF2-40B4-BE49-F238E27FC236}">
-                <a16:creationId xmlns:a16="http://schemas.microsoft.com/office/drawing/2014/main" id="{C453CF1F-DCF6-010B-00A3-D14B6DE03F53}"/>
-              </a:ext>
-            </a:extLst>
-          </p:cNvPr>
-          <p:cNvSpPr>
-            <a:spLocks noGrp="1"/>
-          </p:cNvSpPr>
-          <p:nvPr>
-            <p:ph type="body" sz="quarter" idx="3"/>
-          </p:nvPr>
-        </p:nvSpPr>
-        <p:spPr/>
-        <p:txBody>
-          <a:bodyPr/>
-          <a:lstStyle/>
-          <a:p>
-            <a:r>
-              <a:rPr lang="en-US" dirty="0"/>
-              <a:t>Earliest event</a:t>
-            </a:r>
-            <a:r>
-              <a:rPr lang="en-US"/>
-              <a:t>, 100K </a:t>
-            </a:r>
-            <a:r>
-              <a:rPr lang="en-US" dirty="0"/>
-              <a:t>instantiations</a:t>
-            </a:r>
-          </a:p>
-        </p:txBody>
-      </p:sp>
-      <p:pic>
-        <p:nvPicPr>
-          <p:cNvPr id="11" name="Content Placeholder 10">
-            <a:extLst>
-              <a:ext uri="{FF2B5EF4-FFF2-40B4-BE49-F238E27FC236}">
-                <a16:creationId xmlns:a16="http://schemas.microsoft.com/office/drawing/2014/main" id="{E71AA7DB-A9D9-3134-282D-1C83B52E1074}"/>
-              </a:ext>
-            </a:extLst>
-          </p:cNvPr>
-          <p:cNvPicPr>
-            <a:picLocks noGrp="1" noChangeAspect="1"/>
-          </p:cNvPicPr>
-          <p:nvPr>
-            <p:ph sz="quarter" idx="4"/>
-          </p:nvPr>
-        </p:nvPicPr>
-        <p:blipFill>
-          <a:blip r:embed="rId3"/>
-          <a:stretch>
-            <a:fillRect/>
-          </a:stretch>
-        </p:blipFill>
-        <p:spPr>
-          <a:xfrm>
-            <a:off x="6477794" y="2975769"/>
-            <a:ext cx="4572000" cy="2743200"/>
-          </a:xfrm>
-        </p:spPr>
-      </p:pic>
-      <mc:AlternateContent xmlns:mc="http://schemas.openxmlformats.org/markup-compatibility/2006" xmlns:a14="http://schemas.microsoft.com/office/drawing/2010/main">
-        <mc:Choice Requires="a14">
-          <p:sp>
-            <p:nvSpPr>
-              <p:cNvPr id="15" name="TextBox 14">
-                <a:extLst>
-                  <a:ext uri="{FF2B5EF4-FFF2-40B4-BE49-F238E27FC236}">
-                    <a16:creationId xmlns:a16="http://schemas.microsoft.com/office/drawing/2014/main" id="{2CF761AA-5483-D85E-1694-E6D92A570723}"/>
-                  </a:ext>
-                </a:extLst>
-              </p:cNvPr>
-              <p:cNvSpPr txBox="1"/>
-              <p:nvPr/>
-            </p:nvSpPr>
-            <p:spPr>
-              <a:xfrm>
-                <a:off x="1941030" y="3041081"/>
-                <a:ext cx="3216329" cy="710194"/>
-              </a:xfrm>
-              <a:prstGeom prst="rect">
-                <a:avLst/>
-              </a:prstGeom>
-              <a:noFill/>
-            </p:spPr>
-            <p:txBody>
-              <a:bodyPr wrap="none" rtlCol="0">
-                <a:spAutoFit/>
-              </a:bodyPr>
-              <a:lstStyle/>
-              <a:p>
-                <a:pPr/>
-                <a14:m>
-                  <m:oMathPara xmlns:m="http://schemas.openxmlformats.org/officeDocument/2006/math">
-                    <m:oMathParaPr>
-                      <m:jc m:val="centerGroup"/>
-                    </m:oMathParaPr>
-                    <m:oMath xmlns:m="http://schemas.openxmlformats.org/officeDocument/2006/math">
-                      <m:r>
-                        <a:rPr lang="en-US" b="0" i="1" smtClean="0">
-                          <a:latin typeface="Cambria Math" panose="02040503050406030204" pitchFamily="18" charset="0"/>
-                        </a:rPr>
-                        <m:t>𝜆</m:t>
-                      </m:r>
-                      <m:d>
-                        <m:dPr>
-                          <m:ctrlPr>
-                            <a:rPr lang="en-US" b="0" i="1" smtClean="0">
-                              <a:latin typeface="Cambria Math" panose="02040503050406030204" pitchFamily="18" charset="0"/>
-                            </a:rPr>
-                          </m:ctrlPr>
-                        </m:dPr>
-                        <m:e>
-                          <m:r>
-                            <a:rPr lang="en-US" b="0" i="1" smtClean="0">
-                              <a:latin typeface="Cambria Math" panose="02040503050406030204" pitchFamily="18" charset="0"/>
-                            </a:rPr>
-                            <m:t>𝑡</m:t>
-                          </m:r>
-                        </m:e>
-                      </m:d>
-                      <m:r>
-                        <a:rPr lang="en-US" b="0" i="1" smtClean="0">
-                          <a:latin typeface="Cambria Math" panose="02040503050406030204" pitchFamily="18" charset="0"/>
-                        </a:rPr>
-                        <m:t>=</m:t>
-                      </m:r>
-                      <m:d>
-                        <m:dPr>
-                          <m:begChr m:val="{"/>
-                          <m:endChr m:val=""/>
-                          <m:ctrlPr>
-                            <a:rPr lang="en-US" b="0" i="1" smtClean="0">
-                              <a:latin typeface="Cambria Math" panose="02040503050406030204" pitchFamily="18" charset="0"/>
-                            </a:rPr>
-                          </m:ctrlPr>
-                        </m:dPr>
-                        <m:e>
-                          <m:eqArr>
-                            <m:eqArrPr>
-                              <m:ctrlPr>
-                                <a:rPr lang="en-US" b="0" i="1" smtClean="0">
-                                  <a:latin typeface="Cambria Math" panose="02040503050406030204" pitchFamily="18" charset="0"/>
-                                </a:rPr>
-                              </m:ctrlPr>
-                            </m:eqArrPr>
-                            <m:e>
-                              <m:sSup>
-                                <m:sSupPr>
-                                  <m:ctrlPr>
-                                    <a:rPr lang="en-US" b="0" i="1" smtClean="0">
-                                      <a:latin typeface="Cambria Math" panose="02040503050406030204" pitchFamily="18" charset="0"/>
-                                    </a:rPr>
-                                  </m:ctrlPr>
-                                </m:sSupPr>
-                                <m:e>
-                                  <m:r>
-                                    <a:rPr lang="en-US" b="0" i="1" smtClean="0">
-                                      <a:latin typeface="Cambria Math" panose="02040503050406030204" pitchFamily="18" charset="0"/>
-                                    </a:rPr>
-                                    <m:t>𝑒</m:t>
-                                  </m:r>
-                                </m:e>
-                                <m:sup>
-                                  <m:r>
-                                    <a:rPr lang="en-US" b="0" i="1" smtClean="0">
-                                      <a:latin typeface="Cambria Math" panose="02040503050406030204" pitchFamily="18" charset="0"/>
-                                    </a:rPr>
-                                    <m:t>−1+</m:t>
-                                  </m:r>
-                                  <m:r>
-                                    <a:rPr lang="en-US" b="0" i="1" smtClean="0">
-                                      <a:latin typeface="Cambria Math" panose="02040503050406030204" pitchFamily="18" charset="0"/>
-                                    </a:rPr>
-                                    <m:t>𝑡</m:t>
-                                  </m:r>
-                                  <m:r>
-                                    <a:rPr lang="en-US" b="0" i="1" smtClean="0">
-                                      <a:latin typeface="Cambria Math" panose="02040503050406030204" pitchFamily="18" charset="0"/>
-                                    </a:rPr>
-                                    <m:t>/2</m:t>
-                                  </m:r>
-                                </m:sup>
-                              </m:sSup>
-                              <m:r>
-                                <a:rPr lang="en-US" b="0" i="1" smtClean="0">
-                                  <a:latin typeface="Cambria Math" panose="02040503050406030204" pitchFamily="18" charset="0"/>
-                                </a:rPr>
-                                <m:t>,  </m:t>
-                              </m:r>
-                              <m:r>
-                                <a:rPr lang="en-US" b="0" i="1" smtClean="0">
-                                  <a:latin typeface="Cambria Math" panose="02040503050406030204" pitchFamily="18" charset="0"/>
-                                </a:rPr>
-                                <m:t>𝑡</m:t>
-                              </m:r>
-                              <m:r>
-                                <a:rPr lang="en-US" b="0" i="1" smtClean="0">
-                                  <a:latin typeface="Cambria Math" panose="02040503050406030204" pitchFamily="18" charset="0"/>
-                                </a:rPr>
-                                <m:t>∈[1, 5]</m:t>
-                              </m:r>
-                            </m:e>
-                            <m:e>
-                              <m:r>
-                                <a:rPr lang="en-US" b="0" i="1" smtClean="0">
-                                  <a:latin typeface="Cambria Math" panose="02040503050406030204" pitchFamily="18" charset="0"/>
-                                </a:rPr>
-                                <m:t>&amp;0,   </m:t>
-                              </m:r>
-                              <m:r>
-                                <a:rPr lang="en-US" b="0" i="0" smtClean="0">
-                                  <a:latin typeface="Cambria Math" panose="02040503050406030204" pitchFamily="18" charset="0"/>
-                                </a:rPr>
-                                <m:t>       </m:t>
-                              </m:r>
-                              <m:r>
-                                <m:rPr>
-                                  <m:sty m:val="p"/>
-                                </m:rPr>
-                                <a:rPr lang="en-US" b="0" i="0" smtClean="0">
-                                  <a:latin typeface="Cambria Math" panose="02040503050406030204" pitchFamily="18" charset="0"/>
-                                </a:rPr>
-                                <m:t>elsewhere</m:t>
-                              </m:r>
-                              <m:r>
-                                <a:rPr lang="en-US" b="0" i="1" smtClean="0">
-                                  <a:latin typeface="Cambria Math" panose="02040503050406030204" pitchFamily="18" charset="0"/>
-                                </a:rPr>
-                                <m:t> </m:t>
-                              </m:r>
-                            </m:e>
-                          </m:eqArr>
-                        </m:e>
-                      </m:d>
-                    </m:oMath>
-                  </m:oMathPara>
-                </a14:m>
-                <a:endParaRPr lang="en-US" dirty="0"/>
-              </a:p>
-            </p:txBody>
-          </p:sp>
-        </mc:Choice>
-        <mc:Fallback xmlns="">
-          <p:sp>
-            <p:nvSpPr>
-              <p:cNvPr id="15" name="TextBox 14">
-                <a:extLst>
-                  <a:ext uri="{FF2B5EF4-FFF2-40B4-BE49-F238E27FC236}">
-                    <a16:creationId xmlns:a16="http://schemas.microsoft.com/office/drawing/2014/main" id="{2CF761AA-5483-D85E-1694-E6D92A570723}"/>
-                  </a:ext>
-                </a:extLst>
-              </p:cNvPr>
-              <p:cNvSpPr txBox="1">
-                <a:spLocks noRot="1" noChangeAspect="1" noMove="1" noResize="1" noEditPoints="1" noAdjustHandles="1" noChangeArrowheads="1" noChangeShapeType="1" noTextEdit="1"/>
-              </p:cNvSpPr>
-              <p:nvPr/>
-            </p:nvSpPr>
-            <p:spPr>
-              <a:xfrm>
-                <a:off x="1941030" y="3041081"/>
-                <a:ext cx="3216329" cy="710194"/>
-              </a:xfrm>
-              <a:prstGeom prst="rect">
-                <a:avLst/>
-              </a:prstGeom>
-              <a:blipFill>
-                <a:blip r:embed="rId4"/>
-                <a:stretch>
-                  <a:fillRect l="-9804" t="-189474" b="-277193"/>
-                </a:stretch>
-              </a:blipFill>
-            </p:spPr>
-            <p:txBody>
-              <a:bodyPr/>
-              <a:lstStyle/>
-              <a:p>
-                <a:r>
-                  <a:rPr lang="en-US">
-                    <a:noFill/>
-                  </a:rPr>
-                  <a:t> </a:t>
-                </a:r>
-              </a:p>
-            </p:txBody>
-          </p:sp>
-        </mc:Fallback>
-      </mc:AlternateContent>
-      <mc:AlternateContent xmlns:mc="http://schemas.openxmlformats.org/markup-compatibility/2006" xmlns:a14="http://schemas.microsoft.com/office/drawing/2010/main">
-        <mc:Choice Requires="a14">
-          <p:sp>
-            <p:nvSpPr>
-              <p:cNvPr id="16" name="TextBox 15">
-                <a:extLst>
-                  <a:ext uri="{FF2B5EF4-FFF2-40B4-BE49-F238E27FC236}">
-                    <a16:creationId xmlns:a16="http://schemas.microsoft.com/office/drawing/2014/main" id="{53C1EBB8-AE8B-D445-3F7B-B47D31AF2FFE}"/>
-                  </a:ext>
-                </a:extLst>
-              </p:cNvPr>
-              <p:cNvSpPr txBox="1"/>
-              <p:nvPr/>
-            </p:nvSpPr>
-            <p:spPr>
-              <a:xfrm>
-                <a:off x="8575048" y="3041081"/>
-                <a:ext cx="3216329" cy="710194"/>
-              </a:xfrm>
-              <a:prstGeom prst="rect">
-                <a:avLst/>
-              </a:prstGeom>
-              <a:noFill/>
-            </p:spPr>
-            <p:txBody>
-              <a:bodyPr wrap="none" rtlCol="0">
-                <a:spAutoFit/>
-              </a:bodyPr>
-              <a:lstStyle/>
-              <a:p>
-                <a:pPr/>
-                <a14:m>
-                  <m:oMathPara xmlns:m="http://schemas.openxmlformats.org/officeDocument/2006/math">
-                    <m:oMathParaPr>
-                      <m:jc m:val="centerGroup"/>
-                    </m:oMathParaPr>
-                    <m:oMath xmlns:m="http://schemas.openxmlformats.org/officeDocument/2006/math">
-                      <m:r>
-                        <a:rPr lang="en-US" b="0" i="1" smtClean="0">
-                          <a:latin typeface="Cambria Math" panose="02040503050406030204" pitchFamily="18" charset="0"/>
-                        </a:rPr>
-                        <m:t>𝜆</m:t>
-                      </m:r>
-                      <m:d>
-                        <m:dPr>
-                          <m:ctrlPr>
-                            <a:rPr lang="en-US" b="0" i="1" smtClean="0">
-                              <a:latin typeface="Cambria Math" panose="02040503050406030204" pitchFamily="18" charset="0"/>
-                            </a:rPr>
-                          </m:ctrlPr>
-                        </m:dPr>
-                        <m:e>
-                          <m:r>
-                            <a:rPr lang="en-US" b="0" i="1" smtClean="0">
-                              <a:latin typeface="Cambria Math" panose="02040503050406030204" pitchFamily="18" charset="0"/>
-                            </a:rPr>
-                            <m:t>𝑡</m:t>
-                          </m:r>
-                        </m:e>
-                      </m:d>
-                      <m:r>
-                        <a:rPr lang="en-US" b="0" i="1" smtClean="0">
-                          <a:latin typeface="Cambria Math" panose="02040503050406030204" pitchFamily="18" charset="0"/>
-                        </a:rPr>
-                        <m:t>=</m:t>
-                      </m:r>
-                      <m:d>
-                        <m:dPr>
-                          <m:begChr m:val="{"/>
-                          <m:endChr m:val=""/>
-                          <m:ctrlPr>
-                            <a:rPr lang="en-US" b="0" i="1" smtClean="0">
-                              <a:latin typeface="Cambria Math" panose="02040503050406030204" pitchFamily="18" charset="0"/>
-                            </a:rPr>
-                          </m:ctrlPr>
-                        </m:dPr>
-                        <m:e>
-                          <m:eqArr>
-                            <m:eqArrPr>
-                              <m:ctrlPr>
-                                <a:rPr lang="en-US" b="0" i="1" smtClean="0">
-                                  <a:latin typeface="Cambria Math" panose="02040503050406030204" pitchFamily="18" charset="0"/>
-                                </a:rPr>
-                              </m:ctrlPr>
-                            </m:eqArrPr>
-                            <m:e>
-                              <m:sSup>
-                                <m:sSupPr>
-                                  <m:ctrlPr>
-                                    <a:rPr lang="en-US" b="0" i="1" smtClean="0">
-                                      <a:latin typeface="Cambria Math" panose="02040503050406030204" pitchFamily="18" charset="0"/>
-                                    </a:rPr>
-                                  </m:ctrlPr>
-                                </m:sSupPr>
-                                <m:e>
-                                  <m:r>
-                                    <a:rPr lang="en-US" b="0" i="1" smtClean="0">
-                                      <a:latin typeface="Cambria Math" panose="02040503050406030204" pitchFamily="18" charset="0"/>
-                                    </a:rPr>
-                                    <m:t>𝑒</m:t>
-                                  </m:r>
-                                </m:e>
-                                <m:sup>
-                                  <m:r>
-                                    <a:rPr lang="en-US" b="0" i="1" smtClean="0">
-                                      <a:latin typeface="Cambria Math" panose="02040503050406030204" pitchFamily="18" charset="0"/>
-                                    </a:rPr>
-                                    <m:t>−1+</m:t>
-                                  </m:r>
-                                  <m:r>
-                                    <a:rPr lang="en-US" b="0" i="1" smtClean="0">
-                                      <a:latin typeface="Cambria Math" panose="02040503050406030204" pitchFamily="18" charset="0"/>
-                                    </a:rPr>
-                                    <m:t>𝑡</m:t>
-                                  </m:r>
-                                  <m:r>
-                                    <a:rPr lang="en-US" b="0" i="1" smtClean="0">
-                                      <a:latin typeface="Cambria Math" panose="02040503050406030204" pitchFamily="18" charset="0"/>
-                                    </a:rPr>
-                                    <m:t>/2</m:t>
-                                  </m:r>
-                                </m:sup>
-                              </m:sSup>
-                              <m:r>
-                                <a:rPr lang="en-US" b="0" i="1" smtClean="0">
-                                  <a:latin typeface="Cambria Math" panose="02040503050406030204" pitchFamily="18" charset="0"/>
-                                </a:rPr>
-                                <m:t>,  </m:t>
-                              </m:r>
-                              <m:r>
-                                <a:rPr lang="en-US" b="0" i="1" smtClean="0">
-                                  <a:latin typeface="Cambria Math" panose="02040503050406030204" pitchFamily="18" charset="0"/>
-                                </a:rPr>
-                                <m:t>𝑡</m:t>
-                              </m:r>
-                              <m:r>
-                                <a:rPr lang="en-US" b="0" i="1" smtClean="0">
-                                  <a:latin typeface="Cambria Math" panose="02040503050406030204" pitchFamily="18" charset="0"/>
-                                </a:rPr>
-                                <m:t>∈[1, 5]</m:t>
-                              </m:r>
-                            </m:e>
-                            <m:e>
-                              <m:r>
-                                <a:rPr lang="en-US" b="0" i="1" smtClean="0">
-                                  <a:latin typeface="Cambria Math" panose="02040503050406030204" pitchFamily="18" charset="0"/>
-                                </a:rPr>
-                                <m:t>&amp;0,   </m:t>
-                              </m:r>
-                              <m:r>
-                                <a:rPr lang="en-US" b="0" i="0" smtClean="0">
-                                  <a:latin typeface="Cambria Math" panose="02040503050406030204" pitchFamily="18" charset="0"/>
-                                </a:rPr>
-                                <m:t>       </m:t>
-                              </m:r>
-                              <m:r>
-                                <m:rPr>
-                                  <m:sty m:val="p"/>
-                                </m:rPr>
-                                <a:rPr lang="en-US" b="0" i="0" smtClean="0">
-                                  <a:latin typeface="Cambria Math" panose="02040503050406030204" pitchFamily="18" charset="0"/>
-                                </a:rPr>
-                                <m:t>elsewhere</m:t>
-                              </m:r>
-                              <m:r>
-                                <a:rPr lang="en-US" b="0" i="1" smtClean="0">
-                                  <a:latin typeface="Cambria Math" panose="02040503050406030204" pitchFamily="18" charset="0"/>
-                                </a:rPr>
-                                <m:t> </m:t>
-                              </m:r>
-                            </m:e>
-                          </m:eqArr>
-                        </m:e>
-                      </m:d>
-                    </m:oMath>
-                  </m:oMathPara>
-                </a14:m>
-                <a:endParaRPr lang="en-US" dirty="0"/>
-              </a:p>
-            </p:txBody>
-          </p:sp>
-        </mc:Choice>
-        <mc:Fallback xmlns="">
-          <p:sp>
-            <p:nvSpPr>
-              <p:cNvPr id="16" name="TextBox 15">
-                <a:extLst>
-                  <a:ext uri="{FF2B5EF4-FFF2-40B4-BE49-F238E27FC236}">
-                    <a16:creationId xmlns:a16="http://schemas.microsoft.com/office/drawing/2014/main" id="{53C1EBB8-AE8B-D445-3F7B-B47D31AF2FFE}"/>
-                  </a:ext>
-                </a:extLst>
-              </p:cNvPr>
-              <p:cNvSpPr txBox="1">
-                <a:spLocks noRot="1" noChangeAspect="1" noMove="1" noResize="1" noEditPoints="1" noAdjustHandles="1" noChangeArrowheads="1" noChangeShapeType="1" noTextEdit="1"/>
-              </p:cNvSpPr>
-              <p:nvPr/>
-            </p:nvSpPr>
-            <p:spPr>
-              <a:xfrm>
-                <a:off x="8575048" y="3041081"/>
-                <a:ext cx="3216329" cy="710194"/>
-              </a:xfrm>
-              <a:prstGeom prst="rect">
-                <a:avLst/>
-              </a:prstGeom>
-              <a:blipFill>
-                <a:blip r:embed="rId5"/>
-                <a:stretch>
-                  <a:fillRect l="-9843" t="-189474" b="-277193"/>
-                </a:stretch>
-              </a:blipFill>
-            </p:spPr>
-            <p:txBody>
-              <a:bodyPr/>
-              <a:lstStyle/>
-              <a:p>
-                <a:r>
-                  <a:rPr lang="en-US">
-                    <a:noFill/>
-                  </a:rPr>
-                  <a:t> </a:t>
-                </a:r>
-              </a:p>
-            </p:txBody>
-          </p:sp>
-        </mc:Fallback>
-      </mc:AlternateContent>
-    </p:spTree>
-    <p:extLst>
-      <p:ext uri="{BB962C8B-B14F-4D97-AF65-F5344CB8AC3E}">
-        <p14:creationId xmlns:p14="http://schemas.microsoft.com/office/powerpoint/2010/main" val="3999546503"/>
-      </p:ext>
-    </p:extLst>
-  </p:cSld>
-  <p:clrMapOvr>
-    <a:masterClrMapping/>
-  </p:clrMapOvr>
-</p:sld>
-</file>
-
-<file path=ppt/slides/slide28.xml><?xml version="1.0" encoding="utf-8"?>
-<p:sld xmlns:a="http://schemas.openxmlformats.org/drawingml/2006/main" xmlns:r="http://schemas.openxmlformats.org/officeDocument/2006/relationships" xmlns:p="http://schemas.openxmlformats.org/presentationml/2006/main">
-  <p:cSld>
-    <p:spTree>
-      <p:nvGrpSpPr>
-        <p:cNvPr id="1" name=""/>
-        <p:cNvGrpSpPr/>
-        <p:nvPr/>
-      </p:nvGrpSpPr>
-      <p:grpSpPr>
-        <a:xfrm>
-          <a:off x="0" y="0"/>
-          <a:ext cx="0" cy="0"/>
-          <a:chOff x="0" y="0"/>
-          <a:chExt cx="0" cy="0"/>
-        </a:xfrm>
-      </p:grpSpPr>
-      <p:sp>
-        <p:nvSpPr>
           <p:cNvPr id="7" name="Title 6">
             <a:extLst>
               <a:ext uri="{FF2B5EF4-FFF2-40B4-BE49-F238E27FC236}">
@@ -13771,7 +13512,7 @@
           <a:p>
             <a:r>
               <a:rPr lang="en-US" dirty="0"/>
-              <a:t>The three important functions </a:t>
+              <a:t>The three important objects </a:t>
             </a:r>
           </a:p>
         </p:txBody>
@@ -14256,7 +13997,7 @@
 </p:sld>
 </file>
 
-<file path=ppt/slides/slide29.xml><?xml version="1.0" encoding="utf-8"?>
+<file path=ppt/slides/slide27.xml><?xml version="1.0" encoding="utf-8"?>
 <p:sld xmlns:a="http://schemas.openxmlformats.org/drawingml/2006/main" xmlns:r="http://schemas.openxmlformats.org/officeDocument/2006/relationships" xmlns:p="http://schemas.openxmlformats.org/presentationml/2006/main">
   <p:cSld>
     <p:spTree>
@@ -14823,90 +14564,7 @@
 </p:sld>
 </file>
 
-<file path=ppt/slides/slide3.xml><?xml version="1.0" encoding="utf-8"?>
-<p:sld xmlns:a="http://schemas.openxmlformats.org/drawingml/2006/main" xmlns:r="http://schemas.openxmlformats.org/officeDocument/2006/relationships" xmlns:p="http://schemas.openxmlformats.org/presentationml/2006/main">
-  <p:cSld>
-    <p:spTree>
-      <p:nvGrpSpPr>
-        <p:cNvPr id="1" name=""/>
-        <p:cNvGrpSpPr/>
-        <p:nvPr/>
-      </p:nvGrpSpPr>
-      <p:grpSpPr>
-        <a:xfrm>
-          <a:off x="0" y="0"/>
-          <a:ext cx="0" cy="0"/>
-          <a:chOff x="0" y="0"/>
-          <a:chExt cx="0" cy="0"/>
-        </a:xfrm>
-      </p:grpSpPr>
-      <p:sp>
-        <p:nvSpPr>
-          <p:cNvPr id="2" name="Title 1">
-            <a:extLst>
-              <a:ext uri="{FF2B5EF4-FFF2-40B4-BE49-F238E27FC236}">
-                <a16:creationId xmlns:a16="http://schemas.microsoft.com/office/drawing/2014/main" id="{504B3628-7107-EFB3-3A28-DE8228B6892C}"/>
-              </a:ext>
-            </a:extLst>
-          </p:cNvPr>
-          <p:cNvSpPr>
-            <a:spLocks noGrp="1"/>
-          </p:cNvSpPr>
-          <p:nvPr>
-            <p:ph type="title"/>
-          </p:nvPr>
-        </p:nvSpPr>
-        <p:spPr/>
-        <p:txBody>
-          <a:bodyPr/>
-          <a:lstStyle/>
-          <a:p>
-            <a:r>
-              <a:rPr lang="en-US"/>
-              <a:t>The building block</a:t>
-            </a:r>
-          </a:p>
-        </p:txBody>
-      </p:sp>
-      <p:sp>
-        <p:nvSpPr>
-          <p:cNvPr id="3" name="Text Placeholder 2">
-            <a:extLst>
-              <a:ext uri="{FF2B5EF4-FFF2-40B4-BE49-F238E27FC236}">
-                <a16:creationId xmlns:a16="http://schemas.microsoft.com/office/drawing/2014/main" id="{E6B3ED44-39A1-4EB4-BF7E-62DC2090B919}"/>
-              </a:ext>
-            </a:extLst>
-          </p:cNvPr>
-          <p:cNvSpPr>
-            <a:spLocks noGrp="1"/>
-          </p:cNvSpPr>
-          <p:nvPr>
-            <p:ph type="body" idx="1"/>
-          </p:nvPr>
-        </p:nvSpPr>
-        <p:spPr/>
-        <p:txBody>
-          <a:bodyPr/>
-          <a:lstStyle/>
-          <a:p>
-            <a:endParaRPr lang="en-US"/>
-          </a:p>
-        </p:txBody>
-      </p:sp>
-    </p:spTree>
-    <p:extLst>
-      <p:ext uri="{BB962C8B-B14F-4D97-AF65-F5344CB8AC3E}">
-        <p14:creationId xmlns:p14="http://schemas.microsoft.com/office/powerpoint/2010/main" val="2259516499"/>
-      </p:ext>
-    </p:extLst>
-  </p:cSld>
-  <p:clrMapOvr>
-    <a:masterClrMapping/>
-  </p:clrMapOvr>
-</p:sld>
-</file>
-
-<file path=ppt/slides/slide30.xml><?xml version="1.0" encoding="utf-8"?>
+<file path=ppt/slides/slide28.xml><?xml version="1.0" encoding="utf-8"?>
 <p:sld xmlns:a="http://schemas.openxmlformats.org/drawingml/2006/main" xmlns:r="http://schemas.openxmlformats.org/officeDocument/2006/relationships" xmlns:p="http://schemas.openxmlformats.org/presentationml/2006/main">
   <p:cSld>
     <p:spTree>
@@ -15717,7 +15375,7 @@
 </p:sld>
 </file>
 
-<file path=ppt/slides/slide31.xml><?xml version="1.0" encoding="utf-8"?>
+<file path=ppt/slides/slide29.xml><?xml version="1.0" encoding="utf-8"?>
 <p:sld xmlns:a="http://schemas.openxmlformats.org/drawingml/2006/main" xmlns:r="http://schemas.openxmlformats.org/officeDocument/2006/relationships" xmlns:p="http://schemas.openxmlformats.org/presentationml/2006/main">
   <p:cSld>
     <p:spTree>
@@ -16946,7 +16604,90 @@
 </p:sld>
 </file>
 
-<file path=ppt/slides/slide32.xml><?xml version="1.0" encoding="utf-8"?>
+<file path=ppt/slides/slide3.xml><?xml version="1.0" encoding="utf-8"?>
+<p:sld xmlns:a="http://schemas.openxmlformats.org/drawingml/2006/main" xmlns:r="http://schemas.openxmlformats.org/officeDocument/2006/relationships" xmlns:p="http://schemas.openxmlformats.org/presentationml/2006/main">
+  <p:cSld>
+    <p:spTree>
+      <p:nvGrpSpPr>
+        <p:cNvPr id="1" name=""/>
+        <p:cNvGrpSpPr/>
+        <p:nvPr/>
+      </p:nvGrpSpPr>
+      <p:grpSpPr>
+        <a:xfrm>
+          <a:off x="0" y="0"/>
+          <a:ext cx="0" cy="0"/>
+          <a:chOff x="0" y="0"/>
+          <a:chExt cx="0" cy="0"/>
+        </a:xfrm>
+      </p:grpSpPr>
+      <p:sp>
+        <p:nvSpPr>
+          <p:cNvPr id="2" name="Title 1">
+            <a:extLst>
+              <a:ext uri="{FF2B5EF4-FFF2-40B4-BE49-F238E27FC236}">
+                <a16:creationId xmlns:a16="http://schemas.microsoft.com/office/drawing/2014/main" id="{504B3628-7107-EFB3-3A28-DE8228B6892C}"/>
+              </a:ext>
+            </a:extLst>
+          </p:cNvPr>
+          <p:cNvSpPr>
+            <a:spLocks noGrp="1"/>
+          </p:cNvSpPr>
+          <p:nvPr>
+            <p:ph type="title"/>
+          </p:nvPr>
+        </p:nvSpPr>
+        <p:spPr/>
+        <p:txBody>
+          <a:bodyPr/>
+          <a:lstStyle/>
+          <a:p>
+            <a:r>
+              <a:rPr lang="en-US"/>
+              <a:t>The building block</a:t>
+            </a:r>
+          </a:p>
+        </p:txBody>
+      </p:sp>
+      <p:sp>
+        <p:nvSpPr>
+          <p:cNvPr id="3" name="Text Placeholder 2">
+            <a:extLst>
+              <a:ext uri="{FF2B5EF4-FFF2-40B4-BE49-F238E27FC236}">
+                <a16:creationId xmlns:a16="http://schemas.microsoft.com/office/drawing/2014/main" id="{E6B3ED44-39A1-4EB4-BF7E-62DC2090B919}"/>
+              </a:ext>
+            </a:extLst>
+          </p:cNvPr>
+          <p:cNvSpPr>
+            <a:spLocks noGrp="1"/>
+          </p:cNvSpPr>
+          <p:nvPr>
+            <p:ph type="body" idx="1"/>
+          </p:nvPr>
+        </p:nvSpPr>
+        <p:spPr/>
+        <p:txBody>
+          <a:bodyPr/>
+          <a:lstStyle/>
+          <a:p>
+            <a:endParaRPr lang="en-US"/>
+          </a:p>
+        </p:txBody>
+      </p:sp>
+    </p:spTree>
+    <p:extLst>
+      <p:ext uri="{BB962C8B-B14F-4D97-AF65-F5344CB8AC3E}">
+        <p14:creationId xmlns:p14="http://schemas.microsoft.com/office/powerpoint/2010/main" val="2259516499"/>
+      </p:ext>
+    </p:extLst>
+  </p:cSld>
+  <p:clrMapOvr>
+    <a:masterClrMapping/>
+  </p:clrMapOvr>
+</p:sld>
+</file>
+
+<file path=ppt/slides/slide30.xml><?xml version="1.0" encoding="utf-8"?>
 <p:sld xmlns:a="http://schemas.openxmlformats.org/drawingml/2006/main" xmlns:r="http://schemas.openxmlformats.org/officeDocument/2006/relationships" xmlns:p="http://schemas.openxmlformats.org/presentationml/2006/main">
   <p:cSld>
     <p:spTree>
@@ -17652,7 +17393,7 @@
 </p:sld>
 </file>
 
-<file path=ppt/slides/slide33.xml><?xml version="1.0" encoding="utf-8"?>
+<file path=ppt/slides/slide31.xml><?xml version="1.0" encoding="utf-8"?>
 <p:sld xmlns:a="http://schemas.openxmlformats.org/drawingml/2006/main" xmlns:r="http://schemas.openxmlformats.org/officeDocument/2006/relationships" xmlns:p="http://schemas.openxmlformats.org/presentationml/2006/main">
   <p:cSld>
     <p:spTree>
@@ -18269,7 +18010,7 @@
 </p:sld>
 </file>
 
-<file path=ppt/slides/slide34.xml><?xml version="1.0" encoding="utf-8"?>
+<file path=ppt/slides/slide32.xml><?xml version="1.0" encoding="utf-8"?>
 <p:sld xmlns:a="http://schemas.openxmlformats.org/drawingml/2006/main" xmlns:r="http://schemas.openxmlformats.org/officeDocument/2006/relationships" xmlns:p="http://schemas.openxmlformats.org/presentationml/2006/main">
   <p:cSld>
     <p:spTree>
@@ -18343,31 +18084,30 @@
           <a:p>
             <a:r>
               <a:rPr lang="en-US" dirty="0"/>
-              <a:t>Often survival analysis is about the time to the earliest event</a:t>
+              <a:t>Often survival analysis is about </a:t>
+            </a:r>
+            <a:r>
+              <a:rPr lang="en-US" i="1" dirty="0"/>
+              <a:t>the time to the earliest event</a:t>
             </a:r>
           </a:p>
           <a:p>
             <a:r>
               <a:rPr lang="en-US" dirty="0"/>
-              <a:t>The intensity function is the same hazard function </a:t>
+              <a:t>The intensity function is the same as the hazard rate function </a:t>
             </a:r>
           </a:p>
           <a:p>
             <a:r>
               <a:rPr lang="en-US" dirty="0"/>
-              <a:t>The cumulative intensity function is the same as the integrated or cumulative hazard function</a:t>
+              <a:t>The cumulative intensity function is the same as the (integrated or cumulative) hazard function</a:t>
             </a:r>
           </a:p>
           <a:p>
             <a:r>
               <a:rPr lang="en-US" dirty="0"/>
-              <a:t>All the tools that we describe here can be used for statistical </a:t>
+              <a:t>All the tools described here can be used for statistical simulations for survival analysis</a:t>
             </a:r>
-            <a:r>
-              <a:rPr lang="en-US"/>
-              <a:t>simulations for survival analysis</a:t>
-            </a:r>
-            <a:endParaRPr lang="en-US" dirty="0"/>
           </a:p>
         </p:txBody>
       </p:sp>
@@ -18384,7 +18124,2341 @@
 </p:sld>
 </file>
 
+<file path=ppt/slides/slide33.xml><?xml version="1.0" encoding="utf-8"?>
+<p:sld xmlns:a="http://schemas.openxmlformats.org/drawingml/2006/main" xmlns:r="http://schemas.openxmlformats.org/officeDocument/2006/relationships" xmlns:p="http://schemas.openxmlformats.org/presentationml/2006/main">
+  <p:cSld>
+    <p:spTree>
+      <p:nvGrpSpPr>
+        <p:cNvPr id="1" name=""/>
+        <p:cNvGrpSpPr/>
+        <p:nvPr/>
+      </p:nvGrpSpPr>
+      <p:grpSpPr>
+        <a:xfrm>
+          <a:off x="0" y="0"/>
+          <a:ext cx="0" cy="0"/>
+          <a:chOff x="0" y="0"/>
+          <a:chExt cx="0" cy="0"/>
+        </a:xfrm>
+      </p:grpSpPr>
+      <p:sp>
+        <p:nvSpPr>
+          <p:cNvPr id="2" name="Title 1">
+            <a:extLst>
+              <a:ext uri="{FF2B5EF4-FFF2-40B4-BE49-F238E27FC236}">
+                <a16:creationId xmlns:a16="http://schemas.microsoft.com/office/drawing/2014/main" id="{54B0F670-FF3B-27AA-5E4D-1A9AD465E406}"/>
+              </a:ext>
+            </a:extLst>
+          </p:cNvPr>
+          <p:cNvSpPr>
+            <a:spLocks noGrp="1"/>
+          </p:cNvSpPr>
+          <p:nvPr>
+            <p:ph type="title"/>
+          </p:nvPr>
+        </p:nvSpPr>
+        <p:spPr>
+          <a:xfrm>
+            <a:off x="164804" y="365125"/>
+            <a:ext cx="11862391" cy="1325563"/>
+          </a:xfrm>
+        </p:spPr>
+        <p:txBody>
+          <a:bodyPr/>
+          <a:lstStyle/>
+          <a:p>
+            <a:r>
+              <a:rPr lang="en-US" dirty="0"/>
+              <a:t>Distribution of times for earliest vs (a pooled) event</a:t>
+            </a:r>
+          </a:p>
+        </p:txBody>
+      </p:sp>
+      <mc:AlternateContent xmlns:mc="http://schemas.openxmlformats.org/markup-compatibility/2006" xmlns:a14="http://schemas.microsoft.com/office/drawing/2010/main">
+        <mc:Choice Requires="a14">
+          <p:sp>
+            <p:nvSpPr>
+              <p:cNvPr id="4" name="Content Placeholder 3">
+                <a:extLst>
+                  <a:ext uri="{FF2B5EF4-FFF2-40B4-BE49-F238E27FC236}">
+                    <a16:creationId xmlns:a16="http://schemas.microsoft.com/office/drawing/2014/main" id="{7ED9047E-CAAF-0F65-7FD7-4C877C15B3CE}"/>
+                  </a:ext>
+                </a:extLst>
+              </p:cNvPr>
+              <p:cNvSpPr>
+                <a:spLocks noGrp="1"/>
+              </p:cNvSpPr>
+              <p:nvPr>
+                <p:ph sz="half" idx="1"/>
+              </p:nvPr>
+            </p:nvSpPr>
+            <p:spPr>
+              <a:xfrm>
+                <a:off x="329609" y="1825624"/>
+                <a:ext cx="5560828" cy="4667251"/>
+              </a:xfrm>
+            </p:spPr>
+            <p:txBody>
+              <a:bodyPr>
+                <a:normAutofit/>
+              </a:bodyPr>
+              <a:lstStyle/>
+              <a:p>
+                <a:pPr marL="0" indent="0">
+                  <a:buNone/>
+                </a:pPr>
+                <a:r>
+                  <a:rPr lang="en-US" sz="2400" dirty="0"/>
+                  <a:t>Survival function of first-event: </a:t>
+                </a:r>
+              </a:p>
+              <a:p>
+                <a:pPr marL="0" indent="0">
+                  <a:buNone/>
+                </a:pPr>
+                <a14:m>
+                  <m:oMathPara xmlns:m="http://schemas.openxmlformats.org/officeDocument/2006/math">
+                    <m:oMathParaPr>
+                      <m:jc m:val="centerGroup"/>
+                    </m:oMathParaPr>
+                    <m:oMath xmlns:m="http://schemas.openxmlformats.org/officeDocument/2006/math">
+                      <m:r>
+                        <m:rPr>
+                          <m:sty m:val="p"/>
+                        </m:rPr>
+                        <a:rPr lang="en-US" sz="2400" b="0" i="0" smtClean="0">
+                          <a:latin typeface="Cambria Math" panose="02040503050406030204" pitchFamily="18" charset="0"/>
+                        </a:rPr>
+                        <m:t>Pr</m:t>
+                      </m:r>
+                      <m:d>
+                        <m:dPr>
+                          <m:begChr m:val="["/>
+                          <m:endChr m:val="]"/>
+                          <m:ctrlPr>
+                            <a:rPr lang="en-US" sz="2400" b="0" i="1" smtClean="0">
+                              <a:latin typeface="Cambria Math" panose="02040503050406030204" pitchFamily="18" charset="0"/>
+                            </a:rPr>
+                          </m:ctrlPr>
+                        </m:dPr>
+                        <m:e>
+                          <m:sSub>
+                            <m:sSubPr>
+                              <m:ctrlPr>
+                                <a:rPr lang="en-US" sz="2400" b="0" i="1" smtClean="0">
+                                  <a:latin typeface="Cambria Math" panose="02040503050406030204" pitchFamily="18" charset="0"/>
+                                </a:rPr>
+                              </m:ctrlPr>
+                            </m:sSubPr>
+                            <m:e>
+                              <m:r>
+                                <m:rPr>
+                                  <m:sty m:val="p"/>
+                                </m:rPr>
+                                <a:rPr lang="en-US" sz="2400" b="0" i="1" smtClean="0">
+                                  <a:latin typeface="Cambria Math" panose="02040503050406030204" pitchFamily="18" charset="0"/>
+                                </a:rPr>
+                                <m:t>Z</m:t>
+                              </m:r>
+                            </m:e>
+                            <m:sub>
+                              <m:d>
+                                <m:dPr>
+                                  <m:ctrlPr>
+                                    <a:rPr lang="en-US" sz="2400" b="0" i="1" smtClean="0">
+                                      <a:latin typeface="Cambria Math" panose="02040503050406030204" pitchFamily="18" charset="0"/>
+                                    </a:rPr>
+                                  </m:ctrlPr>
+                                </m:dPr>
+                                <m:e>
+                                  <m:r>
+                                    <a:rPr lang="en-US" sz="2400" b="0" i="1" smtClean="0">
+                                      <a:latin typeface="Cambria Math" panose="02040503050406030204" pitchFamily="18" charset="0"/>
+                                    </a:rPr>
+                                    <m:t>1</m:t>
+                                  </m:r>
+                                </m:e>
+                              </m:d>
+                            </m:sub>
+                          </m:sSub>
+                          <m:r>
+                            <a:rPr lang="en-US" sz="2400" b="0" i="1" smtClean="0">
+                              <a:latin typeface="Cambria Math" panose="02040503050406030204" pitchFamily="18" charset="0"/>
+                            </a:rPr>
+                            <m:t>&gt;</m:t>
+                          </m:r>
+                          <m:r>
+                            <a:rPr lang="en-US" sz="2400" b="0" i="1" smtClean="0">
+                              <a:latin typeface="Cambria Math" panose="02040503050406030204" pitchFamily="18" charset="0"/>
+                            </a:rPr>
+                            <m:t>𝑡</m:t>
+                          </m:r>
+                        </m:e>
+                      </m:d>
+                      <m:r>
+                        <a:rPr lang="en-US" sz="2400" b="0" i="1" smtClean="0">
+                          <a:latin typeface="Cambria Math" panose="02040503050406030204" pitchFamily="18" charset="0"/>
+                        </a:rPr>
+                        <m:t>=</m:t>
+                      </m:r>
+                      <m:r>
+                        <m:rPr>
+                          <m:sty m:val="p"/>
+                        </m:rPr>
+                        <a:rPr lang="en-US" sz="2400" b="0" i="1" smtClean="0">
+                          <a:latin typeface="Cambria Math" panose="02040503050406030204" pitchFamily="18" charset="0"/>
+                        </a:rPr>
+                        <m:t>Pr</m:t>
+                      </m:r>
+                      <m:r>
+                        <a:rPr lang="en-US" sz="2400" b="0" i="1" smtClean="0">
+                          <a:latin typeface="Cambria Math" panose="02040503050406030204" pitchFamily="18" charset="0"/>
+                        </a:rPr>
+                        <m:t>[</m:t>
+                      </m:r>
+                      <m:r>
+                        <a:rPr lang="en-US" sz="2400" b="0" i="1" smtClean="0">
+                          <a:latin typeface="Cambria Math" panose="02040503050406030204" pitchFamily="18" charset="0"/>
+                        </a:rPr>
+                        <m:t>𝑁</m:t>
+                      </m:r>
+                      <m:r>
+                        <a:rPr lang="en-US" sz="2400" b="0" i="1" smtClean="0">
+                          <a:latin typeface="Cambria Math" panose="02040503050406030204" pitchFamily="18" charset="0"/>
+                        </a:rPr>
+                        <m:t>(</m:t>
+                      </m:r>
+                      <m:r>
+                        <m:rPr>
+                          <m:sty m:val="p"/>
+                        </m:rPr>
+                        <a:rPr lang="en-US" sz="2400" b="0" i="1" smtClean="0">
+                          <a:latin typeface="Cambria Math" panose="02040503050406030204" pitchFamily="18" charset="0"/>
+                        </a:rPr>
+                        <m:t>a</m:t>
+                      </m:r>
+                      <m:r>
+                        <a:rPr lang="en-US" sz="2400" b="0" i="1" smtClean="0">
+                          <a:latin typeface="Cambria Math" panose="02040503050406030204" pitchFamily="18" charset="0"/>
+                        </a:rPr>
+                        <m:t>,</m:t>
+                      </m:r>
+                      <m:r>
+                        <m:rPr>
+                          <m:sty m:val="p"/>
+                        </m:rPr>
+                        <a:rPr lang="en-US" sz="2400" b="0" i="1" smtClean="0">
+                          <a:latin typeface="Cambria Math" panose="02040503050406030204" pitchFamily="18" charset="0"/>
+                        </a:rPr>
+                        <m:t>t</m:t>
+                      </m:r>
+                      <m:r>
+                        <a:rPr lang="en-US" sz="2400" b="0" i="1" smtClean="0">
+                          <a:latin typeface="Cambria Math" panose="02040503050406030204" pitchFamily="18" charset="0"/>
+                        </a:rPr>
+                        <m:t>) =0]=</m:t>
+                      </m:r>
+                      <m:sSup>
+                        <m:sSupPr>
+                          <m:ctrlPr>
+                            <a:rPr lang="en-US" sz="2400" b="0" i="1" smtClean="0">
+                              <a:latin typeface="Cambria Math" panose="02040503050406030204" pitchFamily="18" charset="0"/>
+                            </a:rPr>
+                          </m:ctrlPr>
+                        </m:sSupPr>
+                        <m:e>
+                          <m:r>
+                            <a:rPr lang="en-US" sz="2400" b="0" i="1" smtClean="0">
+                              <a:latin typeface="Cambria Math" panose="02040503050406030204" pitchFamily="18" charset="0"/>
+                            </a:rPr>
+                            <m:t>𝑒</m:t>
+                          </m:r>
+                        </m:e>
+                        <m:sup>
+                          <m:r>
+                            <a:rPr lang="en-US" sz="2400" b="0" i="1" smtClean="0">
+                              <a:latin typeface="Cambria Math" panose="02040503050406030204" pitchFamily="18" charset="0"/>
+                            </a:rPr>
+                            <m:t>−</m:t>
+                          </m:r>
+                          <m:r>
+                            <m:rPr>
+                              <m:sty m:val="p"/>
+                            </m:rPr>
+                            <a:rPr lang="en-US" sz="2400" b="0" i="0" smtClean="0">
+                              <a:latin typeface="Cambria Math" panose="02040503050406030204" pitchFamily="18" charset="0"/>
+                            </a:rPr>
+                            <m:t>Λ</m:t>
+                          </m:r>
+                          <m:d>
+                            <m:dPr>
+                              <m:ctrlPr>
+                                <a:rPr lang="en-US" sz="2400" b="0" i="1" smtClean="0">
+                                  <a:latin typeface="Cambria Math" panose="02040503050406030204" pitchFamily="18" charset="0"/>
+                                </a:rPr>
+                              </m:ctrlPr>
+                            </m:dPr>
+                            <m:e>
+                              <m:r>
+                                <a:rPr lang="en-US" sz="2400" b="0" i="1" smtClean="0">
+                                  <a:latin typeface="Cambria Math" panose="02040503050406030204" pitchFamily="18" charset="0"/>
+                                </a:rPr>
+                                <m:t>𝑎</m:t>
+                              </m:r>
+                              <m:r>
+                                <a:rPr lang="en-US" sz="2400" b="0" i="1" smtClean="0">
+                                  <a:latin typeface="Cambria Math" panose="02040503050406030204" pitchFamily="18" charset="0"/>
+                                </a:rPr>
+                                <m:t>,</m:t>
+                              </m:r>
+                              <m:r>
+                                <a:rPr lang="en-US" sz="2400" b="0" i="1" smtClean="0">
+                                  <a:latin typeface="Cambria Math" panose="02040503050406030204" pitchFamily="18" charset="0"/>
+                                </a:rPr>
+                                <m:t>𝑡</m:t>
+                              </m:r>
+                            </m:e>
+                          </m:d>
+                        </m:sup>
+                      </m:sSup>
+                    </m:oMath>
+                  </m:oMathPara>
+                </a14:m>
+                <a:endParaRPr lang="en-US" sz="2400" b="0" i="1" dirty="0">
+                  <a:latin typeface="Cambria Math" panose="02040503050406030204" pitchFamily="18" charset="0"/>
+                </a:endParaRPr>
+              </a:p>
+              <a:p>
+                <a:pPr marL="0" indent="0">
+                  <a:buNone/>
+                </a:pPr>
+                <a:endParaRPr lang="en-US" sz="2400" b="0" i="1" dirty="0">
+                  <a:latin typeface="Cambria Math" panose="02040503050406030204" pitchFamily="18" charset="0"/>
+                </a:endParaRPr>
+              </a:p>
+              <a:p>
+                <a:pPr marL="0" indent="0">
+                  <a:buNone/>
+                </a:pPr>
+                <a:r>
+                  <a:rPr lang="en-US" sz="2400" dirty="0"/>
+                  <a:t>Density of </a:t>
+                </a:r>
+                <a:endParaRPr lang="en-US" sz="2400" b="0" dirty="0"/>
+              </a:p>
+              <a:p>
+                <a:r>
+                  <a:rPr lang="en-US" sz="2400" dirty="0"/>
+                  <a:t>time to first-event</a:t>
+                </a:r>
+              </a:p>
+              <a:p>
+                <a:pPr marL="0" indent="0">
+                  <a:buNone/>
+                </a:pPr>
+                <a14:m>
+                  <m:oMathPara xmlns:m="http://schemas.openxmlformats.org/officeDocument/2006/math">
+                    <m:oMathParaPr>
+                      <m:jc m:val="centerGroup"/>
+                    </m:oMathParaPr>
+                    <m:oMath xmlns:m="http://schemas.openxmlformats.org/officeDocument/2006/math">
+                      <m:r>
+                        <a:rPr lang="en-US" sz="2400" b="0" i="1" smtClean="0">
+                          <a:latin typeface="Cambria Math" panose="02040503050406030204" pitchFamily="18" charset="0"/>
+                        </a:rPr>
+                        <m:t>𝑔</m:t>
+                      </m:r>
+                      <m:d>
+                        <m:dPr>
+                          <m:ctrlPr>
+                            <a:rPr lang="en-US" sz="2400" b="0" i="1" smtClean="0">
+                              <a:latin typeface="Cambria Math" panose="02040503050406030204" pitchFamily="18" charset="0"/>
+                            </a:rPr>
+                          </m:ctrlPr>
+                        </m:dPr>
+                        <m:e>
+                          <m:r>
+                            <a:rPr lang="en-US" sz="2400" b="0" i="1" smtClean="0">
+                              <a:latin typeface="Cambria Math" panose="02040503050406030204" pitchFamily="18" charset="0"/>
+                            </a:rPr>
+                            <m:t>𝑡</m:t>
+                          </m:r>
+                        </m:e>
+                      </m:d>
+                      <m:r>
+                        <a:rPr lang="en-US" sz="2400" b="0" i="1" smtClean="0">
+                          <a:latin typeface="Cambria Math" panose="02040503050406030204" pitchFamily="18" charset="0"/>
+                        </a:rPr>
+                        <m:t>=</m:t>
+                      </m:r>
+                      <m:r>
+                        <a:rPr lang="en-US" sz="2400" b="0" i="1" smtClean="0">
+                          <a:latin typeface="Cambria Math" panose="02040503050406030204" pitchFamily="18" charset="0"/>
+                        </a:rPr>
+                        <m:t>𝜆</m:t>
+                      </m:r>
+                      <m:d>
+                        <m:dPr>
+                          <m:ctrlPr>
+                            <a:rPr lang="en-US" sz="2400" b="0" i="1" smtClean="0">
+                              <a:latin typeface="Cambria Math" panose="02040503050406030204" pitchFamily="18" charset="0"/>
+                            </a:rPr>
+                          </m:ctrlPr>
+                        </m:dPr>
+                        <m:e>
+                          <m:r>
+                            <a:rPr lang="en-US" sz="2400" b="0" i="1" smtClean="0">
+                              <a:latin typeface="Cambria Math" panose="02040503050406030204" pitchFamily="18" charset="0"/>
+                            </a:rPr>
+                            <m:t>𝑡</m:t>
+                          </m:r>
+                        </m:e>
+                      </m:d>
+                      <m:sSup>
+                        <m:sSupPr>
+                          <m:ctrlPr>
+                            <a:rPr lang="en-US" sz="2400" b="0" i="1" smtClean="0">
+                              <a:latin typeface="Cambria Math" panose="02040503050406030204" pitchFamily="18" charset="0"/>
+                            </a:rPr>
+                          </m:ctrlPr>
+                        </m:sSupPr>
+                        <m:e>
+                          <m:r>
+                            <a:rPr lang="en-US" sz="2400" b="0" i="1" smtClean="0">
+                              <a:latin typeface="Cambria Math" panose="02040503050406030204" pitchFamily="18" charset="0"/>
+                            </a:rPr>
+                            <m:t>𝑒</m:t>
+                          </m:r>
+                        </m:e>
+                        <m:sup>
+                          <m:r>
+                            <a:rPr lang="en-US" sz="2400" b="0" i="1" smtClean="0">
+                              <a:latin typeface="Cambria Math" panose="02040503050406030204" pitchFamily="18" charset="0"/>
+                            </a:rPr>
+                            <m:t>−</m:t>
+                          </m:r>
+                          <m:r>
+                            <m:rPr>
+                              <m:sty m:val="p"/>
+                            </m:rPr>
+                            <a:rPr lang="en-US" sz="2400" b="0" i="0" smtClean="0">
+                              <a:latin typeface="Cambria Math" panose="02040503050406030204" pitchFamily="18" charset="0"/>
+                            </a:rPr>
+                            <m:t>Λ</m:t>
+                          </m:r>
+                          <m:d>
+                            <m:dPr>
+                              <m:ctrlPr>
+                                <a:rPr lang="en-US" sz="2400" b="0" i="1" smtClean="0">
+                                  <a:latin typeface="Cambria Math" panose="02040503050406030204" pitchFamily="18" charset="0"/>
+                                </a:rPr>
+                              </m:ctrlPr>
+                            </m:dPr>
+                            <m:e>
+                              <m:r>
+                                <a:rPr lang="en-US" sz="2400" b="0" i="1" smtClean="0">
+                                  <a:latin typeface="Cambria Math" panose="02040503050406030204" pitchFamily="18" charset="0"/>
+                                </a:rPr>
+                                <m:t>𝑎</m:t>
+                              </m:r>
+                              <m:r>
+                                <a:rPr lang="en-US" sz="2400" b="0" i="1" smtClean="0">
+                                  <a:latin typeface="Cambria Math" panose="02040503050406030204" pitchFamily="18" charset="0"/>
+                                </a:rPr>
+                                <m:t>,</m:t>
+                              </m:r>
+                              <m:r>
+                                <a:rPr lang="en-US" sz="2400" b="0" i="1" smtClean="0">
+                                  <a:latin typeface="Cambria Math" panose="02040503050406030204" pitchFamily="18" charset="0"/>
+                                </a:rPr>
+                                <m:t>𝑡</m:t>
+                              </m:r>
+                            </m:e>
+                          </m:d>
+                        </m:sup>
+                      </m:sSup>
+                    </m:oMath>
+                  </m:oMathPara>
+                </a14:m>
+                <a:endParaRPr lang="en-US" sz="2400" b="0" i="1" dirty="0">
+                  <a:latin typeface="Cambria Math" panose="02040503050406030204" pitchFamily="18" charset="0"/>
+                </a:endParaRPr>
+              </a:p>
+              <a:p>
+                <a:pPr marL="0" indent="0">
+                  <a:buNone/>
+                </a:pPr>
+                <a:endParaRPr lang="en-US" sz="2400" dirty="0">
+                  <a:latin typeface="Cambria Math" panose="02040503050406030204" pitchFamily="18" charset="0"/>
+                </a:endParaRPr>
+              </a:p>
+              <a:p>
+                <a:r>
+                  <a:rPr lang="en-US" sz="2400" dirty="0"/>
+                  <a:t>time to first-event in </a:t>
+                </a:r>
+                <a14:m>
+                  <m:oMath xmlns:m="http://schemas.openxmlformats.org/officeDocument/2006/math">
+                    <m:r>
+                      <a:rPr lang="en-US" sz="2400" b="0" i="1" smtClean="0">
+                        <a:latin typeface="Cambria Math" panose="02040503050406030204" pitchFamily="18" charset="0"/>
+                      </a:rPr>
+                      <m:t>(</m:t>
+                    </m:r>
+                    <m:r>
+                      <m:rPr>
+                        <m:sty m:val="p"/>
+                      </m:rPr>
+                      <a:rPr lang="en-US" sz="2400" b="0" i="1" smtClean="0">
+                        <a:latin typeface="Cambria Math" panose="02040503050406030204" pitchFamily="18" charset="0"/>
+                      </a:rPr>
+                      <m:t>a</m:t>
+                    </m:r>
+                    <m:r>
+                      <a:rPr lang="en-US" sz="2400" b="0" i="1" smtClean="0">
+                        <a:latin typeface="Cambria Math" panose="02040503050406030204" pitchFamily="18" charset="0"/>
+                      </a:rPr>
+                      <m:t>,</m:t>
+                    </m:r>
+                    <m:r>
+                      <m:rPr>
+                        <m:sty m:val="p"/>
+                      </m:rPr>
+                      <a:rPr lang="en-US" sz="2400" b="0" i="1" smtClean="0">
+                        <a:latin typeface="Cambria Math" panose="02040503050406030204" pitchFamily="18" charset="0"/>
+                      </a:rPr>
+                      <m:t>b</m:t>
+                    </m:r>
+                    <m:r>
+                      <a:rPr lang="en-US" sz="2400" b="0" i="1" smtClean="0">
+                        <a:latin typeface="Cambria Math" panose="02040503050406030204" pitchFamily="18" charset="0"/>
+                      </a:rPr>
+                      <m:t>]</m:t>
+                    </m:r>
+                  </m:oMath>
+                </a14:m>
+                <a:endParaRPr lang="en-US" sz="2400" b="0" i="1" dirty="0">
+                  <a:latin typeface="Cambria Math" panose="02040503050406030204" pitchFamily="18" charset="0"/>
+                </a:endParaRPr>
+              </a:p>
+              <a:p>
+                <a:pPr marL="0" indent="0">
+                  <a:buNone/>
+                </a:pPr>
+                <a14:m>
+                  <m:oMathPara xmlns:m="http://schemas.openxmlformats.org/officeDocument/2006/math">
+                    <m:oMathParaPr>
+                      <m:jc m:val="centerGroup"/>
+                    </m:oMathParaPr>
+                    <m:oMath xmlns:m="http://schemas.openxmlformats.org/officeDocument/2006/math">
+                      <m:sSub>
+                        <m:sSubPr>
+                          <m:ctrlPr>
+                            <a:rPr lang="en-US" sz="2400" b="0" i="1" smtClean="0">
+                              <a:latin typeface="Cambria Math" panose="02040503050406030204" pitchFamily="18" charset="0"/>
+                            </a:rPr>
+                          </m:ctrlPr>
+                        </m:sSubPr>
+                        <m:e>
+                          <m:r>
+                            <a:rPr lang="en-US" sz="2400" b="0" i="1" smtClean="0">
+                              <a:latin typeface="Cambria Math" panose="02040503050406030204" pitchFamily="18" charset="0"/>
+                            </a:rPr>
+                            <m:t>𝑔</m:t>
+                          </m:r>
+                        </m:e>
+                        <m:sub>
+                          <m:d>
+                            <m:dPr>
+                              <m:endChr m:val="]"/>
+                              <m:ctrlPr>
+                                <a:rPr lang="en-US" sz="2400" b="0" i="1" smtClean="0">
+                                  <a:latin typeface="Cambria Math" panose="02040503050406030204" pitchFamily="18" charset="0"/>
+                                </a:rPr>
+                              </m:ctrlPr>
+                            </m:dPr>
+                            <m:e>
+                              <m:r>
+                                <a:rPr lang="en-US" sz="2400" b="0" i="1" smtClean="0">
+                                  <a:latin typeface="Cambria Math" panose="02040503050406030204" pitchFamily="18" charset="0"/>
+                                </a:rPr>
+                                <m:t>𝑎</m:t>
+                              </m:r>
+                              <m:r>
+                                <a:rPr lang="en-US" sz="2400" b="0" i="1" smtClean="0">
+                                  <a:latin typeface="Cambria Math" panose="02040503050406030204" pitchFamily="18" charset="0"/>
+                                </a:rPr>
+                                <m:t>,</m:t>
+                              </m:r>
+                              <m:r>
+                                <a:rPr lang="en-US" sz="2400" b="0" i="1" smtClean="0">
+                                  <a:latin typeface="Cambria Math" panose="02040503050406030204" pitchFamily="18" charset="0"/>
+                                </a:rPr>
+                                <m:t>𝑏</m:t>
+                              </m:r>
+                            </m:e>
+                          </m:d>
+                        </m:sub>
+                      </m:sSub>
+                      <m:d>
+                        <m:dPr>
+                          <m:ctrlPr>
+                            <a:rPr lang="en-US" sz="2400" b="0" i="1" smtClean="0">
+                              <a:latin typeface="Cambria Math" panose="02040503050406030204" pitchFamily="18" charset="0"/>
+                            </a:rPr>
+                          </m:ctrlPr>
+                        </m:dPr>
+                        <m:e>
+                          <m:r>
+                            <a:rPr lang="en-US" sz="2400" b="0" i="1" smtClean="0">
+                              <a:latin typeface="Cambria Math" panose="02040503050406030204" pitchFamily="18" charset="0"/>
+                            </a:rPr>
+                            <m:t>𝑡</m:t>
+                          </m:r>
+                        </m:e>
+                      </m:d>
+                      <m:r>
+                        <a:rPr lang="en-US" sz="2400" i="1">
+                          <a:latin typeface="Cambria Math" panose="02040503050406030204" pitchFamily="18" charset="0"/>
+                        </a:rPr>
+                        <m:t>=</m:t>
+                      </m:r>
+                      <m:f>
+                        <m:fPr>
+                          <m:ctrlPr>
+                            <a:rPr lang="en-US" sz="2400" b="0" i="1" smtClean="0">
+                              <a:latin typeface="Cambria Math" panose="02040503050406030204" pitchFamily="18" charset="0"/>
+                            </a:rPr>
+                          </m:ctrlPr>
+                        </m:fPr>
+                        <m:num>
+                          <m:r>
+                            <a:rPr lang="en-US" sz="2400" i="1">
+                              <a:latin typeface="Cambria Math" panose="02040503050406030204" pitchFamily="18" charset="0"/>
+                            </a:rPr>
+                            <m:t>𝜆</m:t>
+                          </m:r>
+                          <m:d>
+                            <m:dPr>
+                              <m:ctrlPr>
+                                <a:rPr lang="en-US" sz="2400" i="1">
+                                  <a:latin typeface="Cambria Math" panose="02040503050406030204" pitchFamily="18" charset="0"/>
+                                </a:rPr>
+                              </m:ctrlPr>
+                            </m:dPr>
+                            <m:e>
+                              <m:r>
+                                <a:rPr lang="en-US" sz="2400" i="1">
+                                  <a:latin typeface="Cambria Math" panose="02040503050406030204" pitchFamily="18" charset="0"/>
+                                </a:rPr>
+                                <m:t>𝑡</m:t>
+                              </m:r>
+                            </m:e>
+                          </m:d>
+                          <m:sSup>
+                            <m:sSupPr>
+                              <m:ctrlPr>
+                                <a:rPr lang="en-US" sz="2400" i="1">
+                                  <a:latin typeface="Cambria Math" panose="02040503050406030204" pitchFamily="18" charset="0"/>
+                                </a:rPr>
+                              </m:ctrlPr>
+                            </m:sSupPr>
+                            <m:e>
+                              <m:r>
+                                <a:rPr lang="en-US" sz="2400" i="1">
+                                  <a:latin typeface="Cambria Math" panose="02040503050406030204" pitchFamily="18" charset="0"/>
+                                </a:rPr>
+                                <m:t>𝑒</m:t>
+                              </m:r>
+                            </m:e>
+                            <m:sup>
+                              <m:r>
+                                <a:rPr lang="en-US" sz="2400" i="1">
+                                  <a:latin typeface="Cambria Math" panose="02040503050406030204" pitchFamily="18" charset="0"/>
+                                </a:rPr>
+                                <m:t>−</m:t>
+                              </m:r>
+                              <m:r>
+                                <m:rPr>
+                                  <m:sty m:val="p"/>
+                                </m:rPr>
+                                <a:rPr lang="en-US" sz="2400">
+                                  <a:latin typeface="Cambria Math" panose="02040503050406030204" pitchFamily="18" charset="0"/>
+                                </a:rPr>
+                                <m:t>Λ</m:t>
+                              </m:r>
+                              <m:d>
+                                <m:dPr>
+                                  <m:ctrlPr>
+                                    <a:rPr lang="en-US" sz="2400" i="1">
+                                      <a:latin typeface="Cambria Math" panose="02040503050406030204" pitchFamily="18" charset="0"/>
+                                    </a:rPr>
+                                  </m:ctrlPr>
+                                </m:dPr>
+                                <m:e>
+                                  <m:r>
+                                    <a:rPr lang="en-US" sz="2400" i="1">
+                                      <a:latin typeface="Cambria Math" panose="02040503050406030204" pitchFamily="18" charset="0"/>
+                                    </a:rPr>
+                                    <m:t>𝑎</m:t>
+                                  </m:r>
+                                  <m:r>
+                                    <a:rPr lang="en-US" sz="2400" i="1">
+                                      <a:latin typeface="Cambria Math" panose="02040503050406030204" pitchFamily="18" charset="0"/>
+                                    </a:rPr>
+                                    <m:t>,</m:t>
+                                  </m:r>
+                                  <m:r>
+                                    <a:rPr lang="en-US" sz="2400" i="1">
+                                      <a:latin typeface="Cambria Math" panose="02040503050406030204" pitchFamily="18" charset="0"/>
+                                    </a:rPr>
+                                    <m:t>𝑡</m:t>
+                                  </m:r>
+                                </m:e>
+                              </m:d>
+                            </m:sup>
+                          </m:sSup>
+                        </m:num>
+                        <m:den>
+                          <m:r>
+                            <a:rPr lang="en-US" sz="2400" b="0" i="1" smtClean="0">
+                              <a:latin typeface="Cambria Math" panose="02040503050406030204" pitchFamily="18" charset="0"/>
+                            </a:rPr>
+                            <m:t>1−</m:t>
+                          </m:r>
+                          <m:sSup>
+                            <m:sSupPr>
+                              <m:ctrlPr>
+                                <a:rPr lang="en-US" sz="2400" i="1">
+                                  <a:latin typeface="Cambria Math" panose="02040503050406030204" pitchFamily="18" charset="0"/>
+                                </a:rPr>
+                              </m:ctrlPr>
+                            </m:sSupPr>
+                            <m:e>
+                              <m:r>
+                                <a:rPr lang="en-US" sz="2400" i="1">
+                                  <a:latin typeface="Cambria Math" panose="02040503050406030204" pitchFamily="18" charset="0"/>
+                                </a:rPr>
+                                <m:t>𝑒</m:t>
+                              </m:r>
+                            </m:e>
+                            <m:sup>
+                              <m:r>
+                                <a:rPr lang="en-US" sz="2400" i="1">
+                                  <a:latin typeface="Cambria Math" panose="02040503050406030204" pitchFamily="18" charset="0"/>
+                                </a:rPr>
+                                <m:t>−</m:t>
+                              </m:r>
+                              <m:r>
+                                <m:rPr>
+                                  <m:sty m:val="p"/>
+                                </m:rPr>
+                                <a:rPr lang="en-US" sz="2400">
+                                  <a:latin typeface="Cambria Math" panose="02040503050406030204" pitchFamily="18" charset="0"/>
+                                </a:rPr>
+                                <m:t>Λ</m:t>
+                              </m:r>
+                              <m:d>
+                                <m:dPr>
+                                  <m:ctrlPr>
+                                    <a:rPr lang="en-US" sz="2400" i="1">
+                                      <a:latin typeface="Cambria Math" panose="02040503050406030204" pitchFamily="18" charset="0"/>
+                                    </a:rPr>
+                                  </m:ctrlPr>
+                                </m:dPr>
+                                <m:e>
+                                  <m:r>
+                                    <a:rPr lang="en-US" sz="2400" i="1">
+                                      <a:latin typeface="Cambria Math" panose="02040503050406030204" pitchFamily="18" charset="0"/>
+                                    </a:rPr>
+                                    <m:t>𝑎</m:t>
+                                  </m:r>
+                                  <m:r>
+                                    <a:rPr lang="en-US" sz="2400" i="1">
+                                      <a:latin typeface="Cambria Math" panose="02040503050406030204" pitchFamily="18" charset="0"/>
+                                    </a:rPr>
+                                    <m:t>,</m:t>
+                                  </m:r>
+                                  <m:r>
+                                    <m:rPr>
+                                      <m:sty m:val="p"/>
+                                    </m:rPr>
+                                    <a:rPr lang="en-US" sz="2400" b="0" i="1" smtClean="0">
+                                      <a:latin typeface="Cambria Math" panose="02040503050406030204" pitchFamily="18" charset="0"/>
+                                    </a:rPr>
+                                    <m:t>b</m:t>
+                                  </m:r>
+                                </m:e>
+                              </m:d>
+                            </m:sup>
+                          </m:sSup>
+                        </m:den>
+                      </m:f>
+                    </m:oMath>
+                  </m:oMathPara>
+                </a14:m>
+                <a:endParaRPr lang="en-US" i="1" dirty="0">
+                  <a:latin typeface="Cambria Math" panose="02040503050406030204" pitchFamily="18" charset="0"/>
+                </a:endParaRPr>
+              </a:p>
+              <a:p>
+                <a:pPr marL="0" indent="0">
+                  <a:buNone/>
+                </a:pPr>
+                <a:endParaRPr lang="en-US" b="0" i="1" dirty="0">
+                  <a:latin typeface="Cambria Math" panose="02040503050406030204" pitchFamily="18" charset="0"/>
+                </a:endParaRPr>
+              </a:p>
+            </p:txBody>
+          </p:sp>
+        </mc:Choice>
+        <mc:Fallback xmlns="">
+          <p:sp>
+            <p:nvSpPr>
+              <p:cNvPr id="4" name="Content Placeholder 3">
+                <a:extLst>
+                  <a:ext uri="{FF2B5EF4-FFF2-40B4-BE49-F238E27FC236}">
+                    <a16:creationId xmlns:a16="http://schemas.microsoft.com/office/drawing/2014/main" id="{7ED9047E-CAAF-0F65-7FD7-4C877C15B3CE}"/>
+                  </a:ext>
+                </a:extLst>
+              </p:cNvPr>
+              <p:cNvSpPr>
+                <a:spLocks noGrp="1" noRot="1" noChangeAspect="1" noMove="1" noResize="1" noEditPoints="1" noAdjustHandles="1" noChangeArrowheads="1" noChangeShapeType="1" noTextEdit="1"/>
+              </p:cNvSpPr>
+              <p:nvPr>
+                <p:ph sz="half" idx="1"/>
+              </p:nvPr>
+            </p:nvSpPr>
+            <p:spPr>
+              <a:xfrm>
+                <a:off x="329609" y="1825624"/>
+                <a:ext cx="5560828" cy="4667251"/>
+              </a:xfrm>
+              <a:blipFill>
+                <a:blip r:embed="rId2"/>
+                <a:stretch>
+                  <a:fillRect l="-1595" t="-1897"/>
+                </a:stretch>
+              </a:blipFill>
+            </p:spPr>
+            <p:txBody>
+              <a:bodyPr/>
+              <a:lstStyle/>
+              <a:p>
+                <a:r>
+                  <a:rPr lang="en-US">
+                    <a:noFill/>
+                  </a:rPr>
+                  <a:t> </a:t>
+                </a:r>
+              </a:p>
+            </p:txBody>
+          </p:sp>
+        </mc:Fallback>
+      </mc:AlternateContent>
+      <mc:AlternateContent xmlns:mc="http://schemas.openxmlformats.org/markup-compatibility/2006" xmlns:a14="http://schemas.microsoft.com/office/drawing/2010/main">
+        <mc:Choice Requires="a14">
+          <p:sp>
+            <p:nvSpPr>
+              <p:cNvPr id="5" name="Content Placeholder 4">
+                <a:extLst>
+                  <a:ext uri="{FF2B5EF4-FFF2-40B4-BE49-F238E27FC236}">
+                    <a16:creationId xmlns:a16="http://schemas.microsoft.com/office/drawing/2014/main" id="{2268DC9B-877D-6B3A-8BB6-27B788C3688C}"/>
+                  </a:ext>
+                </a:extLst>
+              </p:cNvPr>
+              <p:cNvSpPr>
+                <a:spLocks noGrp="1"/>
+              </p:cNvSpPr>
+              <p:nvPr>
+                <p:ph sz="half" idx="2"/>
+              </p:nvPr>
+            </p:nvSpPr>
+            <p:spPr>
+              <a:xfrm>
+                <a:off x="7155712" y="1825625"/>
+                <a:ext cx="4837814" cy="4351338"/>
+              </a:xfrm>
+            </p:spPr>
+            <p:txBody>
+              <a:bodyPr>
+                <a:normAutofit/>
+              </a:bodyPr>
+              <a:lstStyle/>
+              <a:p>
+                <a:pPr marL="0" indent="0">
+                  <a:buNone/>
+                </a:pPr>
+                <a:r>
+                  <a:rPr lang="en-US" sz="2400" dirty="0"/>
+                  <a:t>Density of times in </a:t>
+                </a:r>
+                <a14:m>
+                  <m:oMath xmlns:m="http://schemas.openxmlformats.org/officeDocument/2006/math">
+                    <m:r>
+                      <a:rPr lang="en-US" sz="2400" i="1">
+                        <a:latin typeface="Cambria Math" panose="02040503050406030204" pitchFamily="18" charset="0"/>
+                      </a:rPr>
+                      <m:t>(</m:t>
+                    </m:r>
+                    <m:r>
+                      <m:rPr>
+                        <m:sty m:val="p"/>
+                      </m:rPr>
+                      <a:rPr lang="en-US" sz="2400" i="1">
+                        <a:latin typeface="Cambria Math" panose="02040503050406030204" pitchFamily="18" charset="0"/>
+                      </a:rPr>
+                      <m:t>a</m:t>
+                    </m:r>
+                    <m:r>
+                      <a:rPr lang="en-US" sz="2400" i="1">
+                        <a:latin typeface="Cambria Math" panose="02040503050406030204" pitchFamily="18" charset="0"/>
+                      </a:rPr>
+                      <m:t>,</m:t>
+                    </m:r>
+                    <m:r>
+                      <m:rPr>
+                        <m:sty m:val="p"/>
+                      </m:rPr>
+                      <a:rPr lang="en-US" sz="2400" i="1">
+                        <a:latin typeface="Cambria Math" panose="02040503050406030204" pitchFamily="18" charset="0"/>
+                      </a:rPr>
+                      <m:t>b</m:t>
+                    </m:r>
+                    <m:r>
+                      <a:rPr lang="en-US" sz="2400" i="1">
+                        <a:latin typeface="Cambria Math" panose="02040503050406030204" pitchFamily="18" charset="0"/>
+                      </a:rPr>
+                      <m:t>]</m:t>
+                    </m:r>
+                  </m:oMath>
+                </a14:m>
+                <a:r>
+                  <a:rPr lang="en-US" sz="2400" dirty="0"/>
+                  <a:t> of pooled events (from all instantiations)</a:t>
+                </a:r>
+              </a:p>
+              <a:p>
+                <a:pPr marL="0" indent="0">
+                  <a:buNone/>
+                </a:pPr>
+                <a:endParaRPr lang="en-US" sz="2400" dirty="0"/>
+              </a:p>
+              <a:p>
+                <a:pPr marL="0" indent="0">
+                  <a:buNone/>
+                </a:pPr>
+                <a:endParaRPr lang="en-US" sz="2400" dirty="0"/>
+              </a:p>
+              <a:p>
+                <a:pPr marL="0" indent="0">
+                  <a:buNone/>
+                </a:pPr>
+                <a14:m>
+                  <m:oMathPara xmlns:m="http://schemas.openxmlformats.org/officeDocument/2006/math">
+                    <m:oMathParaPr>
+                      <m:jc m:val="centerGroup"/>
+                    </m:oMathParaPr>
+                    <m:oMath xmlns:m="http://schemas.openxmlformats.org/officeDocument/2006/math">
+                      <m:r>
+                        <a:rPr lang="en-US" sz="2400" i="1">
+                          <a:latin typeface="Cambria Math" panose="02040503050406030204" pitchFamily="18" charset="0"/>
+                        </a:rPr>
+                        <m:t>𝑓</m:t>
+                      </m:r>
+                      <m:d>
+                        <m:dPr>
+                          <m:ctrlPr>
+                            <a:rPr lang="en-US" sz="2400" i="1">
+                              <a:latin typeface="Cambria Math" panose="02040503050406030204" pitchFamily="18" charset="0"/>
+                            </a:rPr>
+                          </m:ctrlPr>
+                        </m:dPr>
+                        <m:e>
+                          <m:r>
+                            <a:rPr lang="en-US" sz="2400" i="1">
+                              <a:latin typeface="Cambria Math" panose="02040503050406030204" pitchFamily="18" charset="0"/>
+                            </a:rPr>
+                            <m:t>𝑡</m:t>
+                          </m:r>
+                        </m:e>
+                      </m:d>
+                      <m:r>
+                        <a:rPr lang="en-US" sz="2400" i="1">
+                          <a:latin typeface="Cambria Math" panose="02040503050406030204" pitchFamily="18" charset="0"/>
+                        </a:rPr>
+                        <m:t>=</m:t>
+                      </m:r>
+                      <m:f>
+                        <m:fPr>
+                          <m:ctrlPr>
+                            <a:rPr lang="en-US" sz="2400" b="0" i="1" smtClean="0">
+                              <a:latin typeface="Cambria Math" panose="02040503050406030204" pitchFamily="18" charset="0"/>
+                            </a:rPr>
+                          </m:ctrlPr>
+                        </m:fPr>
+                        <m:num>
+                          <m:r>
+                            <a:rPr lang="en-US" sz="2400" i="1">
+                              <a:latin typeface="Cambria Math" panose="02040503050406030204" pitchFamily="18" charset="0"/>
+                            </a:rPr>
+                            <m:t>𝜆</m:t>
+                          </m:r>
+                          <m:d>
+                            <m:dPr>
+                              <m:ctrlPr>
+                                <a:rPr lang="en-US" sz="2400" i="1">
+                                  <a:latin typeface="Cambria Math" panose="02040503050406030204" pitchFamily="18" charset="0"/>
+                                </a:rPr>
+                              </m:ctrlPr>
+                            </m:dPr>
+                            <m:e>
+                              <m:r>
+                                <a:rPr lang="en-US" sz="2400" i="1">
+                                  <a:latin typeface="Cambria Math" panose="02040503050406030204" pitchFamily="18" charset="0"/>
+                                </a:rPr>
+                                <m:t>𝑡</m:t>
+                              </m:r>
+                            </m:e>
+                          </m:d>
+                        </m:num>
+                        <m:den>
+                          <m:r>
+                            <m:rPr>
+                              <m:sty m:val="p"/>
+                            </m:rPr>
+                            <a:rPr lang="en-US" sz="2400" b="0" i="0" smtClean="0">
+                              <a:latin typeface="Cambria Math" panose="02040503050406030204" pitchFamily="18" charset="0"/>
+                            </a:rPr>
+                            <m:t>Λ</m:t>
+                          </m:r>
+                          <m:d>
+                            <m:dPr>
+                              <m:ctrlPr>
+                                <a:rPr lang="en-US" sz="2400" b="0" i="1" smtClean="0">
+                                  <a:latin typeface="Cambria Math" panose="02040503050406030204" pitchFamily="18" charset="0"/>
+                                </a:rPr>
+                              </m:ctrlPr>
+                            </m:dPr>
+                            <m:e>
+                              <m:r>
+                                <a:rPr lang="en-US" sz="2400" b="0" i="1" smtClean="0">
+                                  <a:latin typeface="Cambria Math" panose="02040503050406030204" pitchFamily="18" charset="0"/>
+                                </a:rPr>
+                                <m:t>𝑎</m:t>
+                              </m:r>
+                              <m:r>
+                                <a:rPr lang="en-US" sz="2400" b="0" i="1" smtClean="0">
+                                  <a:latin typeface="Cambria Math" panose="02040503050406030204" pitchFamily="18" charset="0"/>
+                                </a:rPr>
+                                <m:t>,</m:t>
+                              </m:r>
+                              <m:r>
+                                <a:rPr lang="en-US" sz="2400" b="0" i="1" smtClean="0">
+                                  <a:latin typeface="Cambria Math" panose="02040503050406030204" pitchFamily="18" charset="0"/>
+                                </a:rPr>
+                                <m:t>𝑏</m:t>
+                              </m:r>
+                            </m:e>
+                          </m:d>
+                        </m:den>
+                      </m:f>
+                    </m:oMath>
+                  </m:oMathPara>
+                </a14:m>
+                <a:endParaRPr lang="en-US" sz="2400" dirty="0"/>
+              </a:p>
+              <a:p>
+                <a:pPr marL="0" indent="0">
+                  <a:buNone/>
+                </a:pPr>
+                <a:endParaRPr lang="en-US" sz="2400" dirty="0"/>
+              </a:p>
+              <a:p>
+                <a:pPr marL="0" indent="0">
+                  <a:buNone/>
+                </a:pPr>
+                <a:endParaRPr lang="en-US" sz="2400" dirty="0"/>
+              </a:p>
+              <a:p>
+                <a:pPr marL="0" indent="0">
+                  <a:buNone/>
+                </a:pPr>
+                <a:r>
+                  <a:rPr lang="en-US" sz="2400" i="1" dirty="0"/>
+                  <a:t>(i.e., distributed according to the normalized intensity measure)</a:t>
+                </a:r>
+              </a:p>
+            </p:txBody>
+          </p:sp>
+        </mc:Choice>
+        <mc:Fallback xmlns="">
+          <p:sp>
+            <p:nvSpPr>
+              <p:cNvPr id="5" name="Content Placeholder 4">
+                <a:extLst>
+                  <a:ext uri="{FF2B5EF4-FFF2-40B4-BE49-F238E27FC236}">
+                    <a16:creationId xmlns:a16="http://schemas.microsoft.com/office/drawing/2014/main" id="{2268DC9B-877D-6B3A-8BB6-27B788C3688C}"/>
+                  </a:ext>
+                </a:extLst>
+              </p:cNvPr>
+              <p:cNvSpPr>
+                <a:spLocks noGrp="1" noRot="1" noChangeAspect="1" noMove="1" noResize="1" noEditPoints="1" noAdjustHandles="1" noChangeArrowheads="1" noChangeShapeType="1" noTextEdit="1"/>
+              </p:cNvSpPr>
+              <p:nvPr>
+                <p:ph sz="half" idx="2"/>
+              </p:nvPr>
+            </p:nvSpPr>
+            <p:spPr>
+              <a:xfrm>
+                <a:off x="7155712" y="1825625"/>
+                <a:ext cx="4837814" cy="4351338"/>
+              </a:xfrm>
+              <a:blipFill>
+                <a:blip r:embed="rId3"/>
+                <a:stretch>
+                  <a:fillRect l="-2094" t="-2035"/>
+                </a:stretch>
+              </a:blipFill>
+            </p:spPr>
+            <p:txBody>
+              <a:bodyPr/>
+              <a:lstStyle/>
+              <a:p>
+                <a:r>
+                  <a:rPr lang="en-US">
+                    <a:noFill/>
+                  </a:rPr>
+                  <a:t> </a:t>
+                </a:r>
+              </a:p>
+            </p:txBody>
+          </p:sp>
+        </mc:Fallback>
+      </mc:AlternateContent>
+    </p:spTree>
+    <p:extLst>
+      <p:ext uri="{BB962C8B-B14F-4D97-AF65-F5344CB8AC3E}">
+        <p14:creationId xmlns:p14="http://schemas.microsoft.com/office/powerpoint/2010/main" val="2825151419"/>
+      </p:ext>
+    </p:extLst>
+  </p:cSld>
+  <p:clrMapOvr>
+    <a:masterClrMapping/>
+  </p:clrMapOvr>
+</p:sld>
+</file>
+
+<file path=ppt/slides/slide34.xml><?xml version="1.0" encoding="utf-8"?>
+<p:sld xmlns:a="http://schemas.openxmlformats.org/drawingml/2006/main" xmlns:r="http://schemas.openxmlformats.org/officeDocument/2006/relationships" xmlns:p="http://schemas.openxmlformats.org/presentationml/2006/main">
+  <p:cSld>
+    <p:spTree>
+      <p:nvGrpSpPr>
+        <p:cNvPr id="1" name=""/>
+        <p:cNvGrpSpPr/>
+        <p:nvPr/>
+      </p:nvGrpSpPr>
+      <p:grpSpPr>
+        <a:xfrm>
+          <a:off x="0" y="0"/>
+          <a:ext cx="0" cy="0"/>
+          <a:chOff x="0" y="0"/>
+          <a:chExt cx="0" cy="0"/>
+        </a:xfrm>
+      </p:grpSpPr>
+      <p:sp>
+        <p:nvSpPr>
+          <p:cNvPr id="5" name="Title 4">
+            <a:extLst>
+              <a:ext uri="{FF2B5EF4-FFF2-40B4-BE49-F238E27FC236}">
+                <a16:creationId xmlns:a16="http://schemas.microsoft.com/office/drawing/2014/main" id="{AA847EBF-6073-F229-4FCC-20C325052BF1}"/>
+              </a:ext>
+            </a:extLst>
+          </p:cNvPr>
+          <p:cNvSpPr>
+            <a:spLocks noGrp="1"/>
+          </p:cNvSpPr>
+          <p:nvPr>
+            <p:ph type="title"/>
+          </p:nvPr>
+        </p:nvSpPr>
+        <p:spPr/>
+        <p:txBody>
+          <a:bodyPr/>
+          <a:lstStyle/>
+          <a:p>
+            <a:r>
+              <a:rPr lang="en-US" dirty="0"/>
+              <a:t>All events vs earliest event in the example</a:t>
+            </a:r>
+          </a:p>
+        </p:txBody>
+      </p:sp>
+      <p:sp>
+        <p:nvSpPr>
+          <p:cNvPr id="2" name="Text Placeholder 1">
+            <a:extLst>
+              <a:ext uri="{FF2B5EF4-FFF2-40B4-BE49-F238E27FC236}">
+                <a16:creationId xmlns:a16="http://schemas.microsoft.com/office/drawing/2014/main" id="{D92138C8-46BE-7AE2-E687-732D59006BDF}"/>
+              </a:ext>
+            </a:extLst>
+          </p:cNvPr>
+          <p:cNvSpPr>
+            <a:spLocks noGrp="1"/>
+          </p:cNvSpPr>
+          <p:nvPr>
+            <p:ph type="body" idx="1"/>
+          </p:nvPr>
+        </p:nvSpPr>
+        <p:spPr/>
+        <p:txBody>
+          <a:bodyPr/>
+          <a:lstStyle/>
+          <a:p>
+            <a:r>
+              <a:rPr lang="en-US" dirty="0"/>
+              <a:t>All events, 10K instantiations</a:t>
+            </a:r>
+          </a:p>
+        </p:txBody>
+      </p:sp>
+      <p:sp>
+        <p:nvSpPr>
+          <p:cNvPr id="4" name="Text Placeholder 3">
+            <a:extLst>
+              <a:ext uri="{FF2B5EF4-FFF2-40B4-BE49-F238E27FC236}">
+                <a16:creationId xmlns:a16="http://schemas.microsoft.com/office/drawing/2014/main" id="{37E89C0F-59FB-904E-8031-358CA39577A0}"/>
+              </a:ext>
+            </a:extLst>
+          </p:cNvPr>
+          <p:cNvSpPr>
+            <a:spLocks noGrp="1"/>
+          </p:cNvSpPr>
+          <p:nvPr>
+            <p:ph type="body" sz="quarter" idx="3"/>
+          </p:nvPr>
+        </p:nvSpPr>
+        <p:spPr/>
+        <p:txBody>
+          <a:bodyPr/>
+          <a:lstStyle/>
+          <a:p>
+            <a:r>
+              <a:rPr lang="en-US" dirty="0"/>
+              <a:t>Earliest event, 10K instantiations</a:t>
+            </a:r>
+          </a:p>
+        </p:txBody>
+      </p:sp>
+      <p:pic>
+        <p:nvPicPr>
+          <p:cNvPr id="15" name="Content Placeholder 14">
+            <a:extLst>
+              <a:ext uri="{FF2B5EF4-FFF2-40B4-BE49-F238E27FC236}">
+                <a16:creationId xmlns:a16="http://schemas.microsoft.com/office/drawing/2014/main" id="{D4FB3511-E2B2-17F7-92E4-E490E9C8C5CE}"/>
+              </a:ext>
+            </a:extLst>
+          </p:cNvPr>
+          <p:cNvPicPr>
+            <a:picLocks noGrp="1" noChangeAspect="1"/>
+          </p:cNvPicPr>
+          <p:nvPr>
+            <p:ph sz="quarter" idx="4"/>
+          </p:nvPr>
+        </p:nvPicPr>
+        <p:blipFill>
+          <a:blip r:embed="rId2"/>
+          <a:stretch>
+            <a:fillRect/>
+          </a:stretch>
+        </p:blipFill>
+        <p:spPr>
+          <a:xfrm>
+            <a:off x="6477794" y="2975769"/>
+            <a:ext cx="4572000" cy="2743200"/>
+          </a:xfrm>
+        </p:spPr>
+      </p:pic>
+      <p:pic>
+        <p:nvPicPr>
+          <p:cNvPr id="13" name="Content Placeholder 12">
+            <a:extLst>
+              <a:ext uri="{FF2B5EF4-FFF2-40B4-BE49-F238E27FC236}">
+                <a16:creationId xmlns:a16="http://schemas.microsoft.com/office/drawing/2014/main" id="{64B0C565-3DA6-E21A-2A1B-B190CE0F406C}"/>
+              </a:ext>
+            </a:extLst>
+          </p:cNvPr>
+          <p:cNvPicPr>
+            <a:picLocks noGrp="1" noChangeAspect="1"/>
+          </p:cNvPicPr>
+          <p:nvPr>
+            <p:ph sz="half" idx="2"/>
+          </p:nvPr>
+        </p:nvPicPr>
+        <p:blipFill>
+          <a:blip r:embed="rId3"/>
+          <a:stretch>
+            <a:fillRect/>
+          </a:stretch>
+        </p:blipFill>
+        <p:spPr>
+          <a:xfrm>
+            <a:off x="1132681" y="2975769"/>
+            <a:ext cx="4572000" cy="2743200"/>
+          </a:xfrm>
+        </p:spPr>
+      </p:pic>
+      <p:sp>
+        <p:nvSpPr>
+          <p:cNvPr id="16" name="TextBox 15">
+            <a:extLst>
+              <a:ext uri="{FF2B5EF4-FFF2-40B4-BE49-F238E27FC236}">
+                <a16:creationId xmlns:a16="http://schemas.microsoft.com/office/drawing/2014/main" id="{63F00209-6310-DED9-4A57-CA921A82AC73}"/>
+              </a:ext>
+            </a:extLst>
+          </p:cNvPr>
+          <p:cNvSpPr txBox="1"/>
+          <p:nvPr/>
+        </p:nvSpPr>
+        <p:spPr>
+          <a:xfrm>
+            <a:off x="6477794" y="5866497"/>
+            <a:ext cx="5276193" cy="646331"/>
+          </a:xfrm>
+          <a:prstGeom prst="rect">
+            <a:avLst/>
+          </a:prstGeom>
+          <a:noFill/>
+        </p:spPr>
+        <p:txBody>
+          <a:bodyPr wrap="square" rtlCol="0">
+            <a:spAutoFit/>
+          </a:bodyPr>
+          <a:lstStyle/>
+          <a:p>
+            <a:r>
+              <a:rPr lang="en-US" i="1" dirty="0"/>
+              <a:t>The histogram of the earliest event times does not approach the shape of the intensity function</a:t>
+            </a:r>
+          </a:p>
+        </p:txBody>
+      </p:sp>
+      <mc:AlternateContent xmlns:mc="http://schemas.openxmlformats.org/markup-compatibility/2006" xmlns:a14="http://schemas.microsoft.com/office/drawing/2010/main">
+        <mc:Choice Requires="a14">
+          <p:sp>
+            <p:nvSpPr>
+              <p:cNvPr id="3" name="TextBox 2">
+                <a:extLst>
+                  <a:ext uri="{FF2B5EF4-FFF2-40B4-BE49-F238E27FC236}">
+                    <a16:creationId xmlns:a16="http://schemas.microsoft.com/office/drawing/2014/main" id="{40E8F999-9314-E353-EF79-123D18580CA9}"/>
+                  </a:ext>
+                </a:extLst>
+              </p:cNvPr>
+              <p:cNvSpPr txBox="1"/>
+              <p:nvPr/>
+            </p:nvSpPr>
+            <p:spPr>
+              <a:xfrm>
+                <a:off x="2858814" y="2975769"/>
+                <a:ext cx="2805960" cy="710194"/>
+              </a:xfrm>
+              <a:prstGeom prst="rect">
+                <a:avLst/>
+              </a:prstGeom>
+              <a:noFill/>
+            </p:spPr>
+            <p:txBody>
+              <a:bodyPr wrap="none" rtlCol="0">
+                <a:spAutoFit/>
+              </a:bodyPr>
+              <a:lstStyle/>
+              <a:p>
+                <a:pPr/>
+                <a14:m>
+                  <m:oMathPara xmlns:m="http://schemas.openxmlformats.org/officeDocument/2006/math">
+                    <m:oMathParaPr>
+                      <m:jc m:val="centerGroup"/>
+                    </m:oMathParaPr>
+                    <m:oMath xmlns:m="http://schemas.openxmlformats.org/officeDocument/2006/math">
+                      <m:r>
+                        <a:rPr lang="en-US" b="0" i="1" smtClean="0">
+                          <a:latin typeface="Cambria Math" panose="02040503050406030204" pitchFamily="18" charset="0"/>
+                        </a:rPr>
+                        <m:t>𝜆</m:t>
+                      </m:r>
+                      <m:d>
+                        <m:dPr>
+                          <m:ctrlPr>
+                            <a:rPr lang="en-US" b="0" i="1" smtClean="0">
+                              <a:latin typeface="Cambria Math" panose="02040503050406030204" pitchFamily="18" charset="0"/>
+                            </a:rPr>
+                          </m:ctrlPr>
+                        </m:dPr>
+                        <m:e>
+                          <m:r>
+                            <a:rPr lang="en-US" b="0" i="1" smtClean="0">
+                              <a:latin typeface="Cambria Math" panose="02040503050406030204" pitchFamily="18" charset="0"/>
+                            </a:rPr>
+                            <m:t>𝑡</m:t>
+                          </m:r>
+                        </m:e>
+                      </m:d>
+                      <m:r>
+                        <a:rPr lang="en-US" b="0" i="1" smtClean="0">
+                          <a:latin typeface="Cambria Math" panose="02040503050406030204" pitchFamily="18" charset="0"/>
+                        </a:rPr>
+                        <m:t>=</m:t>
+                      </m:r>
+                      <m:d>
+                        <m:dPr>
+                          <m:begChr m:val="{"/>
+                          <m:endChr m:val=""/>
+                          <m:ctrlPr>
+                            <a:rPr lang="en-US" b="0" i="1" smtClean="0">
+                              <a:latin typeface="Cambria Math" panose="02040503050406030204" pitchFamily="18" charset="0"/>
+                            </a:rPr>
+                          </m:ctrlPr>
+                        </m:dPr>
+                        <m:e>
+                          <m:eqArr>
+                            <m:eqArrPr>
+                              <m:ctrlPr>
+                                <a:rPr lang="en-US" b="0" i="1" smtClean="0">
+                                  <a:latin typeface="Cambria Math" panose="02040503050406030204" pitchFamily="18" charset="0"/>
+                                </a:rPr>
+                              </m:ctrlPr>
+                            </m:eqArrPr>
+                            <m:e>
+                              <m:r>
+                                <a:rPr lang="en-US" b="0" i="1" smtClean="0">
+                                  <a:latin typeface="Cambria Math" panose="02040503050406030204" pitchFamily="18" charset="0"/>
+                                </a:rPr>
+                                <m:t>1,      </m:t>
+                              </m:r>
+                              <m:r>
+                                <a:rPr lang="en-US" b="0" i="1" smtClean="0">
+                                  <a:latin typeface="Cambria Math" panose="02040503050406030204" pitchFamily="18" charset="0"/>
+                                </a:rPr>
+                                <m:t>𝑡</m:t>
+                              </m:r>
+                              <m:r>
+                                <a:rPr lang="en-US" b="0" i="1" smtClean="0">
+                                  <a:latin typeface="Cambria Math" panose="02040503050406030204" pitchFamily="18" charset="0"/>
+                                </a:rPr>
+                                <m:t>∈[1, 5]</m:t>
+                              </m:r>
+                            </m:e>
+                            <m:e>
+                              <m:r>
+                                <a:rPr lang="en-US" b="0" i="1" smtClean="0">
+                                  <a:latin typeface="Cambria Math" panose="02040503050406030204" pitchFamily="18" charset="0"/>
+                                </a:rPr>
+                                <m:t>&amp;0,   </m:t>
+                              </m:r>
+                              <m:r>
+                                <m:rPr>
+                                  <m:sty m:val="p"/>
+                                </m:rPr>
+                                <a:rPr lang="en-US" b="0" i="0" smtClean="0">
+                                  <a:latin typeface="Cambria Math" panose="02040503050406030204" pitchFamily="18" charset="0"/>
+                                </a:rPr>
+                                <m:t>elsewhere</m:t>
+                              </m:r>
+                              <m:r>
+                                <a:rPr lang="en-US" b="0" i="1" smtClean="0">
+                                  <a:latin typeface="Cambria Math" panose="02040503050406030204" pitchFamily="18" charset="0"/>
+                                </a:rPr>
+                                <m:t> </m:t>
+                              </m:r>
+                            </m:e>
+                          </m:eqArr>
+                        </m:e>
+                      </m:d>
+                    </m:oMath>
+                  </m:oMathPara>
+                </a14:m>
+                <a:endParaRPr lang="en-US" dirty="0"/>
+              </a:p>
+            </p:txBody>
+          </p:sp>
+        </mc:Choice>
+        <mc:Fallback xmlns="">
+          <p:sp>
+            <p:nvSpPr>
+              <p:cNvPr id="3" name="TextBox 2">
+                <a:extLst>
+                  <a:ext uri="{FF2B5EF4-FFF2-40B4-BE49-F238E27FC236}">
+                    <a16:creationId xmlns:a16="http://schemas.microsoft.com/office/drawing/2014/main" id="{40E8F999-9314-E353-EF79-123D18580CA9}"/>
+                  </a:ext>
+                </a:extLst>
+              </p:cNvPr>
+              <p:cNvSpPr txBox="1">
+                <a:spLocks noRot="1" noChangeAspect="1" noMove="1" noResize="1" noEditPoints="1" noAdjustHandles="1" noChangeArrowheads="1" noChangeShapeType="1" noTextEdit="1"/>
+              </p:cNvSpPr>
+              <p:nvPr/>
+            </p:nvSpPr>
+            <p:spPr>
+              <a:xfrm>
+                <a:off x="2858814" y="2975769"/>
+                <a:ext cx="2805960" cy="710194"/>
+              </a:xfrm>
+              <a:prstGeom prst="rect">
+                <a:avLst/>
+              </a:prstGeom>
+              <a:blipFill>
+                <a:blip r:embed="rId4"/>
+                <a:stretch>
+                  <a:fillRect l="-12217" t="-191228" b="-277193"/>
+                </a:stretch>
+              </a:blipFill>
+            </p:spPr>
+            <p:txBody>
+              <a:bodyPr/>
+              <a:lstStyle/>
+              <a:p>
+                <a:r>
+                  <a:rPr lang="en-US">
+                    <a:noFill/>
+                  </a:rPr>
+                  <a:t> </a:t>
+                </a:r>
+              </a:p>
+            </p:txBody>
+          </p:sp>
+        </mc:Fallback>
+      </mc:AlternateContent>
+      <mc:AlternateContent xmlns:mc="http://schemas.openxmlformats.org/markup-compatibility/2006" xmlns:a14="http://schemas.microsoft.com/office/drawing/2010/main">
+        <mc:Choice Requires="a14">
+          <p:sp>
+            <p:nvSpPr>
+              <p:cNvPr id="8" name="TextBox 7">
+                <a:extLst>
+                  <a:ext uri="{FF2B5EF4-FFF2-40B4-BE49-F238E27FC236}">
+                    <a16:creationId xmlns:a16="http://schemas.microsoft.com/office/drawing/2014/main" id="{3B7BBE7E-D1B8-CE55-25D7-E03FDD3191EF}"/>
+                  </a:ext>
+                </a:extLst>
+              </p:cNvPr>
+              <p:cNvSpPr txBox="1"/>
+              <p:nvPr/>
+            </p:nvSpPr>
+            <p:spPr>
+              <a:xfrm>
+                <a:off x="8243834" y="2975769"/>
+                <a:ext cx="2805960" cy="710194"/>
+              </a:xfrm>
+              <a:prstGeom prst="rect">
+                <a:avLst/>
+              </a:prstGeom>
+              <a:noFill/>
+            </p:spPr>
+            <p:txBody>
+              <a:bodyPr wrap="none" rtlCol="0">
+                <a:spAutoFit/>
+              </a:bodyPr>
+              <a:lstStyle/>
+              <a:p>
+                <a:pPr/>
+                <a14:m>
+                  <m:oMathPara xmlns:m="http://schemas.openxmlformats.org/officeDocument/2006/math">
+                    <m:oMathParaPr>
+                      <m:jc m:val="centerGroup"/>
+                    </m:oMathParaPr>
+                    <m:oMath xmlns:m="http://schemas.openxmlformats.org/officeDocument/2006/math">
+                      <m:r>
+                        <a:rPr lang="en-US" b="0" i="1" smtClean="0">
+                          <a:latin typeface="Cambria Math" panose="02040503050406030204" pitchFamily="18" charset="0"/>
+                        </a:rPr>
+                        <m:t>𝜆</m:t>
+                      </m:r>
+                      <m:d>
+                        <m:dPr>
+                          <m:ctrlPr>
+                            <a:rPr lang="en-US" b="0" i="1" smtClean="0">
+                              <a:latin typeface="Cambria Math" panose="02040503050406030204" pitchFamily="18" charset="0"/>
+                            </a:rPr>
+                          </m:ctrlPr>
+                        </m:dPr>
+                        <m:e>
+                          <m:r>
+                            <a:rPr lang="en-US" b="0" i="1" smtClean="0">
+                              <a:latin typeface="Cambria Math" panose="02040503050406030204" pitchFamily="18" charset="0"/>
+                            </a:rPr>
+                            <m:t>𝑡</m:t>
+                          </m:r>
+                        </m:e>
+                      </m:d>
+                      <m:r>
+                        <a:rPr lang="en-US" b="0" i="1" smtClean="0">
+                          <a:latin typeface="Cambria Math" panose="02040503050406030204" pitchFamily="18" charset="0"/>
+                        </a:rPr>
+                        <m:t>=</m:t>
+                      </m:r>
+                      <m:d>
+                        <m:dPr>
+                          <m:begChr m:val="{"/>
+                          <m:endChr m:val=""/>
+                          <m:ctrlPr>
+                            <a:rPr lang="en-US" b="0" i="1" smtClean="0">
+                              <a:latin typeface="Cambria Math" panose="02040503050406030204" pitchFamily="18" charset="0"/>
+                            </a:rPr>
+                          </m:ctrlPr>
+                        </m:dPr>
+                        <m:e>
+                          <m:eqArr>
+                            <m:eqArrPr>
+                              <m:ctrlPr>
+                                <a:rPr lang="en-US" b="0" i="1" smtClean="0">
+                                  <a:latin typeface="Cambria Math" panose="02040503050406030204" pitchFamily="18" charset="0"/>
+                                </a:rPr>
+                              </m:ctrlPr>
+                            </m:eqArrPr>
+                            <m:e>
+                              <m:r>
+                                <a:rPr lang="en-US" b="0" i="1" smtClean="0">
+                                  <a:latin typeface="Cambria Math" panose="02040503050406030204" pitchFamily="18" charset="0"/>
+                                </a:rPr>
+                                <m:t>1,      </m:t>
+                              </m:r>
+                              <m:r>
+                                <a:rPr lang="en-US" b="0" i="1" smtClean="0">
+                                  <a:latin typeface="Cambria Math" panose="02040503050406030204" pitchFamily="18" charset="0"/>
+                                </a:rPr>
+                                <m:t>𝑡</m:t>
+                              </m:r>
+                              <m:r>
+                                <a:rPr lang="en-US" b="0" i="1" smtClean="0">
+                                  <a:latin typeface="Cambria Math" panose="02040503050406030204" pitchFamily="18" charset="0"/>
+                                </a:rPr>
+                                <m:t>∈[1, 5]</m:t>
+                              </m:r>
+                            </m:e>
+                            <m:e>
+                              <m:r>
+                                <a:rPr lang="en-US" b="0" i="1" smtClean="0">
+                                  <a:latin typeface="Cambria Math" panose="02040503050406030204" pitchFamily="18" charset="0"/>
+                                </a:rPr>
+                                <m:t>&amp;0,   </m:t>
+                              </m:r>
+                              <m:r>
+                                <m:rPr>
+                                  <m:sty m:val="p"/>
+                                </m:rPr>
+                                <a:rPr lang="en-US" b="0" i="0" smtClean="0">
+                                  <a:latin typeface="Cambria Math" panose="02040503050406030204" pitchFamily="18" charset="0"/>
+                                </a:rPr>
+                                <m:t>elsewhere</m:t>
+                              </m:r>
+                              <m:r>
+                                <a:rPr lang="en-US" b="0" i="1" smtClean="0">
+                                  <a:latin typeface="Cambria Math" panose="02040503050406030204" pitchFamily="18" charset="0"/>
+                                </a:rPr>
+                                <m:t> </m:t>
+                              </m:r>
+                            </m:e>
+                          </m:eqArr>
+                        </m:e>
+                      </m:d>
+                    </m:oMath>
+                  </m:oMathPara>
+                </a14:m>
+                <a:endParaRPr lang="en-US" dirty="0"/>
+              </a:p>
+            </p:txBody>
+          </p:sp>
+        </mc:Choice>
+        <mc:Fallback xmlns="">
+          <p:sp>
+            <p:nvSpPr>
+              <p:cNvPr id="8" name="TextBox 7">
+                <a:extLst>
+                  <a:ext uri="{FF2B5EF4-FFF2-40B4-BE49-F238E27FC236}">
+                    <a16:creationId xmlns:a16="http://schemas.microsoft.com/office/drawing/2014/main" id="{3B7BBE7E-D1B8-CE55-25D7-E03FDD3191EF}"/>
+                  </a:ext>
+                </a:extLst>
+              </p:cNvPr>
+              <p:cNvSpPr txBox="1">
+                <a:spLocks noRot="1" noChangeAspect="1" noMove="1" noResize="1" noEditPoints="1" noAdjustHandles="1" noChangeArrowheads="1" noChangeShapeType="1" noTextEdit="1"/>
+              </p:cNvSpPr>
+              <p:nvPr/>
+            </p:nvSpPr>
+            <p:spPr>
+              <a:xfrm>
+                <a:off x="8243834" y="2975769"/>
+                <a:ext cx="2805960" cy="710194"/>
+              </a:xfrm>
+              <a:prstGeom prst="rect">
+                <a:avLst/>
+              </a:prstGeom>
+              <a:blipFill>
+                <a:blip r:embed="rId5"/>
+                <a:stretch>
+                  <a:fillRect l="-11659" t="-191228" b="-277193"/>
+                </a:stretch>
+              </a:blipFill>
+            </p:spPr>
+            <p:txBody>
+              <a:bodyPr/>
+              <a:lstStyle/>
+              <a:p>
+                <a:r>
+                  <a:rPr lang="en-US">
+                    <a:noFill/>
+                  </a:rPr>
+                  <a:t> </a:t>
+                </a:r>
+              </a:p>
+            </p:txBody>
+          </p:sp>
+        </mc:Fallback>
+      </mc:AlternateContent>
+    </p:spTree>
+    <p:extLst>
+      <p:ext uri="{BB962C8B-B14F-4D97-AF65-F5344CB8AC3E}">
+        <p14:creationId xmlns:p14="http://schemas.microsoft.com/office/powerpoint/2010/main" val="1751563445"/>
+      </p:ext>
+    </p:extLst>
+  </p:cSld>
+  <p:clrMapOvr>
+    <a:masterClrMapping/>
+  </p:clrMapOvr>
+</p:sld>
+</file>
+
 <file path=ppt/slides/slide35.xml><?xml version="1.0" encoding="utf-8"?>
+<p:sld xmlns:a="http://schemas.openxmlformats.org/drawingml/2006/main" xmlns:r="http://schemas.openxmlformats.org/officeDocument/2006/relationships" xmlns:p="http://schemas.openxmlformats.org/presentationml/2006/main">
+  <p:cSld>
+    <p:spTree>
+      <p:nvGrpSpPr>
+        <p:cNvPr id="1" name=""/>
+        <p:cNvGrpSpPr/>
+        <p:nvPr/>
+      </p:nvGrpSpPr>
+      <p:grpSpPr>
+        <a:xfrm>
+          <a:off x="0" y="0"/>
+          <a:ext cx="0" cy="0"/>
+          <a:chOff x="0" y="0"/>
+          <a:chExt cx="0" cy="0"/>
+        </a:xfrm>
+      </p:grpSpPr>
+      <p:sp>
+        <p:nvSpPr>
+          <p:cNvPr id="2" name="Title 1">
+            <a:extLst>
+              <a:ext uri="{FF2B5EF4-FFF2-40B4-BE49-F238E27FC236}">
+                <a16:creationId xmlns:a16="http://schemas.microsoft.com/office/drawing/2014/main" id="{BC06D8A5-F13F-01BB-43BD-C3D449F9AF3C}"/>
+              </a:ext>
+            </a:extLst>
+          </p:cNvPr>
+          <p:cNvSpPr>
+            <a:spLocks noGrp="1"/>
+          </p:cNvSpPr>
+          <p:nvPr>
+            <p:ph type="title"/>
+          </p:nvPr>
+        </p:nvSpPr>
+        <p:spPr/>
+        <p:txBody>
+          <a:bodyPr/>
+          <a:lstStyle/>
+          <a:p>
+            <a:r>
+              <a:rPr lang="en-US" dirty="0"/>
+              <a:t>All events vs earliest event, different example</a:t>
+            </a:r>
+          </a:p>
+        </p:txBody>
+      </p:sp>
+      <p:sp>
+        <p:nvSpPr>
+          <p:cNvPr id="5" name="Text Placeholder 4">
+            <a:extLst>
+              <a:ext uri="{FF2B5EF4-FFF2-40B4-BE49-F238E27FC236}">
+                <a16:creationId xmlns:a16="http://schemas.microsoft.com/office/drawing/2014/main" id="{42A16181-0D8A-71E2-C54B-CBF0E2E23642}"/>
+              </a:ext>
+            </a:extLst>
+          </p:cNvPr>
+          <p:cNvSpPr>
+            <a:spLocks noGrp="1"/>
+          </p:cNvSpPr>
+          <p:nvPr>
+            <p:ph type="body" idx="1"/>
+          </p:nvPr>
+        </p:nvSpPr>
+        <p:spPr/>
+        <p:txBody>
+          <a:bodyPr/>
+          <a:lstStyle/>
+          <a:p>
+            <a:r>
+              <a:rPr lang="en-US" dirty="0"/>
+              <a:t>All events, 100K instantiations</a:t>
+            </a:r>
+          </a:p>
+        </p:txBody>
+      </p:sp>
+      <p:pic>
+        <p:nvPicPr>
+          <p:cNvPr id="13" name="Content Placeholder 12">
+            <a:extLst>
+              <a:ext uri="{FF2B5EF4-FFF2-40B4-BE49-F238E27FC236}">
+                <a16:creationId xmlns:a16="http://schemas.microsoft.com/office/drawing/2014/main" id="{88774C88-5843-D1A4-4ACB-1F0045514924}"/>
+              </a:ext>
+            </a:extLst>
+          </p:cNvPr>
+          <p:cNvPicPr>
+            <a:picLocks noGrp="1" noChangeAspect="1"/>
+          </p:cNvPicPr>
+          <p:nvPr>
+            <p:ph sz="half" idx="2"/>
+          </p:nvPr>
+        </p:nvPicPr>
+        <p:blipFill>
+          <a:blip r:embed="rId2"/>
+          <a:stretch>
+            <a:fillRect/>
+          </a:stretch>
+        </p:blipFill>
+        <p:spPr>
+          <a:xfrm>
+            <a:off x="1132681" y="2975769"/>
+            <a:ext cx="4572000" cy="2743200"/>
+          </a:xfrm>
+        </p:spPr>
+      </p:pic>
+      <p:sp>
+        <p:nvSpPr>
+          <p:cNvPr id="6" name="Text Placeholder 5">
+            <a:extLst>
+              <a:ext uri="{FF2B5EF4-FFF2-40B4-BE49-F238E27FC236}">
+                <a16:creationId xmlns:a16="http://schemas.microsoft.com/office/drawing/2014/main" id="{C453CF1F-DCF6-010B-00A3-D14B6DE03F53}"/>
+              </a:ext>
+            </a:extLst>
+          </p:cNvPr>
+          <p:cNvSpPr>
+            <a:spLocks noGrp="1"/>
+          </p:cNvSpPr>
+          <p:nvPr>
+            <p:ph type="body" sz="quarter" idx="3"/>
+          </p:nvPr>
+        </p:nvSpPr>
+        <p:spPr/>
+        <p:txBody>
+          <a:bodyPr/>
+          <a:lstStyle/>
+          <a:p>
+            <a:r>
+              <a:rPr lang="en-US" dirty="0"/>
+              <a:t>Earliest event</a:t>
+            </a:r>
+            <a:r>
+              <a:rPr lang="en-US"/>
+              <a:t>, 100K </a:t>
+            </a:r>
+            <a:r>
+              <a:rPr lang="en-US" dirty="0"/>
+              <a:t>instantiations</a:t>
+            </a:r>
+          </a:p>
+        </p:txBody>
+      </p:sp>
+      <p:pic>
+        <p:nvPicPr>
+          <p:cNvPr id="11" name="Content Placeholder 10">
+            <a:extLst>
+              <a:ext uri="{FF2B5EF4-FFF2-40B4-BE49-F238E27FC236}">
+                <a16:creationId xmlns:a16="http://schemas.microsoft.com/office/drawing/2014/main" id="{E71AA7DB-A9D9-3134-282D-1C83B52E1074}"/>
+              </a:ext>
+            </a:extLst>
+          </p:cNvPr>
+          <p:cNvPicPr>
+            <a:picLocks noGrp="1" noChangeAspect="1"/>
+          </p:cNvPicPr>
+          <p:nvPr>
+            <p:ph sz="quarter" idx="4"/>
+          </p:nvPr>
+        </p:nvPicPr>
+        <p:blipFill>
+          <a:blip r:embed="rId3"/>
+          <a:stretch>
+            <a:fillRect/>
+          </a:stretch>
+        </p:blipFill>
+        <p:spPr>
+          <a:xfrm>
+            <a:off x="6477794" y="2975769"/>
+            <a:ext cx="4572000" cy="2743200"/>
+          </a:xfrm>
+        </p:spPr>
+      </p:pic>
+      <mc:AlternateContent xmlns:mc="http://schemas.openxmlformats.org/markup-compatibility/2006" xmlns:a14="http://schemas.microsoft.com/office/drawing/2010/main">
+        <mc:Choice Requires="a14">
+          <p:sp>
+            <p:nvSpPr>
+              <p:cNvPr id="15" name="TextBox 14">
+                <a:extLst>
+                  <a:ext uri="{FF2B5EF4-FFF2-40B4-BE49-F238E27FC236}">
+                    <a16:creationId xmlns:a16="http://schemas.microsoft.com/office/drawing/2014/main" id="{2CF761AA-5483-D85E-1694-E6D92A570723}"/>
+                  </a:ext>
+                </a:extLst>
+              </p:cNvPr>
+              <p:cNvSpPr txBox="1"/>
+              <p:nvPr/>
+            </p:nvSpPr>
+            <p:spPr>
+              <a:xfrm>
+                <a:off x="1941030" y="3041081"/>
+                <a:ext cx="3216329" cy="710194"/>
+              </a:xfrm>
+              <a:prstGeom prst="rect">
+                <a:avLst/>
+              </a:prstGeom>
+              <a:noFill/>
+            </p:spPr>
+            <p:txBody>
+              <a:bodyPr wrap="none" rtlCol="0">
+                <a:spAutoFit/>
+              </a:bodyPr>
+              <a:lstStyle/>
+              <a:p>
+                <a:pPr/>
+                <a14:m>
+                  <m:oMathPara xmlns:m="http://schemas.openxmlformats.org/officeDocument/2006/math">
+                    <m:oMathParaPr>
+                      <m:jc m:val="centerGroup"/>
+                    </m:oMathParaPr>
+                    <m:oMath xmlns:m="http://schemas.openxmlformats.org/officeDocument/2006/math">
+                      <m:r>
+                        <a:rPr lang="en-US" b="0" i="1" smtClean="0">
+                          <a:latin typeface="Cambria Math" panose="02040503050406030204" pitchFamily="18" charset="0"/>
+                        </a:rPr>
+                        <m:t>𝜆</m:t>
+                      </m:r>
+                      <m:d>
+                        <m:dPr>
+                          <m:ctrlPr>
+                            <a:rPr lang="en-US" b="0" i="1" smtClean="0">
+                              <a:latin typeface="Cambria Math" panose="02040503050406030204" pitchFamily="18" charset="0"/>
+                            </a:rPr>
+                          </m:ctrlPr>
+                        </m:dPr>
+                        <m:e>
+                          <m:r>
+                            <a:rPr lang="en-US" b="0" i="1" smtClean="0">
+                              <a:latin typeface="Cambria Math" panose="02040503050406030204" pitchFamily="18" charset="0"/>
+                            </a:rPr>
+                            <m:t>𝑡</m:t>
+                          </m:r>
+                        </m:e>
+                      </m:d>
+                      <m:r>
+                        <a:rPr lang="en-US" b="0" i="1" smtClean="0">
+                          <a:latin typeface="Cambria Math" panose="02040503050406030204" pitchFamily="18" charset="0"/>
+                        </a:rPr>
+                        <m:t>=</m:t>
+                      </m:r>
+                      <m:d>
+                        <m:dPr>
+                          <m:begChr m:val="{"/>
+                          <m:endChr m:val=""/>
+                          <m:ctrlPr>
+                            <a:rPr lang="en-US" b="0" i="1" smtClean="0">
+                              <a:latin typeface="Cambria Math" panose="02040503050406030204" pitchFamily="18" charset="0"/>
+                            </a:rPr>
+                          </m:ctrlPr>
+                        </m:dPr>
+                        <m:e>
+                          <m:eqArr>
+                            <m:eqArrPr>
+                              <m:ctrlPr>
+                                <a:rPr lang="en-US" b="0" i="1" smtClean="0">
+                                  <a:latin typeface="Cambria Math" panose="02040503050406030204" pitchFamily="18" charset="0"/>
+                                </a:rPr>
+                              </m:ctrlPr>
+                            </m:eqArrPr>
+                            <m:e>
+                              <m:sSup>
+                                <m:sSupPr>
+                                  <m:ctrlPr>
+                                    <a:rPr lang="en-US" b="0" i="1" smtClean="0">
+                                      <a:latin typeface="Cambria Math" panose="02040503050406030204" pitchFamily="18" charset="0"/>
+                                    </a:rPr>
+                                  </m:ctrlPr>
+                                </m:sSupPr>
+                                <m:e>
+                                  <m:r>
+                                    <a:rPr lang="en-US" b="0" i="1" smtClean="0">
+                                      <a:latin typeface="Cambria Math" panose="02040503050406030204" pitchFamily="18" charset="0"/>
+                                    </a:rPr>
+                                    <m:t>𝑒</m:t>
+                                  </m:r>
+                                </m:e>
+                                <m:sup>
+                                  <m:r>
+                                    <a:rPr lang="en-US" b="0" i="1" smtClean="0">
+                                      <a:latin typeface="Cambria Math" panose="02040503050406030204" pitchFamily="18" charset="0"/>
+                                    </a:rPr>
+                                    <m:t>−1+</m:t>
+                                  </m:r>
+                                  <m:r>
+                                    <a:rPr lang="en-US" b="0" i="1" smtClean="0">
+                                      <a:latin typeface="Cambria Math" panose="02040503050406030204" pitchFamily="18" charset="0"/>
+                                    </a:rPr>
+                                    <m:t>𝑡</m:t>
+                                  </m:r>
+                                  <m:r>
+                                    <a:rPr lang="en-US" b="0" i="1" smtClean="0">
+                                      <a:latin typeface="Cambria Math" panose="02040503050406030204" pitchFamily="18" charset="0"/>
+                                    </a:rPr>
+                                    <m:t>/2</m:t>
+                                  </m:r>
+                                </m:sup>
+                              </m:sSup>
+                              <m:r>
+                                <a:rPr lang="en-US" b="0" i="1" smtClean="0">
+                                  <a:latin typeface="Cambria Math" panose="02040503050406030204" pitchFamily="18" charset="0"/>
+                                </a:rPr>
+                                <m:t>,  </m:t>
+                              </m:r>
+                              <m:r>
+                                <a:rPr lang="en-US" b="0" i="1" smtClean="0">
+                                  <a:latin typeface="Cambria Math" panose="02040503050406030204" pitchFamily="18" charset="0"/>
+                                </a:rPr>
+                                <m:t>𝑡</m:t>
+                              </m:r>
+                              <m:r>
+                                <a:rPr lang="en-US" b="0" i="1" smtClean="0">
+                                  <a:latin typeface="Cambria Math" panose="02040503050406030204" pitchFamily="18" charset="0"/>
+                                </a:rPr>
+                                <m:t>∈[1, 5]</m:t>
+                              </m:r>
+                            </m:e>
+                            <m:e>
+                              <m:r>
+                                <a:rPr lang="en-US" b="0" i="1" smtClean="0">
+                                  <a:latin typeface="Cambria Math" panose="02040503050406030204" pitchFamily="18" charset="0"/>
+                                </a:rPr>
+                                <m:t>&amp;0,   </m:t>
+                              </m:r>
+                              <m:r>
+                                <a:rPr lang="en-US" b="0" i="0" smtClean="0">
+                                  <a:latin typeface="Cambria Math" panose="02040503050406030204" pitchFamily="18" charset="0"/>
+                                </a:rPr>
+                                <m:t>       </m:t>
+                              </m:r>
+                              <m:r>
+                                <m:rPr>
+                                  <m:sty m:val="p"/>
+                                </m:rPr>
+                                <a:rPr lang="en-US" b="0" i="0" smtClean="0">
+                                  <a:latin typeface="Cambria Math" panose="02040503050406030204" pitchFamily="18" charset="0"/>
+                                </a:rPr>
+                                <m:t>elsewhere</m:t>
+                              </m:r>
+                              <m:r>
+                                <a:rPr lang="en-US" b="0" i="1" smtClean="0">
+                                  <a:latin typeface="Cambria Math" panose="02040503050406030204" pitchFamily="18" charset="0"/>
+                                </a:rPr>
+                                <m:t> </m:t>
+                              </m:r>
+                            </m:e>
+                          </m:eqArr>
+                        </m:e>
+                      </m:d>
+                    </m:oMath>
+                  </m:oMathPara>
+                </a14:m>
+                <a:endParaRPr lang="en-US" dirty="0"/>
+              </a:p>
+            </p:txBody>
+          </p:sp>
+        </mc:Choice>
+        <mc:Fallback xmlns="">
+          <p:sp>
+            <p:nvSpPr>
+              <p:cNvPr id="15" name="TextBox 14">
+                <a:extLst>
+                  <a:ext uri="{FF2B5EF4-FFF2-40B4-BE49-F238E27FC236}">
+                    <a16:creationId xmlns:a16="http://schemas.microsoft.com/office/drawing/2014/main" id="{2CF761AA-5483-D85E-1694-E6D92A570723}"/>
+                  </a:ext>
+                </a:extLst>
+              </p:cNvPr>
+              <p:cNvSpPr txBox="1">
+                <a:spLocks noRot="1" noChangeAspect="1" noMove="1" noResize="1" noEditPoints="1" noAdjustHandles="1" noChangeArrowheads="1" noChangeShapeType="1" noTextEdit="1"/>
+              </p:cNvSpPr>
+              <p:nvPr/>
+            </p:nvSpPr>
+            <p:spPr>
+              <a:xfrm>
+                <a:off x="1941030" y="3041081"/>
+                <a:ext cx="3216329" cy="710194"/>
+              </a:xfrm>
+              <a:prstGeom prst="rect">
+                <a:avLst/>
+              </a:prstGeom>
+              <a:blipFill>
+                <a:blip r:embed="rId4"/>
+                <a:stretch>
+                  <a:fillRect l="-9804" t="-189474" b="-277193"/>
+                </a:stretch>
+              </a:blipFill>
+            </p:spPr>
+            <p:txBody>
+              <a:bodyPr/>
+              <a:lstStyle/>
+              <a:p>
+                <a:r>
+                  <a:rPr lang="en-US">
+                    <a:noFill/>
+                  </a:rPr>
+                  <a:t> </a:t>
+                </a:r>
+              </a:p>
+            </p:txBody>
+          </p:sp>
+        </mc:Fallback>
+      </mc:AlternateContent>
+      <mc:AlternateContent xmlns:mc="http://schemas.openxmlformats.org/markup-compatibility/2006" xmlns:a14="http://schemas.microsoft.com/office/drawing/2010/main">
+        <mc:Choice Requires="a14">
+          <p:sp>
+            <p:nvSpPr>
+              <p:cNvPr id="16" name="TextBox 15">
+                <a:extLst>
+                  <a:ext uri="{FF2B5EF4-FFF2-40B4-BE49-F238E27FC236}">
+                    <a16:creationId xmlns:a16="http://schemas.microsoft.com/office/drawing/2014/main" id="{53C1EBB8-AE8B-D445-3F7B-B47D31AF2FFE}"/>
+                  </a:ext>
+                </a:extLst>
+              </p:cNvPr>
+              <p:cNvSpPr txBox="1"/>
+              <p:nvPr/>
+            </p:nvSpPr>
+            <p:spPr>
+              <a:xfrm>
+                <a:off x="8575048" y="3041081"/>
+                <a:ext cx="3216329" cy="710194"/>
+              </a:xfrm>
+              <a:prstGeom prst="rect">
+                <a:avLst/>
+              </a:prstGeom>
+              <a:noFill/>
+            </p:spPr>
+            <p:txBody>
+              <a:bodyPr wrap="none" rtlCol="0">
+                <a:spAutoFit/>
+              </a:bodyPr>
+              <a:lstStyle/>
+              <a:p>
+                <a:pPr/>
+                <a14:m>
+                  <m:oMathPara xmlns:m="http://schemas.openxmlformats.org/officeDocument/2006/math">
+                    <m:oMathParaPr>
+                      <m:jc m:val="centerGroup"/>
+                    </m:oMathParaPr>
+                    <m:oMath xmlns:m="http://schemas.openxmlformats.org/officeDocument/2006/math">
+                      <m:r>
+                        <a:rPr lang="en-US" b="0" i="1" smtClean="0">
+                          <a:latin typeface="Cambria Math" panose="02040503050406030204" pitchFamily="18" charset="0"/>
+                        </a:rPr>
+                        <m:t>𝜆</m:t>
+                      </m:r>
+                      <m:d>
+                        <m:dPr>
+                          <m:ctrlPr>
+                            <a:rPr lang="en-US" b="0" i="1" smtClean="0">
+                              <a:latin typeface="Cambria Math" panose="02040503050406030204" pitchFamily="18" charset="0"/>
+                            </a:rPr>
+                          </m:ctrlPr>
+                        </m:dPr>
+                        <m:e>
+                          <m:r>
+                            <a:rPr lang="en-US" b="0" i="1" smtClean="0">
+                              <a:latin typeface="Cambria Math" panose="02040503050406030204" pitchFamily="18" charset="0"/>
+                            </a:rPr>
+                            <m:t>𝑡</m:t>
+                          </m:r>
+                        </m:e>
+                      </m:d>
+                      <m:r>
+                        <a:rPr lang="en-US" b="0" i="1" smtClean="0">
+                          <a:latin typeface="Cambria Math" panose="02040503050406030204" pitchFamily="18" charset="0"/>
+                        </a:rPr>
+                        <m:t>=</m:t>
+                      </m:r>
+                      <m:d>
+                        <m:dPr>
+                          <m:begChr m:val="{"/>
+                          <m:endChr m:val=""/>
+                          <m:ctrlPr>
+                            <a:rPr lang="en-US" b="0" i="1" smtClean="0">
+                              <a:latin typeface="Cambria Math" panose="02040503050406030204" pitchFamily="18" charset="0"/>
+                            </a:rPr>
+                          </m:ctrlPr>
+                        </m:dPr>
+                        <m:e>
+                          <m:eqArr>
+                            <m:eqArrPr>
+                              <m:ctrlPr>
+                                <a:rPr lang="en-US" b="0" i="1" smtClean="0">
+                                  <a:latin typeface="Cambria Math" panose="02040503050406030204" pitchFamily="18" charset="0"/>
+                                </a:rPr>
+                              </m:ctrlPr>
+                            </m:eqArrPr>
+                            <m:e>
+                              <m:sSup>
+                                <m:sSupPr>
+                                  <m:ctrlPr>
+                                    <a:rPr lang="en-US" b="0" i="1" smtClean="0">
+                                      <a:latin typeface="Cambria Math" panose="02040503050406030204" pitchFamily="18" charset="0"/>
+                                    </a:rPr>
+                                  </m:ctrlPr>
+                                </m:sSupPr>
+                                <m:e>
+                                  <m:r>
+                                    <a:rPr lang="en-US" b="0" i="1" smtClean="0">
+                                      <a:latin typeface="Cambria Math" panose="02040503050406030204" pitchFamily="18" charset="0"/>
+                                    </a:rPr>
+                                    <m:t>𝑒</m:t>
+                                  </m:r>
+                                </m:e>
+                                <m:sup>
+                                  <m:r>
+                                    <a:rPr lang="en-US" b="0" i="1" smtClean="0">
+                                      <a:latin typeface="Cambria Math" panose="02040503050406030204" pitchFamily="18" charset="0"/>
+                                    </a:rPr>
+                                    <m:t>−1+</m:t>
+                                  </m:r>
+                                  <m:r>
+                                    <a:rPr lang="en-US" b="0" i="1" smtClean="0">
+                                      <a:latin typeface="Cambria Math" panose="02040503050406030204" pitchFamily="18" charset="0"/>
+                                    </a:rPr>
+                                    <m:t>𝑡</m:t>
+                                  </m:r>
+                                  <m:r>
+                                    <a:rPr lang="en-US" b="0" i="1" smtClean="0">
+                                      <a:latin typeface="Cambria Math" panose="02040503050406030204" pitchFamily="18" charset="0"/>
+                                    </a:rPr>
+                                    <m:t>/2</m:t>
+                                  </m:r>
+                                </m:sup>
+                              </m:sSup>
+                              <m:r>
+                                <a:rPr lang="en-US" b="0" i="1" smtClean="0">
+                                  <a:latin typeface="Cambria Math" panose="02040503050406030204" pitchFamily="18" charset="0"/>
+                                </a:rPr>
+                                <m:t>,  </m:t>
+                              </m:r>
+                              <m:r>
+                                <a:rPr lang="en-US" b="0" i="1" smtClean="0">
+                                  <a:latin typeface="Cambria Math" panose="02040503050406030204" pitchFamily="18" charset="0"/>
+                                </a:rPr>
+                                <m:t>𝑡</m:t>
+                              </m:r>
+                              <m:r>
+                                <a:rPr lang="en-US" b="0" i="1" smtClean="0">
+                                  <a:latin typeface="Cambria Math" panose="02040503050406030204" pitchFamily="18" charset="0"/>
+                                </a:rPr>
+                                <m:t>∈[1, 5]</m:t>
+                              </m:r>
+                            </m:e>
+                            <m:e>
+                              <m:r>
+                                <a:rPr lang="en-US" b="0" i="1" smtClean="0">
+                                  <a:latin typeface="Cambria Math" panose="02040503050406030204" pitchFamily="18" charset="0"/>
+                                </a:rPr>
+                                <m:t>&amp;0,   </m:t>
+                              </m:r>
+                              <m:r>
+                                <a:rPr lang="en-US" b="0" i="0" smtClean="0">
+                                  <a:latin typeface="Cambria Math" panose="02040503050406030204" pitchFamily="18" charset="0"/>
+                                </a:rPr>
+                                <m:t>       </m:t>
+                              </m:r>
+                              <m:r>
+                                <m:rPr>
+                                  <m:sty m:val="p"/>
+                                </m:rPr>
+                                <a:rPr lang="en-US" b="0" i="0" smtClean="0">
+                                  <a:latin typeface="Cambria Math" panose="02040503050406030204" pitchFamily="18" charset="0"/>
+                                </a:rPr>
+                                <m:t>elsewhere</m:t>
+                              </m:r>
+                              <m:r>
+                                <a:rPr lang="en-US" b="0" i="1" smtClean="0">
+                                  <a:latin typeface="Cambria Math" panose="02040503050406030204" pitchFamily="18" charset="0"/>
+                                </a:rPr>
+                                <m:t> </m:t>
+                              </m:r>
+                            </m:e>
+                          </m:eqArr>
+                        </m:e>
+                      </m:d>
+                    </m:oMath>
+                  </m:oMathPara>
+                </a14:m>
+                <a:endParaRPr lang="en-US" dirty="0"/>
+              </a:p>
+            </p:txBody>
+          </p:sp>
+        </mc:Choice>
+        <mc:Fallback xmlns="">
+          <p:sp>
+            <p:nvSpPr>
+              <p:cNvPr id="16" name="TextBox 15">
+                <a:extLst>
+                  <a:ext uri="{FF2B5EF4-FFF2-40B4-BE49-F238E27FC236}">
+                    <a16:creationId xmlns:a16="http://schemas.microsoft.com/office/drawing/2014/main" id="{53C1EBB8-AE8B-D445-3F7B-B47D31AF2FFE}"/>
+                  </a:ext>
+                </a:extLst>
+              </p:cNvPr>
+              <p:cNvSpPr txBox="1">
+                <a:spLocks noRot="1" noChangeAspect="1" noMove="1" noResize="1" noEditPoints="1" noAdjustHandles="1" noChangeArrowheads="1" noChangeShapeType="1" noTextEdit="1"/>
+              </p:cNvSpPr>
+              <p:nvPr/>
+            </p:nvSpPr>
+            <p:spPr>
+              <a:xfrm>
+                <a:off x="8575048" y="3041081"/>
+                <a:ext cx="3216329" cy="710194"/>
+              </a:xfrm>
+              <a:prstGeom prst="rect">
+                <a:avLst/>
+              </a:prstGeom>
+              <a:blipFill>
+                <a:blip r:embed="rId5"/>
+                <a:stretch>
+                  <a:fillRect l="-9843" t="-189474" b="-277193"/>
+                </a:stretch>
+              </a:blipFill>
+            </p:spPr>
+            <p:txBody>
+              <a:bodyPr/>
+              <a:lstStyle/>
+              <a:p>
+                <a:r>
+                  <a:rPr lang="en-US">
+                    <a:noFill/>
+                  </a:rPr>
+                  <a:t> </a:t>
+                </a:r>
+              </a:p>
+            </p:txBody>
+          </p:sp>
+        </mc:Fallback>
+      </mc:AlternateContent>
+    </p:spTree>
+    <p:extLst>
+      <p:ext uri="{BB962C8B-B14F-4D97-AF65-F5344CB8AC3E}">
+        <p14:creationId xmlns:p14="http://schemas.microsoft.com/office/powerpoint/2010/main" val="3999546503"/>
+      </p:ext>
+    </p:extLst>
+  </p:cSld>
+  <p:clrMapOvr>
+    <a:masterClrMapping/>
+  </p:clrMapOvr>
+</p:sld>
+</file>
+
+<file path=ppt/slides/slide36.xml><?xml version="1.0" encoding="utf-8"?>
 <p:sld xmlns:a="http://schemas.openxmlformats.org/drawingml/2006/main" xmlns:r="http://schemas.openxmlformats.org/officeDocument/2006/relationships" xmlns:p="http://schemas.openxmlformats.org/presentationml/2006/main">
   <p:cSld>
     <p:spTree>
@@ -18442,7 +20516,7 @@
 </p:sld>
 </file>
 
-<file path=ppt/slides/slide36.xml><?xml version="1.0" encoding="utf-8"?>
+<file path=ppt/slides/slide37.xml><?xml version="1.0" encoding="utf-8"?>
 <p:sld xmlns:a="http://schemas.openxmlformats.org/drawingml/2006/main" xmlns:r="http://schemas.openxmlformats.org/officeDocument/2006/relationships" xmlns:p="http://schemas.openxmlformats.org/presentationml/2006/main">
   <p:cSld>
     <p:spTree>
@@ -18465,668 +20539,6 @@
           <a:chExt cx="0" cy="0"/>
         </a:xfrm>
       </p:grpSpPr>
-      <p:graphicFrame>
-        <p:nvGraphicFramePr>
-          <p:cNvPr id="4" name="Content Placeholder 3">
-            <a:extLst>
-              <a:ext uri="{FF2B5EF4-FFF2-40B4-BE49-F238E27FC236}">
-                <a16:creationId xmlns:a16="http://schemas.microsoft.com/office/drawing/2014/main" id="{BCC79F37-3545-E189-62FF-0C6E97B97B15}"/>
-              </a:ext>
-            </a:extLst>
-          </p:cNvPr>
-          <p:cNvGraphicFramePr>
-            <a:graphicFrameLocks noGrp="1"/>
-          </p:cNvGraphicFramePr>
-          <p:nvPr>
-            <p:ph idx="1"/>
-          </p:nvPr>
-        </p:nvGraphicFramePr>
-        <p:xfrm>
-          <a:off x="1208690" y="942340"/>
-          <a:ext cx="10720551" cy="4973320"/>
-        </p:xfrm>
-        <a:graphic>
-          <a:graphicData uri="http://schemas.openxmlformats.org/drawingml/2006/table">
-            <a:tbl>
-              <a:tblPr firstRow="1" bandRow="1">
-                <a:tableStyleId>{21E4AEA4-8DFA-4A89-87EB-49C32662AFE0}</a:tableStyleId>
-              </a:tblPr>
-              <a:tblGrid>
-                <a:gridCol w="1717110">
-                  <a:extLst>
-                    <a:ext uri="{9D8B030D-6E8A-4147-A177-3AD203B41FA5}">
-                      <a16:colId xmlns:a16="http://schemas.microsoft.com/office/drawing/2014/main" val="4182014441"/>
-                    </a:ext>
-                  </a:extLst>
-                </a:gridCol>
-                <a:gridCol w="5976462">
-                  <a:extLst>
-                    <a:ext uri="{9D8B030D-6E8A-4147-A177-3AD203B41FA5}">
-                      <a16:colId xmlns:a16="http://schemas.microsoft.com/office/drawing/2014/main" val="906180283"/>
-                    </a:ext>
-                  </a:extLst>
-                </a:gridCol>
-                <a:gridCol w="3026979">
-                  <a:extLst>
-                    <a:ext uri="{9D8B030D-6E8A-4147-A177-3AD203B41FA5}">
-                      <a16:colId xmlns:a16="http://schemas.microsoft.com/office/drawing/2014/main" val="2769721792"/>
-                    </a:ext>
-                  </a:extLst>
-                </a:gridCol>
-              </a:tblGrid>
-              <a:tr h="370840">
-                <a:tc>
-                  <a:txBody>
-                    <a:bodyPr/>
-                    <a:lstStyle/>
-                    <a:p>
-                      <a:r>
-                        <a:rPr lang="en-US" dirty="0"/>
-                        <a:t>Time</a:t>
-                      </a:r>
-                    </a:p>
-                  </a:txBody>
-                  <a:tcPr/>
-                </a:tc>
-                <a:tc>
-                  <a:txBody>
-                    <a:bodyPr/>
-                    <a:lstStyle/>
-                    <a:p>
-                      <a:r>
-                        <a:rPr lang="en-US" dirty="0"/>
-                        <a:t>Description</a:t>
-                      </a:r>
-                    </a:p>
-                  </a:txBody>
-                  <a:tcPr/>
-                </a:tc>
-                <a:tc>
-                  <a:txBody>
-                    <a:bodyPr/>
-                    <a:lstStyle/>
-                    <a:p>
-                      <a:r>
-                        <a:rPr lang="en-US" dirty="0"/>
-                        <a:t>Discussant</a:t>
-                      </a:r>
-                    </a:p>
-                  </a:txBody>
-                  <a:tcPr/>
-                </a:tc>
-                <a:extLst>
-                  <a:ext uri="{0D108BD9-81ED-4DB2-BD59-A6C34878D82A}">
-                    <a16:rowId xmlns:a16="http://schemas.microsoft.com/office/drawing/2014/main" val="1700444250"/>
-                  </a:ext>
-                </a:extLst>
-              </a:tr>
-              <a:tr h="370840">
-                <a:tc>
-                  <a:txBody>
-                    <a:bodyPr/>
-                    <a:lstStyle/>
-                    <a:p>
-                      <a:r>
-                        <a:rPr lang="en-US" dirty="0"/>
-                        <a:t>[15 min]</a:t>
-                      </a:r>
-                    </a:p>
-                  </a:txBody>
-                  <a:tcPr/>
-                </a:tc>
-                <a:tc>
-                  <a:txBody>
-                    <a:bodyPr/>
-                    <a:lstStyle/>
-                    <a:p>
-                      <a:r>
-                        <a:rPr lang="en-US" sz="1800" kern="1200" dirty="0">
-                          <a:solidFill>
-                            <a:schemeClr val="dk1"/>
-                          </a:solidFill>
-                          <a:effectLst/>
-                          <a:latin typeface="+mn-lt"/>
-                          <a:ea typeface="+mn-ea"/>
-                          <a:cs typeface="+mn-cs"/>
-                        </a:rPr>
-                        <a:t>(0) Introductions and administrivia </a:t>
-                      </a:r>
-                      <a:endParaRPr lang="en-US" dirty="0"/>
-                    </a:p>
-                  </a:txBody>
-                  <a:tcPr/>
-                </a:tc>
-                <a:tc>
-                  <a:txBody>
-                    <a:bodyPr/>
-                    <a:lstStyle/>
-                    <a:p>
-                      <a:r>
-                        <a:rPr lang="en-US" dirty="0" err="1"/>
-                        <a:t>Trikalinos</a:t>
-                      </a:r>
-                      <a:endParaRPr lang="en-US" dirty="0"/>
-                    </a:p>
-                  </a:txBody>
-                  <a:tcPr/>
-                </a:tc>
-                <a:extLst>
-                  <a:ext uri="{0D108BD9-81ED-4DB2-BD59-A6C34878D82A}">
-                    <a16:rowId xmlns:a16="http://schemas.microsoft.com/office/drawing/2014/main" val="2490995723"/>
-                  </a:ext>
-                </a:extLst>
-              </a:tr>
-              <a:tr h="370840">
-                <a:tc>
-                  <a:txBody>
-                    <a:bodyPr/>
-                    <a:lstStyle/>
-                    <a:p>
-                      <a:r>
-                        <a:rPr lang="en-US" dirty="0"/>
-                        <a:t>[25 min]</a:t>
-                      </a:r>
-                    </a:p>
-                  </a:txBody>
-                  <a:tcPr/>
-                </a:tc>
-                <a:tc>
-                  <a:txBody>
-                    <a:bodyPr/>
-                    <a:lstStyle/>
-                    <a:p>
-                      <a:r>
-                        <a:rPr lang="en-US" sz="1800" kern="1200" dirty="0">
-                          <a:solidFill>
-                            <a:schemeClr val="dk1"/>
-                          </a:solidFill>
-                          <a:effectLst/>
-                          <a:latin typeface="+mn-lt"/>
-                          <a:ea typeface="+mn-ea"/>
-                          <a:cs typeface="+mn-cs"/>
-                        </a:rPr>
-                        <a:t>(1) DES as a composition of point processes</a:t>
-                      </a:r>
-                    </a:p>
-                  </a:txBody>
-                  <a:tcPr/>
-                </a:tc>
-                <a:tc>
-                  <a:txBody>
-                    <a:bodyPr/>
-                    <a:lstStyle/>
-                    <a:p>
-                      <a:r>
-                        <a:rPr lang="en-US" dirty="0" err="1"/>
-                        <a:t>Alarid</a:t>
-                      </a:r>
-                      <a:r>
-                        <a:rPr lang="en-US" dirty="0"/>
-                        <a:t>-Escudero</a:t>
-                      </a:r>
-                    </a:p>
-                  </a:txBody>
-                  <a:tcPr/>
-                </a:tc>
-                <a:extLst>
-                  <a:ext uri="{0D108BD9-81ED-4DB2-BD59-A6C34878D82A}">
-                    <a16:rowId xmlns:a16="http://schemas.microsoft.com/office/drawing/2014/main" val="2065491183"/>
-                  </a:ext>
-                </a:extLst>
-              </a:tr>
-              <a:tr h="370840">
-                <a:tc>
-                  <a:txBody>
-                    <a:bodyPr/>
-                    <a:lstStyle/>
-                    <a:p>
-                      <a:r>
-                        <a:rPr lang="en-US" dirty="0"/>
-                        <a:t>[30 min]</a:t>
-                      </a:r>
-                    </a:p>
-                  </a:txBody>
-                  <a:tcPr/>
-                </a:tc>
-                <a:tc>
-                  <a:txBody>
-                    <a:bodyPr/>
-                    <a:lstStyle/>
-                    <a:p>
-                      <a:pPr marL="0" marR="0" lvl="0" indent="0" algn="l" defTabSz="914400" rtl="0" eaLnBrk="1" fontAlgn="auto" latinLnBrk="0" hangingPunct="1">
-                        <a:lnSpc>
-                          <a:spcPct val="100000"/>
-                        </a:lnSpc>
-                        <a:spcBef>
-                          <a:spcPts val="0"/>
-                        </a:spcBef>
-                        <a:spcAft>
-                          <a:spcPts val="0"/>
-                        </a:spcAft>
-                        <a:buClrTx/>
-                        <a:buSzTx/>
-                        <a:buFontTx/>
-                        <a:buNone/>
-                        <a:tabLst/>
-                        <a:defRPr/>
-                      </a:pPr>
-                      <a:r>
-                        <a:rPr lang="en-US" sz="1800" kern="1200" dirty="0">
-                          <a:solidFill>
-                            <a:schemeClr val="dk1"/>
-                          </a:solidFill>
-                          <a:effectLst/>
-                          <a:latin typeface="+mn-lt"/>
-                          <a:ea typeface="+mn-ea"/>
-                          <a:cs typeface="+mn-cs"/>
-                        </a:rPr>
-                        <a:t>(2) NHPPPs – key properties</a:t>
-                      </a:r>
-                    </a:p>
-                  </a:txBody>
-                  <a:tcPr/>
-                </a:tc>
-                <a:tc>
-                  <a:txBody>
-                    <a:bodyPr/>
-                    <a:lstStyle/>
-                    <a:p>
-                      <a:r>
-                        <a:rPr lang="en-US" dirty="0" err="1"/>
-                        <a:t>Trikalinos</a:t>
-                      </a:r>
-                      <a:endParaRPr lang="en-US" dirty="0"/>
-                    </a:p>
-                  </a:txBody>
-                  <a:tcPr/>
-                </a:tc>
-                <a:extLst>
-                  <a:ext uri="{0D108BD9-81ED-4DB2-BD59-A6C34878D82A}">
-                    <a16:rowId xmlns:a16="http://schemas.microsoft.com/office/drawing/2014/main" val="2757944147"/>
-                  </a:ext>
-                </a:extLst>
-              </a:tr>
-              <a:tr h="370840">
-                <a:tc>
-                  <a:txBody>
-                    <a:bodyPr/>
-                    <a:lstStyle/>
-                    <a:p>
-                      <a:r>
-                        <a:rPr lang="en-US" dirty="0"/>
-                        <a:t>[30 min]</a:t>
-                      </a:r>
-                    </a:p>
-                  </a:txBody>
-                  <a:tcPr/>
-                </a:tc>
-                <a:tc>
-                  <a:txBody>
-                    <a:bodyPr/>
-                    <a:lstStyle/>
-                    <a:p>
-                      <a:r>
-                        <a:rPr lang="en-US" sz="1800" kern="1200" dirty="0">
-                          <a:solidFill>
-                            <a:schemeClr val="dk1"/>
-                          </a:solidFill>
-                          <a:effectLst/>
-                          <a:latin typeface="+mn-lt"/>
-                          <a:ea typeface="+mn-ea"/>
-                          <a:cs typeface="+mn-cs"/>
-                        </a:rPr>
-                        <a:t>(3) Sampling from NHPPPs</a:t>
-                      </a:r>
-                      <a:endParaRPr lang="en-US" dirty="0"/>
-                    </a:p>
-                  </a:txBody>
-                  <a:tcPr/>
-                </a:tc>
-                <a:tc>
-                  <a:txBody>
-                    <a:bodyPr/>
-                    <a:lstStyle/>
-                    <a:p>
-                      <a:r>
-                        <a:rPr lang="en-US" dirty="0" err="1"/>
-                        <a:t>Sereda</a:t>
-                      </a:r>
-                      <a:endParaRPr lang="en-US" dirty="0"/>
-                    </a:p>
-                  </a:txBody>
-                  <a:tcPr/>
-                </a:tc>
-                <a:extLst>
-                  <a:ext uri="{0D108BD9-81ED-4DB2-BD59-A6C34878D82A}">
-                    <a16:rowId xmlns:a16="http://schemas.microsoft.com/office/drawing/2014/main" val="1442363784"/>
-                  </a:ext>
-                </a:extLst>
-              </a:tr>
-              <a:tr h="370840">
-                <a:tc>
-                  <a:txBody>
-                    <a:bodyPr/>
-                    <a:lstStyle/>
-                    <a:p>
-                      <a:r>
-                        <a:rPr lang="en-US" dirty="0"/>
-                        <a:t>[15 min]</a:t>
-                      </a:r>
-                    </a:p>
-                  </a:txBody>
-                  <a:tcPr/>
-                </a:tc>
-                <a:tc>
-                  <a:txBody>
-                    <a:bodyPr/>
-                    <a:lstStyle/>
-                    <a:p>
-                      <a:pPr marL="0" marR="0" lvl="0" indent="0" algn="l" defTabSz="914400" rtl="0" eaLnBrk="1" fontAlgn="auto" latinLnBrk="0" hangingPunct="1">
-                        <a:lnSpc>
-                          <a:spcPct val="100000"/>
-                        </a:lnSpc>
-                        <a:spcBef>
-                          <a:spcPts val="0"/>
-                        </a:spcBef>
-                        <a:spcAft>
-                          <a:spcPts val="0"/>
-                        </a:spcAft>
-                        <a:buClrTx/>
-                        <a:buSzTx/>
-                        <a:buFontTx/>
-                        <a:buNone/>
-                        <a:tabLst/>
-                        <a:defRPr/>
-                      </a:pPr>
-                      <a:r>
-                        <a:rPr lang="en-US" b="1" dirty="0"/>
-                        <a:t>Break</a:t>
-                      </a:r>
-                    </a:p>
-                  </a:txBody>
-                  <a:tcPr/>
-                </a:tc>
-                <a:tc>
-                  <a:txBody>
-                    <a:bodyPr/>
-                    <a:lstStyle/>
-                    <a:p>
-                      <a:endParaRPr lang="en-US" dirty="0"/>
-                    </a:p>
-                  </a:txBody>
-                  <a:tcPr/>
-                </a:tc>
-                <a:extLst>
-                  <a:ext uri="{0D108BD9-81ED-4DB2-BD59-A6C34878D82A}">
-                    <a16:rowId xmlns:a16="http://schemas.microsoft.com/office/drawing/2014/main" val="1269228105"/>
-                  </a:ext>
-                </a:extLst>
-              </a:tr>
-              <a:tr h="370840">
-                <a:tc>
-                  <a:txBody>
-                    <a:bodyPr/>
-                    <a:lstStyle/>
-                    <a:p>
-                      <a:r>
-                        <a:rPr lang="en-US" dirty="0"/>
-                        <a:t>[80 min]</a:t>
-                      </a:r>
-                    </a:p>
-                  </a:txBody>
-                  <a:tcPr/>
-                </a:tc>
-                <a:tc>
-                  <a:txBody>
-                    <a:bodyPr/>
-                    <a:lstStyle/>
-                    <a:p>
-                      <a:r>
-                        <a:rPr lang="en-US" sz="1800" kern="1200" dirty="0">
-                          <a:solidFill>
-                            <a:schemeClr val="dk1"/>
-                          </a:solidFill>
-                          <a:effectLst/>
-                          <a:latin typeface="+mn-lt"/>
-                          <a:ea typeface="+mn-ea"/>
-                          <a:cs typeface="+mn-cs"/>
-                        </a:rPr>
-                        <a:t>(4) Guided exercise: </a:t>
-                      </a:r>
-                    </a:p>
-                    <a:p>
-                      <a:pPr marL="285750" indent="-285750">
-                        <a:buFontTx/>
-                        <a:buChar char="-"/>
-                      </a:pPr>
-                      <a:r>
-                        <a:rPr lang="en-US" sz="1800" kern="1200" dirty="0">
-                          <a:solidFill>
-                            <a:schemeClr val="dk1"/>
-                          </a:solidFill>
-                          <a:effectLst/>
-                          <a:latin typeface="+mn-lt"/>
-                          <a:ea typeface="+mn-ea"/>
-                          <a:cs typeface="+mn-cs"/>
-                        </a:rPr>
-                        <a:t>Implement a simple cancer natural history DES for one person</a:t>
-                      </a:r>
-                    </a:p>
-                    <a:p>
-                      <a:pPr marL="285750" indent="-285750">
-                        <a:buFontTx/>
-                        <a:buChar char="-"/>
-                      </a:pPr>
-                      <a:r>
-                        <a:rPr lang="en-US" sz="1800" kern="1200" dirty="0">
-                          <a:solidFill>
-                            <a:schemeClr val="dk1"/>
-                          </a:solidFill>
-                          <a:effectLst/>
-                          <a:latin typeface="+mn-lt"/>
-                          <a:ea typeface="+mn-ea"/>
-                          <a:cs typeface="+mn-cs"/>
-                        </a:rPr>
-                        <a:t>The many-person case</a:t>
-                      </a:r>
-                    </a:p>
-                    <a:p>
-                      <a:pPr marL="285750" indent="-285750">
-                        <a:buFontTx/>
-                        <a:buChar char="-"/>
-                      </a:pPr>
-                      <a:r>
-                        <a:rPr lang="en-US" sz="1800" kern="1200" dirty="0">
-                          <a:solidFill>
-                            <a:schemeClr val="dk1"/>
-                          </a:solidFill>
-                          <a:effectLst/>
-                          <a:latin typeface="+mn-lt"/>
-                          <a:ea typeface="+mn-ea"/>
-                          <a:cs typeface="+mn-cs"/>
-                        </a:rPr>
-                        <a:t>Packaging </a:t>
-                      </a:r>
-                    </a:p>
-                  </a:txBody>
-                  <a:tcPr/>
-                </a:tc>
-                <a:tc>
-                  <a:txBody>
-                    <a:bodyPr/>
-                    <a:lstStyle/>
-                    <a:p>
-                      <a:r>
-                        <a:rPr lang="en-US" dirty="0"/>
-                        <a:t>[All]</a:t>
-                      </a:r>
-                    </a:p>
-                    <a:p>
-                      <a:r>
-                        <a:rPr lang="en-US" dirty="0" err="1"/>
-                        <a:t>Chrysanthopoulou</a:t>
-                      </a:r>
-                      <a:endParaRPr lang="en-US" dirty="0"/>
-                    </a:p>
-                    <a:p>
-                      <a:endParaRPr lang="en-US" dirty="0"/>
-                    </a:p>
-                    <a:p>
-                      <a:r>
-                        <a:rPr lang="en-US" dirty="0" err="1"/>
-                        <a:t>Sereda</a:t>
-                      </a:r>
-                      <a:r>
-                        <a:rPr lang="en-US" dirty="0"/>
-                        <a:t>/</a:t>
-                      </a:r>
-                      <a:r>
-                        <a:rPr lang="en-US" dirty="0" err="1"/>
-                        <a:t>Alarid</a:t>
-                      </a:r>
-                      <a:r>
-                        <a:rPr lang="en-US" dirty="0"/>
-                        <a:t>-Escudero</a:t>
-                      </a:r>
-                    </a:p>
-                    <a:p>
-                      <a:r>
-                        <a:rPr lang="en-US" dirty="0" err="1"/>
-                        <a:t>Trikalinos</a:t>
-                      </a:r>
-                      <a:endParaRPr lang="en-US" dirty="0"/>
-                    </a:p>
-                  </a:txBody>
-                  <a:tcPr/>
-                </a:tc>
-                <a:extLst>
-                  <a:ext uri="{0D108BD9-81ED-4DB2-BD59-A6C34878D82A}">
-                    <a16:rowId xmlns:a16="http://schemas.microsoft.com/office/drawing/2014/main" val="1448491104"/>
-                  </a:ext>
-                </a:extLst>
-              </a:tr>
-              <a:tr h="370840">
-                <a:tc>
-                  <a:txBody>
-                    <a:bodyPr/>
-                    <a:lstStyle/>
-                    <a:p>
-                      <a:r>
-                        <a:rPr lang="en-US" dirty="0"/>
-                        <a:t>[10 min]</a:t>
-                      </a:r>
-                    </a:p>
-                  </a:txBody>
-                  <a:tcPr/>
-                </a:tc>
-                <a:tc>
-                  <a:txBody>
-                    <a:bodyPr/>
-                    <a:lstStyle/>
-                    <a:p>
-                      <a:pPr marL="0" marR="0" lvl="0" indent="0" algn="l" defTabSz="914400" rtl="0" eaLnBrk="1" fontAlgn="auto" latinLnBrk="0" hangingPunct="1">
-                        <a:lnSpc>
-                          <a:spcPct val="100000"/>
-                        </a:lnSpc>
-                        <a:spcBef>
-                          <a:spcPts val="0"/>
-                        </a:spcBef>
-                        <a:spcAft>
-                          <a:spcPts val="0"/>
-                        </a:spcAft>
-                        <a:buClrTx/>
-                        <a:buSzTx/>
-                        <a:buFontTx/>
-                        <a:buNone/>
-                        <a:tabLst/>
-                        <a:defRPr/>
-                      </a:pPr>
-                      <a:r>
-                        <a:rPr lang="en-US" sz="1800" kern="1200" dirty="0">
-                          <a:solidFill>
-                            <a:schemeClr val="dk1"/>
-                          </a:solidFill>
-                          <a:effectLst/>
-                          <a:latin typeface="+mn-lt"/>
-                          <a:ea typeface="+mn-ea"/>
-                          <a:cs typeface="+mn-cs"/>
-                        </a:rPr>
-                        <a:t>(5) Advanced Topic Teaser on self-excitatory processes: point processes that are not NHPPPs and when you may need them</a:t>
-                      </a:r>
-                    </a:p>
-                  </a:txBody>
-                  <a:tcPr/>
-                </a:tc>
-                <a:tc>
-                  <a:txBody>
-                    <a:bodyPr/>
-                    <a:lstStyle/>
-                    <a:p>
-                      <a:r>
-                        <a:rPr lang="en-US" dirty="0" err="1"/>
-                        <a:t>Trikalinos</a:t>
-                      </a:r>
-                      <a:endParaRPr lang="en-US" dirty="0"/>
-                    </a:p>
-                  </a:txBody>
-                  <a:tcPr/>
-                </a:tc>
-                <a:extLst>
-                  <a:ext uri="{0D108BD9-81ED-4DB2-BD59-A6C34878D82A}">
-                    <a16:rowId xmlns:a16="http://schemas.microsoft.com/office/drawing/2014/main" val="3766472740"/>
-                  </a:ext>
-                </a:extLst>
-              </a:tr>
-              <a:tr h="370840">
-                <a:tc>
-                  <a:txBody>
-                    <a:bodyPr/>
-                    <a:lstStyle/>
-                    <a:p>
-                      <a:r>
-                        <a:rPr lang="en-US" dirty="0"/>
-                        <a:t>[15 min]</a:t>
-                      </a:r>
-                    </a:p>
-                  </a:txBody>
-                  <a:tcPr/>
-                </a:tc>
-                <a:tc>
-                  <a:txBody>
-                    <a:bodyPr/>
-                    <a:lstStyle/>
-                    <a:p>
-                      <a:r>
-                        <a:rPr lang="en-US" dirty="0"/>
-                        <a:t>General Q &amp; A</a:t>
-                      </a:r>
-                    </a:p>
-                  </a:txBody>
-                  <a:tcPr/>
-                </a:tc>
-                <a:tc>
-                  <a:txBody>
-                    <a:bodyPr/>
-                    <a:lstStyle/>
-                    <a:p>
-                      <a:r>
-                        <a:rPr lang="en-US" dirty="0"/>
-                        <a:t>All</a:t>
-                      </a:r>
-                    </a:p>
-                  </a:txBody>
-                  <a:tcPr/>
-                </a:tc>
-                <a:extLst>
-                  <a:ext uri="{0D108BD9-81ED-4DB2-BD59-A6C34878D82A}">
-                    <a16:rowId xmlns:a16="http://schemas.microsoft.com/office/drawing/2014/main" val="3034331301"/>
-                  </a:ext>
-                </a:extLst>
-              </a:tr>
-            </a:tbl>
-          </a:graphicData>
-        </a:graphic>
-      </p:graphicFrame>
       <p:sp>
         <p:nvSpPr>
           <p:cNvPr id="5" name="Right Arrow 4">
@@ -19180,12 +20592,1437 @@
           </a:p>
         </p:txBody>
       </p:sp>
+      <mc:AlternateContent xmlns:mc="http://schemas.openxmlformats.org/markup-compatibility/2006">
+        <mc:Choice xmlns:a14="http://schemas.microsoft.com/office/drawing/2010/main" Requires="a14">
+          <p:graphicFrame>
+            <p:nvGraphicFramePr>
+              <p:cNvPr id="7" name="Content Placeholder 3">
+                <a:extLst>
+                  <a:ext uri="{FF2B5EF4-FFF2-40B4-BE49-F238E27FC236}">
+                    <a16:creationId xmlns:a16="http://schemas.microsoft.com/office/drawing/2014/main" id="{867096B1-B006-6761-533F-9ED66395E7B2}"/>
+                  </a:ext>
+                </a:extLst>
+              </p:cNvPr>
+              <p:cNvGraphicFramePr>
+                <a:graphicFrameLocks/>
+              </p:cNvGraphicFramePr>
+              <p:nvPr>
+                <p:extLst>
+                  <p:ext uri="{D42A27DB-BD31-4B8C-83A1-F6EECF244321}">
+                    <p14:modId xmlns:p14="http://schemas.microsoft.com/office/powerpoint/2010/main" val="260976388"/>
+                  </p:ext>
+                </p:extLst>
+              </p:nvPr>
+            </p:nvGraphicFramePr>
+            <p:xfrm>
+              <a:off x="1208690" y="942340"/>
+              <a:ext cx="10720551" cy="4699000"/>
+            </p:xfrm>
+            <a:graphic>
+              <a:graphicData uri="http://schemas.openxmlformats.org/drawingml/2006/table">
+                <a:tbl>
+                  <a:tblPr firstRow="1" bandRow="1">
+                    <a:tableStyleId>{21E4AEA4-8DFA-4A89-87EB-49C32662AFE0}</a:tableStyleId>
+                  </a:tblPr>
+                  <a:tblGrid>
+                    <a:gridCol w="1717110">
+                      <a:extLst>
+                        <a:ext uri="{9D8B030D-6E8A-4147-A177-3AD203B41FA5}">
+                          <a16:colId xmlns:a16="http://schemas.microsoft.com/office/drawing/2014/main" val="4182014441"/>
+                        </a:ext>
+                      </a:extLst>
+                    </a:gridCol>
+                    <a:gridCol w="5976462">
+                      <a:extLst>
+                        <a:ext uri="{9D8B030D-6E8A-4147-A177-3AD203B41FA5}">
+                          <a16:colId xmlns:a16="http://schemas.microsoft.com/office/drawing/2014/main" val="906180283"/>
+                        </a:ext>
+                      </a:extLst>
+                    </a:gridCol>
+                    <a:gridCol w="3026979">
+                      <a:extLst>
+                        <a:ext uri="{9D8B030D-6E8A-4147-A177-3AD203B41FA5}">
+                          <a16:colId xmlns:a16="http://schemas.microsoft.com/office/drawing/2014/main" val="2769721792"/>
+                        </a:ext>
+                      </a:extLst>
+                    </a:gridCol>
+                  </a:tblGrid>
+                  <a:tr h="370840">
+                    <a:tc>
+                      <a:txBody>
+                        <a:bodyPr/>
+                        <a:lstStyle/>
+                        <a:p>
+                          <a:r>
+                            <a:rPr lang="en-US" dirty="0"/>
+                            <a:t>Time</a:t>
+                          </a:r>
+                        </a:p>
+                      </a:txBody>
+                      <a:tcPr/>
+                    </a:tc>
+                    <a:tc>
+                      <a:txBody>
+                        <a:bodyPr/>
+                        <a:lstStyle/>
+                        <a:p>
+                          <a:r>
+                            <a:rPr lang="en-US" dirty="0"/>
+                            <a:t>Description</a:t>
+                          </a:r>
+                        </a:p>
+                      </a:txBody>
+                      <a:tcPr/>
+                    </a:tc>
+                    <a:tc>
+                      <a:txBody>
+                        <a:bodyPr/>
+                        <a:lstStyle/>
+                        <a:p>
+                          <a:r>
+                            <a:rPr lang="en-US" dirty="0"/>
+                            <a:t>Discussant</a:t>
+                          </a:r>
+                        </a:p>
+                      </a:txBody>
+                      <a:tcPr/>
+                    </a:tc>
+                    <a:extLst>
+                      <a:ext uri="{0D108BD9-81ED-4DB2-BD59-A6C34878D82A}">
+                        <a16:rowId xmlns:a16="http://schemas.microsoft.com/office/drawing/2014/main" val="1700444250"/>
+                      </a:ext>
+                    </a:extLst>
+                  </a:tr>
+                  <a:tr h="370840">
+                    <a:tc>
+                      <a:txBody>
+                        <a:bodyPr/>
+                        <a:lstStyle/>
+                        <a:p>
+                          <a:r>
+                            <a:rPr lang="en-US" dirty="0"/>
+                            <a:t>[15 min]</a:t>
+                          </a:r>
+                        </a:p>
+                      </a:txBody>
+                      <a:tcPr/>
+                    </a:tc>
+                    <a:tc>
+                      <a:txBody>
+                        <a:bodyPr/>
+                        <a:lstStyle/>
+                        <a:p>
+                          <a:r>
+                            <a:rPr lang="en-US" sz="1800" kern="1200" dirty="0">
+                              <a:solidFill>
+                                <a:schemeClr val="dk1"/>
+                              </a:solidFill>
+                              <a:effectLst/>
+                              <a:latin typeface="+mn-lt"/>
+                              <a:ea typeface="+mn-ea"/>
+                              <a:cs typeface="+mn-cs"/>
+                            </a:rPr>
+                            <a:t>(0) Introductions and administrivia </a:t>
+                          </a:r>
+                          <a:endParaRPr lang="en-US" dirty="0"/>
+                        </a:p>
+                      </a:txBody>
+                      <a:tcPr/>
+                    </a:tc>
+                    <a:tc>
+                      <a:txBody>
+                        <a:bodyPr/>
+                        <a:lstStyle/>
+                        <a:p>
+                          <a:r>
+                            <a:rPr lang="en-US" dirty="0" err="1"/>
+                            <a:t>Trikalinos</a:t>
+                          </a:r>
+                          <a:endParaRPr lang="en-US" dirty="0"/>
+                        </a:p>
+                      </a:txBody>
+                      <a:tcPr/>
+                    </a:tc>
+                    <a:extLst>
+                      <a:ext uri="{0D108BD9-81ED-4DB2-BD59-A6C34878D82A}">
+                        <a16:rowId xmlns:a16="http://schemas.microsoft.com/office/drawing/2014/main" val="2490995723"/>
+                      </a:ext>
+                    </a:extLst>
+                  </a:tr>
+                  <a:tr h="370840">
+                    <a:tc>
+                      <a:txBody>
+                        <a:bodyPr/>
+                        <a:lstStyle/>
+                        <a:p>
+                          <a:r>
+                            <a:rPr lang="en-US" dirty="0"/>
+                            <a:t>[25 min]</a:t>
+                          </a:r>
+                        </a:p>
+                      </a:txBody>
+                      <a:tcPr/>
+                    </a:tc>
+                    <a:tc>
+                      <a:txBody>
+                        <a:bodyPr/>
+                        <a:lstStyle/>
+                        <a:p>
+                          <a:r>
+                            <a:rPr lang="en-US" sz="1800" kern="1200" dirty="0">
+                              <a:solidFill>
+                                <a:schemeClr val="dk1"/>
+                              </a:solidFill>
+                              <a:effectLst/>
+                              <a:latin typeface="+mn-lt"/>
+                              <a:ea typeface="+mn-ea"/>
+                              <a:cs typeface="+mn-cs"/>
+                            </a:rPr>
+                            <a:t>(1) DES as a composition of point processes</a:t>
+                          </a:r>
+                        </a:p>
+                      </a:txBody>
+                      <a:tcPr/>
+                    </a:tc>
+                    <a:tc>
+                      <a:txBody>
+                        <a:bodyPr/>
+                        <a:lstStyle/>
+                        <a:p>
+                          <a:r>
+                            <a:rPr lang="en-US" dirty="0" err="1"/>
+                            <a:t>Alarid</a:t>
+                          </a:r>
+                          <a:r>
+                            <a:rPr lang="en-US" dirty="0"/>
+                            <a:t>-Escudero</a:t>
+                          </a:r>
+                        </a:p>
+                      </a:txBody>
+                      <a:tcPr/>
+                    </a:tc>
+                    <a:extLst>
+                      <a:ext uri="{0D108BD9-81ED-4DB2-BD59-A6C34878D82A}">
+                        <a16:rowId xmlns:a16="http://schemas.microsoft.com/office/drawing/2014/main" val="2065491183"/>
+                      </a:ext>
+                    </a:extLst>
+                  </a:tr>
+                  <a:tr h="370840">
+                    <a:tc>
+                      <a:txBody>
+                        <a:bodyPr/>
+                        <a:lstStyle/>
+                        <a:p>
+                          <a:r>
+                            <a:rPr lang="en-US" dirty="0"/>
+                            <a:t>[30 min]</a:t>
+                          </a:r>
+                        </a:p>
+                      </a:txBody>
+                      <a:tcPr/>
+                    </a:tc>
+                    <a:tc>
+                      <a:txBody>
+                        <a:bodyPr/>
+                        <a:lstStyle/>
+                        <a:p>
+                          <a:pPr marL="0" marR="0" lvl="0" indent="0" algn="l" defTabSz="914400" rtl="0" eaLnBrk="1" fontAlgn="auto" latinLnBrk="0" hangingPunct="1">
+                            <a:lnSpc>
+                              <a:spcPct val="100000"/>
+                            </a:lnSpc>
+                            <a:spcBef>
+                              <a:spcPts val="0"/>
+                            </a:spcBef>
+                            <a:spcAft>
+                              <a:spcPts val="0"/>
+                            </a:spcAft>
+                            <a:buClrTx/>
+                            <a:buSzTx/>
+                            <a:buFontTx/>
+                            <a:buNone/>
+                            <a:tabLst/>
+                            <a:defRPr/>
+                          </a:pPr>
+                          <a:r>
+                            <a:rPr lang="en-US" sz="1800" kern="1200" dirty="0">
+                              <a:solidFill>
+                                <a:schemeClr val="dk1"/>
+                              </a:solidFill>
+                              <a:effectLst/>
+                              <a:latin typeface="+mn-lt"/>
+                              <a:ea typeface="+mn-ea"/>
+                              <a:cs typeface="+mn-cs"/>
+                            </a:rPr>
+                            <a:t>(2) NHPPPs – key properties</a:t>
+                          </a:r>
+                        </a:p>
+                      </a:txBody>
+                      <a:tcPr/>
+                    </a:tc>
+                    <a:tc>
+                      <a:txBody>
+                        <a:bodyPr/>
+                        <a:lstStyle/>
+                        <a:p>
+                          <a:r>
+                            <a:rPr lang="en-US" dirty="0" err="1"/>
+                            <a:t>Trikalinos</a:t>
+                          </a:r>
+                          <a:endParaRPr lang="en-US" dirty="0"/>
+                        </a:p>
+                      </a:txBody>
+                      <a:tcPr/>
+                    </a:tc>
+                    <a:extLst>
+                      <a:ext uri="{0D108BD9-81ED-4DB2-BD59-A6C34878D82A}">
+                        <a16:rowId xmlns:a16="http://schemas.microsoft.com/office/drawing/2014/main" val="2757944147"/>
+                      </a:ext>
+                    </a:extLst>
+                  </a:tr>
+                  <a:tr h="370840">
+                    <a:tc>
+                      <a:txBody>
+                        <a:bodyPr/>
+                        <a:lstStyle/>
+                        <a:p>
+                          <a:r>
+                            <a:rPr lang="en-US" dirty="0"/>
+                            <a:t>[30 min]</a:t>
+                          </a:r>
+                        </a:p>
+                      </a:txBody>
+                      <a:tcPr/>
+                    </a:tc>
+                    <a:tc>
+                      <a:txBody>
+                        <a:bodyPr/>
+                        <a:lstStyle/>
+                        <a:p>
+                          <a:r>
+                            <a:rPr lang="en-US" sz="1800" kern="1200" dirty="0">
+                              <a:solidFill>
+                                <a:schemeClr val="dk1"/>
+                              </a:solidFill>
+                              <a:effectLst/>
+                              <a:latin typeface="+mn-lt"/>
+                              <a:ea typeface="+mn-ea"/>
+                              <a:cs typeface="+mn-cs"/>
+                            </a:rPr>
+                            <a:t>(3) Sampling from NHPPPs</a:t>
+                          </a:r>
+                          <a:endParaRPr lang="en-US" dirty="0"/>
+                        </a:p>
+                      </a:txBody>
+                      <a:tcPr/>
+                    </a:tc>
+                    <a:tc>
+                      <a:txBody>
+                        <a:bodyPr/>
+                        <a:lstStyle/>
+                        <a:p>
+                          <a:pPr marL="0" marR="0" lvl="0" indent="0" algn="l" defTabSz="914400" rtl="0" eaLnBrk="1" fontAlgn="auto" latinLnBrk="0" hangingPunct="1">
+                            <a:lnSpc>
+                              <a:spcPct val="100000"/>
+                            </a:lnSpc>
+                            <a:spcBef>
+                              <a:spcPts val="0"/>
+                            </a:spcBef>
+                            <a:spcAft>
+                              <a:spcPts val="0"/>
+                            </a:spcAft>
+                            <a:buClrTx/>
+                            <a:buSzTx/>
+                            <a:buFontTx/>
+                            <a:buNone/>
+                            <a:tabLst/>
+                            <a:defRPr/>
+                          </a:pPr>
+                          <a:r>
+                            <a:rPr lang="en-US" dirty="0"/>
+                            <a:t>Trikalinos</a:t>
+                          </a:r>
+                        </a:p>
+                      </a:txBody>
+                      <a:tcPr/>
+                    </a:tc>
+                    <a:extLst>
+                      <a:ext uri="{0D108BD9-81ED-4DB2-BD59-A6C34878D82A}">
+                        <a16:rowId xmlns:a16="http://schemas.microsoft.com/office/drawing/2014/main" val="1442363784"/>
+                      </a:ext>
+                    </a:extLst>
+                  </a:tr>
+                  <a:tr h="370840">
+                    <a:tc>
+                      <a:txBody>
+                        <a:bodyPr/>
+                        <a:lstStyle/>
+                        <a:p>
+                          <a:r>
+                            <a:rPr lang="en-US" dirty="0"/>
+                            <a:t>[15 min]</a:t>
+                          </a:r>
+                        </a:p>
+                      </a:txBody>
+                      <a:tcPr/>
+                    </a:tc>
+                    <a:tc>
+                      <a:txBody>
+                        <a:bodyPr/>
+                        <a:lstStyle/>
+                        <a:p>
+                          <a:pPr marL="0" marR="0" lvl="0" indent="0" algn="l" defTabSz="914400" rtl="0" eaLnBrk="1" fontAlgn="auto" latinLnBrk="0" hangingPunct="1">
+                            <a:lnSpc>
+                              <a:spcPct val="100000"/>
+                            </a:lnSpc>
+                            <a:spcBef>
+                              <a:spcPts val="0"/>
+                            </a:spcBef>
+                            <a:spcAft>
+                              <a:spcPts val="0"/>
+                            </a:spcAft>
+                            <a:buClrTx/>
+                            <a:buSzTx/>
+                            <a:buFontTx/>
+                            <a:buNone/>
+                            <a:tabLst/>
+                            <a:defRPr/>
+                          </a:pPr>
+                          <a:r>
+                            <a:rPr lang="en-US" b="1" dirty="0"/>
+                            <a:t>Break</a:t>
+                          </a:r>
+                        </a:p>
+                      </a:txBody>
+                      <a:tcPr/>
+                    </a:tc>
+                    <a:tc>
+                      <a:txBody>
+                        <a:bodyPr/>
+                        <a:lstStyle/>
+                        <a:p>
+                          <a:endParaRPr lang="en-US" dirty="0"/>
+                        </a:p>
+                      </a:txBody>
+                      <a:tcPr/>
+                    </a:tc>
+                    <a:extLst>
+                      <a:ext uri="{0D108BD9-81ED-4DB2-BD59-A6C34878D82A}">
+                        <a16:rowId xmlns:a16="http://schemas.microsoft.com/office/drawing/2014/main" val="1269228105"/>
+                      </a:ext>
+                    </a:extLst>
+                  </a:tr>
+                  <a:tr h="370840">
+                    <a:tc>
+                      <a:txBody>
+                        <a:bodyPr/>
+                        <a:lstStyle/>
+                        <a:p>
+                          <a:r>
+                            <a:rPr lang="en-US" dirty="0"/>
+                            <a:t>[80 min]</a:t>
+                          </a:r>
+                        </a:p>
+                      </a:txBody>
+                      <a:tcPr/>
+                    </a:tc>
+                    <a:tc>
+                      <a:txBody>
+                        <a:bodyPr/>
+                        <a:lstStyle/>
+                        <a:p>
+                          <a:r>
+                            <a:rPr lang="en-US" sz="1800" kern="1200" dirty="0">
+                              <a:solidFill>
+                                <a:schemeClr val="dk1"/>
+                              </a:solidFill>
+                              <a:effectLst/>
+                              <a:latin typeface="+mn-lt"/>
+                              <a:ea typeface="+mn-ea"/>
+                              <a:cs typeface="+mn-cs"/>
+                            </a:rPr>
+                            <a:t>(4) Working with code</a:t>
+                          </a:r>
+                        </a:p>
+                        <a:p>
+                          <a:r>
+                            <a:rPr lang="en-US" sz="1800" kern="1200" dirty="0">
+                              <a:solidFill>
+                                <a:schemeClr val="dk1"/>
+                              </a:solidFill>
+                              <a:effectLst/>
+                              <a:latin typeface="+mn-lt"/>
+                              <a:ea typeface="+mn-ea"/>
+                              <a:cs typeface="+mn-cs"/>
+                            </a:rPr>
+                            <a:t>-- Base </a:t>
+                          </a:r>
+                          <a:r>
+                            <a:rPr lang="en-US" sz="1800" kern="1200" dirty="0">
+                              <a:solidFill>
+                                <a:schemeClr val="dk1"/>
+                              </a:solidFill>
+                              <a:effectLst/>
+                              <a:latin typeface="Courier New" panose="02070309020205020404" pitchFamily="49" charset="0"/>
+                              <a:ea typeface="+mn-ea"/>
+                              <a:cs typeface="Courier New" panose="02070309020205020404" pitchFamily="49" charset="0"/>
+                            </a:rPr>
+                            <a:t>R</a:t>
+                          </a:r>
+                          <a:r>
+                            <a:rPr lang="en-US" sz="1800" kern="1200" dirty="0">
+                              <a:solidFill>
+                                <a:schemeClr val="dk1"/>
+                              </a:solidFill>
+                              <a:effectLst/>
+                              <a:latin typeface="+mn-lt"/>
+                              <a:ea typeface="+mn-ea"/>
+                              <a:cs typeface="+mn-cs"/>
+                            </a:rPr>
+                            <a:t> vs </a:t>
+                          </a:r>
+                          <a:r>
+                            <a:rPr lang="en-US" sz="1800" kern="1200" dirty="0" err="1">
+                              <a:solidFill>
+                                <a:schemeClr val="dk1"/>
+                              </a:solidFill>
+                              <a:effectLst/>
+                              <a:latin typeface="Courier New" panose="02070309020205020404" pitchFamily="49" charset="0"/>
+                              <a:ea typeface="+mn-ea"/>
+                              <a:cs typeface="Courier New" panose="02070309020205020404" pitchFamily="49" charset="0"/>
+                            </a:rPr>
+                            <a:t>nhppp</a:t>
+                          </a:r>
+                          <a:r>
+                            <a:rPr lang="en-US" sz="1800" kern="1200" dirty="0">
+                              <a:solidFill>
+                                <a:schemeClr val="dk1"/>
+                              </a:solidFill>
+                              <a:effectLst/>
+                              <a:latin typeface="+mn-lt"/>
+                              <a:ea typeface="+mn-ea"/>
+                              <a:cs typeface="+mn-cs"/>
+                            </a:rPr>
+                            <a:t>:  Simulate first vs all events in </a:t>
+                          </a:r>
+                          <a14:m>
+                            <m:oMath xmlns:m="http://schemas.openxmlformats.org/officeDocument/2006/math">
+                              <m:r>
+                                <a:rPr lang="en-US" sz="1800" b="0" i="1" kern="1200" smtClean="0">
+                                  <a:solidFill>
+                                    <a:schemeClr val="dk1"/>
+                                  </a:solidFill>
+                                  <a:effectLst/>
+                                  <a:latin typeface="Cambria Math" panose="02040503050406030204" pitchFamily="18" charset="0"/>
+                                  <a:ea typeface="+mn-ea"/>
+                                  <a:cs typeface="+mn-cs"/>
+                                </a:rPr>
+                                <m:t>(</m:t>
+                              </m:r>
+                              <m:r>
+                                <m:rPr>
+                                  <m:sty m:val="p"/>
+                                </m:rPr>
+                                <a:rPr lang="en-US" sz="1800" b="0" i="1" kern="1200" smtClean="0">
+                                  <a:solidFill>
+                                    <a:schemeClr val="dk1"/>
+                                  </a:solidFill>
+                                  <a:effectLst/>
+                                  <a:latin typeface="Cambria Math" panose="02040503050406030204" pitchFamily="18" charset="0"/>
+                                  <a:ea typeface="+mn-ea"/>
+                                  <a:cs typeface="+mn-cs"/>
+                                </a:rPr>
+                                <m:t>a</m:t>
+                              </m:r>
+                              <m:r>
+                                <a:rPr lang="en-US" sz="1800" b="0" i="1" kern="1200" smtClean="0">
+                                  <a:solidFill>
+                                    <a:schemeClr val="dk1"/>
+                                  </a:solidFill>
+                                  <a:effectLst/>
+                                  <a:latin typeface="Cambria Math" panose="02040503050406030204" pitchFamily="18" charset="0"/>
+                                  <a:ea typeface="+mn-ea"/>
+                                  <a:cs typeface="+mn-cs"/>
+                                </a:rPr>
+                                <m:t>,</m:t>
+                              </m:r>
+                              <m:r>
+                                <m:rPr>
+                                  <m:sty m:val="p"/>
+                                </m:rPr>
+                                <a:rPr lang="en-US" sz="1800" b="0" i="1" kern="1200" smtClean="0">
+                                  <a:solidFill>
+                                    <a:schemeClr val="dk1"/>
+                                  </a:solidFill>
+                                  <a:effectLst/>
+                                  <a:latin typeface="Cambria Math" panose="02040503050406030204" pitchFamily="18" charset="0"/>
+                                  <a:ea typeface="+mn-ea"/>
+                                  <a:cs typeface="+mn-cs"/>
+                                </a:rPr>
+                                <m:t>b</m:t>
+                              </m:r>
+                              <m:r>
+                                <a:rPr lang="en-US" sz="1800" b="0" i="1" kern="1200" smtClean="0">
+                                  <a:solidFill>
+                                    <a:schemeClr val="dk1"/>
+                                  </a:solidFill>
+                                  <a:effectLst/>
+                                  <a:latin typeface="Cambria Math" panose="02040503050406030204" pitchFamily="18" charset="0"/>
+                                  <a:ea typeface="+mn-ea"/>
+                                  <a:cs typeface="+mn-cs"/>
+                                </a:rPr>
+                                <m:t>]</m:t>
+                              </m:r>
+                            </m:oMath>
+                          </a14:m>
+                          <a:endParaRPr lang="en-US" sz="1800" kern="1200" dirty="0">
+                            <a:solidFill>
+                              <a:schemeClr val="dk1"/>
+                            </a:solidFill>
+                            <a:effectLst/>
+                            <a:latin typeface="+mn-lt"/>
+                            <a:ea typeface="+mn-ea"/>
+                            <a:cs typeface="+mn-cs"/>
+                          </a:endParaRPr>
+                        </a:p>
+                        <a:p>
+                          <a:r>
+                            <a:rPr lang="en-US" sz="1800" kern="1200" dirty="0">
+                              <a:solidFill>
+                                <a:schemeClr val="dk1"/>
+                              </a:solidFill>
+                              <a:effectLst/>
+                              <a:latin typeface="+mn-lt"/>
+                              <a:ea typeface="+mn-ea"/>
+                              <a:cs typeface="+mn-cs"/>
+                            </a:rPr>
+                            <a:t>-- Packaging a simple cancer DES </a:t>
+                          </a:r>
+                        </a:p>
+                        <a:p>
+                          <a:r>
+                            <a:rPr lang="en-US" sz="1800" kern="1200" dirty="0">
+                              <a:solidFill>
+                                <a:schemeClr val="dk1"/>
+                              </a:solidFill>
+                              <a:effectLst/>
+                              <a:latin typeface="+mn-lt"/>
+                              <a:ea typeface="+mn-ea"/>
+                              <a:cs typeface="+mn-cs"/>
+                            </a:rPr>
+                            <a:t>-- The vectorized case </a:t>
+                          </a:r>
+                        </a:p>
+                      </a:txBody>
+                      <a:tcPr/>
+                    </a:tc>
+                    <a:tc>
+                      <a:txBody>
+                        <a:bodyPr/>
+                        <a:lstStyle/>
+                        <a:p>
+                          <a:r>
+                            <a:rPr lang="en-US" dirty="0"/>
+                            <a:t>[All]</a:t>
+                          </a:r>
+                        </a:p>
+                        <a:p>
+                          <a:r>
+                            <a:rPr lang="en-US" dirty="0"/>
+                            <a:t>Trikalinos</a:t>
+                          </a:r>
+                        </a:p>
+                        <a:p>
+                          <a:r>
+                            <a:rPr lang="en-US" dirty="0"/>
+                            <a:t>Sereda</a:t>
+                          </a:r>
+                        </a:p>
+                        <a:p>
+                          <a:pPr marL="0" marR="0" lvl="0" indent="0" algn="l" defTabSz="914400" rtl="0" eaLnBrk="1" fontAlgn="auto" latinLnBrk="0" hangingPunct="1">
+                            <a:lnSpc>
+                              <a:spcPct val="100000"/>
+                            </a:lnSpc>
+                            <a:spcBef>
+                              <a:spcPts val="0"/>
+                            </a:spcBef>
+                            <a:spcAft>
+                              <a:spcPts val="0"/>
+                            </a:spcAft>
+                            <a:buClrTx/>
+                            <a:buSzTx/>
+                            <a:buFontTx/>
+                            <a:buNone/>
+                            <a:tabLst/>
+                            <a:defRPr/>
+                          </a:pPr>
+                          <a:r>
+                            <a:rPr lang="en-US" dirty="0"/>
+                            <a:t>Sereda</a:t>
+                          </a:r>
+                        </a:p>
+                      </a:txBody>
+                      <a:tcPr/>
+                    </a:tc>
+                    <a:extLst>
+                      <a:ext uri="{0D108BD9-81ED-4DB2-BD59-A6C34878D82A}">
+                        <a16:rowId xmlns:a16="http://schemas.microsoft.com/office/drawing/2014/main" val="1448491104"/>
+                      </a:ext>
+                    </a:extLst>
+                  </a:tr>
+                  <a:tr h="370840">
+                    <a:tc>
+                      <a:txBody>
+                        <a:bodyPr/>
+                        <a:lstStyle/>
+                        <a:p>
+                          <a:r>
+                            <a:rPr lang="en-US" dirty="0"/>
+                            <a:t>[5 min]</a:t>
+                          </a:r>
+                        </a:p>
+                      </a:txBody>
+                      <a:tcPr/>
+                    </a:tc>
+                    <a:tc>
+                      <a:txBody>
+                        <a:bodyPr/>
+                        <a:lstStyle/>
+                        <a:p>
+                          <a:pPr marL="0" marR="0" lvl="0" indent="0" algn="l" defTabSz="914400" rtl="0" eaLnBrk="1" fontAlgn="auto" latinLnBrk="0" hangingPunct="1">
+                            <a:lnSpc>
+                              <a:spcPct val="100000"/>
+                            </a:lnSpc>
+                            <a:spcBef>
+                              <a:spcPts val="0"/>
+                            </a:spcBef>
+                            <a:spcAft>
+                              <a:spcPts val="0"/>
+                            </a:spcAft>
+                            <a:buClrTx/>
+                            <a:buSzTx/>
+                            <a:buFontTx/>
+                            <a:buNone/>
+                            <a:tabLst/>
+                            <a:defRPr/>
+                          </a:pPr>
+                          <a:r>
+                            <a:rPr lang="en-US" sz="1800" kern="1200" dirty="0">
+                              <a:solidFill>
+                                <a:schemeClr val="dk1"/>
+                              </a:solidFill>
+                              <a:effectLst/>
+                              <a:latin typeface="+mn-lt"/>
+                              <a:ea typeface="+mn-ea"/>
+                              <a:cs typeface="+mn-cs"/>
+                            </a:rPr>
+                            <a:t>(5) Advanced Topic Teaser on self-excitatory processes: point processes that are not NHPPPs and when you may need them</a:t>
+                          </a:r>
+                        </a:p>
+                      </a:txBody>
+                      <a:tcPr/>
+                    </a:tc>
+                    <a:tc>
+                      <a:txBody>
+                        <a:bodyPr/>
+                        <a:lstStyle/>
+                        <a:p>
+                          <a:r>
+                            <a:rPr lang="en-US" dirty="0"/>
+                            <a:t>Trikalinos</a:t>
+                          </a:r>
+                        </a:p>
+                      </a:txBody>
+                      <a:tcPr/>
+                    </a:tc>
+                    <a:extLst>
+                      <a:ext uri="{0D108BD9-81ED-4DB2-BD59-A6C34878D82A}">
+                        <a16:rowId xmlns:a16="http://schemas.microsoft.com/office/drawing/2014/main" val="3766472740"/>
+                      </a:ext>
+                    </a:extLst>
+                  </a:tr>
+                  <a:tr h="370840">
+                    <a:tc>
+                      <a:txBody>
+                        <a:bodyPr/>
+                        <a:lstStyle/>
+                        <a:p>
+                          <a:r>
+                            <a:rPr lang="en-US" dirty="0"/>
+                            <a:t>[15 min]</a:t>
+                          </a:r>
+                        </a:p>
+                      </a:txBody>
+                      <a:tcPr/>
+                    </a:tc>
+                    <a:tc>
+                      <a:txBody>
+                        <a:bodyPr/>
+                        <a:lstStyle/>
+                        <a:p>
+                          <a:r>
+                            <a:rPr lang="en-US" dirty="0"/>
+                            <a:t>General Q &amp; A</a:t>
+                          </a:r>
+                        </a:p>
+                      </a:txBody>
+                      <a:tcPr/>
+                    </a:tc>
+                    <a:tc>
+                      <a:txBody>
+                        <a:bodyPr/>
+                        <a:lstStyle/>
+                        <a:p>
+                          <a:r>
+                            <a:rPr lang="en-US" dirty="0"/>
+                            <a:t>All</a:t>
+                          </a:r>
+                        </a:p>
+                      </a:txBody>
+                      <a:tcPr/>
+                    </a:tc>
+                    <a:extLst>
+                      <a:ext uri="{0D108BD9-81ED-4DB2-BD59-A6C34878D82A}">
+                        <a16:rowId xmlns:a16="http://schemas.microsoft.com/office/drawing/2014/main" val="3034331301"/>
+                      </a:ext>
+                    </a:extLst>
+                  </a:tr>
+                </a:tbl>
+              </a:graphicData>
+            </a:graphic>
+          </p:graphicFrame>
+        </mc:Choice>
+        <mc:Fallback>
+          <p:graphicFrame>
+            <p:nvGraphicFramePr>
+              <p:cNvPr id="7" name="Content Placeholder 3">
+                <a:extLst>
+                  <a:ext uri="{FF2B5EF4-FFF2-40B4-BE49-F238E27FC236}">
+                    <a16:creationId xmlns:a16="http://schemas.microsoft.com/office/drawing/2014/main" id="{867096B1-B006-6761-533F-9ED66395E7B2}"/>
+                  </a:ext>
+                </a:extLst>
+              </p:cNvPr>
+              <p:cNvGraphicFramePr>
+                <a:graphicFrameLocks/>
+              </p:cNvGraphicFramePr>
+              <p:nvPr>
+                <p:extLst>
+                  <p:ext uri="{D42A27DB-BD31-4B8C-83A1-F6EECF244321}">
+                    <p14:modId xmlns:p14="http://schemas.microsoft.com/office/powerpoint/2010/main" val="260976388"/>
+                  </p:ext>
+                </p:extLst>
+              </p:nvPr>
+            </p:nvGraphicFramePr>
+            <p:xfrm>
+              <a:off x="1208690" y="942340"/>
+              <a:ext cx="10720551" cy="4699000"/>
+            </p:xfrm>
+            <a:graphic>
+              <a:graphicData uri="http://schemas.openxmlformats.org/drawingml/2006/table">
+                <a:tbl>
+                  <a:tblPr firstRow="1" bandRow="1">
+                    <a:tableStyleId>{21E4AEA4-8DFA-4A89-87EB-49C32662AFE0}</a:tableStyleId>
+                  </a:tblPr>
+                  <a:tblGrid>
+                    <a:gridCol w="1717110">
+                      <a:extLst>
+                        <a:ext uri="{9D8B030D-6E8A-4147-A177-3AD203B41FA5}">
+                          <a16:colId xmlns:a16="http://schemas.microsoft.com/office/drawing/2014/main" val="4182014441"/>
+                        </a:ext>
+                      </a:extLst>
+                    </a:gridCol>
+                    <a:gridCol w="5976462">
+                      <a:extLst>
+                        <a:ext uri="{9D8B030D-6E8A-4147-A177-3AD203B41FA5}">
+                          <a16:colId xmlns:a16="http://schemas.microsoft.com/office/drawing/2014/main" val="906180283"/>
+                        </a:ext>
+                      </a:extLst>
+                    </a:gridCol>
+                    <a:gridCol w="3026979">
+                      <a:extLst>
+                        <a:ext uri="{9D8B030D-6E8A-4147-A177-3AD203B41FA5}">
+                          <a16:colId xmlns:a16="http://schemas.microsoft.com/office/drawing/2014/main" val="2769721792"/>
+                        </a:ext>
+                      </a:extLst>
+                    </a:gridCol>
+                  </a:tblGrid>
+                  <a:tr h="370840">
+                    <a:tc>
+                      <a:txBody>
+                        <a:bodyPr/>
+                        <a:lstStyle/>
+                        <a:p>
+                          <a:r>
+                            <a:rPr lang="en-US" dirty="0"/>
+                            <a:t>Time</a:t>
+                          </a:r>
+                        </a:p>
+                      </a:txBody>
+                      <a:tcPr/>
+                    </a:tc>
+                    <a:tc>
+                      <a:txBody>
+                        <a:bodyPr/>
+                        <a:lstStyle/>
+                        <a:p>
+                          <a:r>
+                            <a:rPr lang="en-US" dirty="0"/>
+                            <a:t>Description</a:t>
+                          </a:r>
+                        </a:p>
+                      </a:txBody>
+                      <a:tcPr/>
+                    </a:tc>
+                    <a:tc>
+                      <a:txBody>
+                        <a:bodyPr/>
+                        <a:lstStyle/>
+                        <a:p>
+                          <a:r>
+                            <a:rPr lang="en-US" dirty="0"/>
+                            <a:t>Discussant</a:t>
+                          </a:r>
+                        </a:p>
+                      </a:txBody>
+                      <a:tcPr/>
+                    </a:tc>
+                    <a:extLst>
+                      <a:ext uri="{0D108BD9-81ED-4DB2-BD59-A6C34878D82A}">
+                        <a16:rowId xmlns:a16="http://schemas.microsoft.com/office/drawing/2014/main" val="1700444250"/>
+                      </a:ext>
+                    </a:extLst>
+                  </a:tr>
+                  <a:tr h="370840">
+                    <a:tc>
+                      <a:txBody>
+                        <a:bodyPr/>
+                        <a:lstStyle/>
+                        <a:p>
+                          <a:r>
+                            <a:rPr lang="en-US" dirty="0"/>
+                            <a:t>[15 min]</a:t>
+                          </a:r>
+                        </a:p>
+                      </a:txBody>
+                      <a:tcPr/>
+                    </a:tc>
+                    <a:tc>
+                      <a:txBody>
+                        <a:bodyPr/>
+                        <a:lstStyle/>
+                        <a:p>
+                          <a:r>
+                            <a:rPr lang="en-US" sz="1800" kern="1200" dirty="0">
+                              <a:solidFill>
+                                <a:schemeClr val="dk1"/>
+                              </a:solidFill>
+                              <a:effectLst/>
+                              <a:latin typeface="+mn-lt"/>
+                              <a:ea typeface="+mn-ea"/>
+                              <a:cs typeface="+mn-cs"/>
+                            </a:rPr>
+                            <a:t>(0) Introductions and administrivia </a:t>
+                          </a:r>
+                          <a:endParaRPr lang="en-US" dirty="0"/>
+                        </a:p>
+                      </a:txBody>
+                      <a:tcPr/>
+                    </a:tc>
+                    <a:tc>
+                      <a:txBody>
+                        <a:bodyPr/>
+                        <a:lstStyle/>
+                        <a:p>
+                          <a:r>
+                            <a:rPr lang="en-US" dirty="0" err="1"/>
+                            <a:t>Trikalinos</a:t>
+                          </a:r>
+                          <a:endParaRPr lang="en-US" dirty="0"/>
+                        </a:p>
+                      </a:txBody>
+                      <a:tcPr/>
+                    </a:tc>
+                    <a:extLst>
+                      <a:ext uri="{0D108BD9-81ED-4DB2-BD59-A6C34878D82A}">
+                        <a16:rowId xmlns:a16="http://schemas.microsoft.com/office/drawing/2014/main" val="2490995723"/>
+                      </a:ext>
+                    </a:extLst>
+                  </a:tr>
+                  <a:tr h="370840">
+                    <a:tc>
+                      <a:txBody>
+                        <a:bodyPr/>
+                        <a:lstStyle/>
+                        <a:p>
+                          <a:r>
+                            <a:rPr lang="en-US" dirty="0"/>
+                            <a:t>[25 min]</a:t>
+                          </a:r>
+                        </a:p>
+                      </a:txBody>
+                      <a:tcPr/>
+                    </a:tc>
+                    <a:tc>
+                      <a:txBody>
+                        <a:bodyPr/>
+                        <a:lstStyle/>
+                        <a:p>
+                          <a:r>
+                            <a:rPr lang="en-US" sz="1800" kern="1200" dirty="0">
+                              <a:solidFill>
+                                <a:schemeClr val="dk1"/>
+                              </a:solidFill>
+                              <a:effectLst/>
+                              <a:latin typeface="+mn-lt"/>
+                              <a:ea typeface="+mn-ea"/>
+                              <a:cs typeface="+mn-cs"/>
+                            </a:rPr>
+                            <a:t>(1) DES as a composition of point processes</a:t>
+                          </a:r>
+                        </a:p>
+                      </a:txBody>
+                      <a:tcPr/>
+                    </a:tc>
+                    <a:tc>
+                      <a:txBody>
+                        <a:bodyPr/>
+                        <a:lstStyle/>
+                        <a:p>
+                          <a:r>
+                            <a:rPr lang="en-US" dirty="0" err="1"/>
+                            <a:t>Alarid</a:t>
+                          </a:r>
+                          <a:r>
+                            <a:rPr lang="en-US" dirty="0"/>
+                            <a:t>-Escudero</a:t>
+                          </a:r>
+                        </a:p>
+                      </a:txBody>
+                      <a:tcPr/>
+                    </a:tc>
+                    <a:extLst>
+                      <a:ext uri="{0D108BD9-81ED-4DB2-BD59-A6C34878D82A}">
+                        <a16:rowId xmlns:a16="http://schemas.microsoft.com/office/drawing/2014/main" val="2065491183"/>
+                      </a:ext>
+                    </a:extLst>
+                  </a:tr>
+                  <a:tr h="370840">
+                    <a:tc>
+                      <a:txBody>
+                        <a:bodyPr/>
+                        <a:lstStyle/>
+                        <a:p>
+                          <a:r>
+                            <a:rPr lang="en-US" dirty="0"/>
+                            <a:t>[30 min]</a:t>
+                          </a:r>
+                        </a:p>
+                      </a:txBody>
+                      <a:tcPr/>
+                    </a:tc>
+                    <a:tc>
+                      <a:txBody>
+                        <a:bodyPr/>
+                        <a:lstStyle/>
+                        <a:p>
+                          <a:pPr marL="0" marR="0" lvl="0" indent="0" algn="l" defTabSz="914400" rtl="0" eaLnBrk="1" fontAlgn="auto" latinLnBrk="0" hangingPunct="1">
+                            <a:lnSpc>
+                              <a:spcPct val="100000"/>
+                            </a:lnSpc>
+                            <a:spcBef>
+                              <a:spcPts val="0"/>
+                            </a:spcBef>
+                            <a:spcAft>
+                              <a:spcPts val="0"/>
+                            </a:spcAft>
+                            <a:buClrTx/>
+                            <a:buSzTx/>
+                            <a:buFontTx/>
+                            <a:buNone/>
+                            <a:tabLst/>
+                            <a:defRPr/>
+                          </a:pPr>
+                          <a:r>
+                            <a:rPr lang="en-US" sz="1800" kern="1200" dirty="0">
+                              <a:solidFill>
+                                <a:schemeClr val="dk1"/>
+                              </a:solidFill>
+                              <a:effectLst/>
+                              <a:latin typeface="+mn-lt"/>
+                              <a:ea typeface="+mn-ea"/>
+                              <a:cs typeface="+mn-cs"/>
+                            </a:rPr>
+                            <a:t>(2) NHPPPs – key properties</a:t>
+                          </a:r>
+                        </a:p>
+                      </a:txBody>
+                      <a:tcPr/>
+                    </a:tc>
+                    <a:tc>
+                      <a:txBody>
+                        <a:bodyPr/>
+                        <a:lstStyle/>
+                        <a:p>
+                          <a:r>
+                            <a:rPr lang="en-US" dirty="0" err="1"/>
+                            <a:t>Trikalinos</a:t>
+                          </a:r>
+                          <a:endParaRPr lang="en-US" dirty="0"/>
+                        </a:p>
+                      </a:txBody>
+                      <a:tcPr/>
+                    </a:tc>
+                    <a:extLst>
+                      <a:ext uri="{0D108BD9-81ED-4DB2-BD59-A6C34878D82A}">
+                        <a16:rowId xmlns:a16="http://schemas.microsoft.com/office/drawing/2014/main" val="2757944147"/>
+                      </a:ext>
+                    </a:extLst>
+                  </a:tr>
+                  <a:tr h="370840">
+                    <a:tc>
+                      <a:txBody>
+                        <a:bodyPr/>
+                        <a:lstStyle/>
+                        <a:p>
+                          <a:r>
+                            <a:rPr lang="en-US" dirty="0"/>
+                            <a:t>[30 min]</a:t>
+                          </a:r>
+                        </a:p>
+                      </a:txBody>
+                      <a:tcPr/>
+                    </a:tc>
+                    <a:tc>
+                      <a:txBody>
+                        <a:bodyPr/>
+                        <a:lstStyle/>
+                        <a:p>
+                          <a:r>
+                            <a:rPr lang="en-US" sz="1800" kern="1200" dirty="0">
+                              <a:solidFill>
+                                <a:schemeClr val="dk1"/>
+                              </a:solidFill>
+                              <a:effectLst/>
+                              <a:latin typeface="+mn-lt"/>
+                              <a:ea typeface="+mn-ea"/>
+                              <a:cs typeface="+mn-cs"/>
+                            </a:rPr>
+                            <a:t>(3) Sampling from NHPPPs</a:t>
+                          </a:r>
+                          <a:endParaRPr lang="en-US" dirty="0"/>
+                        </a:p>
+                      </a:txBody>
+                      <a:tcPr/>
+                    </a:tc>
+                    <a:tc>
+                      <a:txBody>
+                        <a:bodyPr/>
+                        <a:lstStyle/>
+                        <a:p>
+                          <a:pPr marL="0" marR="0" lvl="0" indent="0" algn="l" defTabSz="914400" rtl="0" eaLnBrk="1" fontAlgn="auto" latinLnBrk="0" hangingPunct="1">
+                            <a:lnSpc>
+                              <a:spcPct val="100000"/>
+                            </a:lnSpc>
+                            <a:spcBef>
+                              <a:spcPts val="0"/>
+                            </a:spcBef>
+                            <a:spcAft>
+                              <a:spcPts val="0"/>
+                            </a:spcAft>
+                            <a:buClrTx/>
+                            <a:buSzTx/>
+                            <a:buFontTx/>
+                            <a:buNone/>
+                            <a:tabLst/>
+                            <a:defRPr/>
+                          </a:pPr>
+                          <a:r>
+                            <a:rPr lang="en-US" dirty="0"/>
+                            <a:t>Trikalinos</a:t>
+                          </a:r>
+                        </a:p>
+                      </a:txBody>
+                      <a:tcPr/>
+                    </a:tc>
+                    <a:extLst>
+                      <a:ext uri="{0D108BD9-81ED-4DB2-BD59-A6C34878D82A}">
+                        <a16:rowId xmlns:a16="http://schemas.microsoft.com/office/drawing/2014/main" val="1442363784"/>
+                      </a:ext>
+                    </a:extLst>
+                  </a:tr>
+                  <a:tr h="370840">
+                    <a:tc>
+                      <a:txBody>
+                        <a:bodyPr/>
+                        <a:lstStyle/>
+                        <a:p>
+                          <a:r>
+                            <a:rPr lang="en-US" dirty="0"/>
+                            <a:t>[15 min]</a:t>
+                          </a:r>
+                        </a:p>
+                      </a:txBody>
+                      <a:tcPr/>
+                    </a:tc>
+                    <a:tc>
+                      <a:txBody>
+                        <a:bodyPr/>
+                        <a:lstStyle/>
+                        <a:p>
+                          <a:pPr marL="0" marR="0" lvl="0" indent="0" algn="l" defTabSz="914400" rtl="0" eaLnBrk="1" fontAlgn="auto" latinLnBrk="0" hangingPunct="1">
+                            <a:lnSpc>
+                              <a:spcPct val="100000"/>
+                            </a:lnSpc>
+                            <a:spcBef>
+                              <a:spcPts val="0"/>
+                            </a:spcBef>
+                            <a:spcAft>
+                              <a:spcPts val="0"/>
+                            </a:spcAft>
+                            <a:buClrTx/>
+                            <a:buSzTx/>
+                            <a:buFontTx/>
+                            <a:buNone/>
+                            <a:tabLst/>
+                            <a:defRPr/>
+                          </a:pPr>
+                          <a:r>
+                            <a:rPr lang="en-US" b="1" dirty="0"/>
+                            <a:t>Break</a:t>
+                          </a:r>
+                        </a:p>
+                      </a:txBody>
+                      <a:tcPr/>
+                    </a:tc>
+                    <a:tc>
+                      <a:txBody>
+                        <a:bodyPr/>
+                        <a:lstStyle/>
+                        <a:p>
+                          <a:endParaRPr lang="en-US" dirty="0"/>
+                        </a:p>
+                      </a:txBody>
+                      <a:tcPr/>
+                    </a:tc>
+                    <a:extLst>
+                      <a:ext uri="{0D108BD9-81ED-4DB2-BD59-A6C34878D82A}">
+                        <a16:rowId xmlns:a16="http://schemas.microsoft.com/office/drawing/2014/main" val="1269228105"/>
+                      </a:ext>
+                    </a:extLst>
+                  </a:tr>
+                  <a:tr h="1188720">
+                    <a:tc>
+                      <a:txBody>
+                        <a:bodyPr/>
+                        <a:lstStyle/>
+                        <a:p>
+                          <a:r>
+                            <a:rPr lang="en-US" dirty="0"/>
+                            <a:t>[80 min]</a:t>
+                          </a:r>
+                        </a:p>
+                      </a:txBody>
+                      <a:tcPr/>
+                    </a:tc>
+                    <a:tc>
+                      <a:txBody>
+                        <a:bodyPr/>
+                        <a:lstStyle/>
+                        <a:p>
+                          <a:endParaRPr lang="en-US"/>
+                        </a:p>
+                      </a:txBody>
+                      <a:tcPr>
+                        <a:blipFill>
+                          <a:blip r:embed="rId2"/>
+                          <a:stretch>
+                            <a:fillRect l="-28875" t="-189362" r="-51168" b="-114894"/>
+                          </a:stretch>
+                        </a:blipFill>
+                      </a:tcPr>
+                    </a:tc>
+                    <a:tc>
+                      <a:txBody>
+                        <a:bodyPr/>
+                        <a:lstStyle/>
+                        <a:p>
+                          <a:r>
+                            <a:rPr lang="en-US" dirty="0"/>
+                            <a:t>[All]</a:t>
+                          </a:r>
+                        </a:p>
+                        <a:p>
+                          <a:r>
+                            <a:rPr lang="en-US" dirty="0"/>
+                            <a:t>Trikalinos</a:t>
+                          </a:r>
+                        </a:p>
+                        <a:p>
+                          <a:r>
+                            <a:rPr lang="en-US" dirty="0"/>
+                            <a:t>Sereda</a:t>
+                          </a:r>
+                        </a:p>
+                        <a:p>
+                          <a:pPr marL="0" marR="0" lvl="0" indent="0" algn="l" defTabSz="914400" rtl="0" eaLnBrk="1" fontAlgn="auto" latinLnBrk="0" hangingPunct="1">
+                            <a:lnSpc>
+                              <a:spcPct val="100000"/>
+                            </a:lnSpc>
+                            <a:spcBef>
+                              <a:spcPts val="0"/>
+                            </a:spcBef>
+                            <a:spcAft>
+                              <a:spcPts val="0"/>
+                            </a:spcAft>
+                            <a:buClrTx/>
+                            <a:buSzTx/>
+                            <a:buFontTx/>
+                            <a:buNone/>
+                            <a:tabLst/>
+                            <a:defRPr/>
+                          </a:pPr>
+                          <a:r>
+                            <a:rPr lang="en-US" dirty="0"/>
+                            <a:t>Sereda</a:t>
+                          </a:r>
+                        </a:p>
+                      </a:txBody>
+                      <a:tcPr/>
+                    </a:tc>
+                    <a:extLst>
+                      <a:ext uri="{0D108BD9-81ED-4DB2-BD59-A6C34878D82A}">
+                        <a16:rowId xmlns:a16="http://schemas.microsoft.com/office/drawing/2014/main" val="1448491104"/>
+                      </a:ext>
+                    </a:extLst>
+                  </a:tr>
+                  <a:tr h="914400">
+                    <a:tc>
+                      <a:txBody>
+                        <a:bodyPr/>
+                        <a:lstStyle/>
+                        <a:p>
+                          <a:r>
+                            <a:rPr lang="en-US" dirty="0"/>
+                            <a:t>[5 min]</a:t>
+                          </a:r>
+                        </a:p>
+                      </a:txBody>
+                      <a:tcPr/>
+                    </a:tc>
+                    <a:tc>
+                      <a:txBody>
+                        <a:bodyPr/>
+                        <a:lstStyle/>
+                        <a:p>
+                          <a:pPr marL="0" marR="0" lvl="0" indent="0" algn="l" defTabSz="914400" rtl="0" eaLnBrk="1" fontAlgn="auto" latinLnBrk="0" hangingPunct="1">
+                            <a:lnSpc>
+                              <a:spcPct val="100000"/>
+                            </a:lnSpc>
+                            <a:spcBef>
+                              <a:spcPts val="0"/>
+                            </a:spcBef>
+                            <a:spcAft>
+                              <a:spcPts val="0"/>
+                            </a:spcAft>
+                            <a:buClrTx/>
+                            <a:buSzTx/>
+                            <a:buFontTx/>
+                            <a:buNone/>
+                            <a:tabLst/>
+                            <a:defRPr/>
+                          </a:pPr>
+                          <a:r>
+                            <a:rPr lang="en-US" sz="1800" kern="1200" dirty="0">
+                              <a:solidFill>
+                                <a:schemeClr val="dk1"/>
+                              </a:solidFill>
+                              <a:effectLst/>
+                              <a:latin typeface="+mn-lt"/>
+                              <a:ea typeface="+mn-ea"/>
+                              <a:cs typeface="+mn-cs"/>
+                            </a:rPr>
+                            <a:t>(5) Advanced Topic Teaser on self-excitatory processes: point processes that are not NHPPPs and when you may need them</a:t>
+                          </a:r>
+                        </a:p>
+                      </a:txBody>
+                      <a:tcPr/>
+                    </a:tc>
+                    <a:tc>
+                      <a:txBody>
+                        <a:bodyPr/>
+                        <a:lstStyle/>
+                        <a:p>
+                          <a:r>
+                            <a:rPr lang="en-US" dirty="0"/>
+                            <a:t>Trikalinos</a:t>
+                          </a:r>
+                        </a:p>
+                      </a:txBody>
+                      <a:tcPr/>
+                    </a:tc>
+                    <a:extLst>
+                      <a:ext uri="{0D108BD9-81ED-4DB2-BD59-A6C34878D82A}">
+                        <a16:rowId xmlns:a16="http://schemas.microsoft.com/office/drawing/2014/main" val="3766472740"/>
+                      </a:ext>
+                    </a:extLst>
+                  </a:tr>
+                  <a:tr h="370840">
+                    <a:tc>
+                      <a:txBody>
+                        <a:bodyPr/>
+                        <a:lstStyle/>
+                        <a:p>
+                          <a:r>
+                            <a:rPr lang="en-US" dirty="0"/>
+                            <a:t>[15 min]</a:t>
+                          </a:r>
+                        </a:p>
+                      </a:txBody>
+                      <a:tcPr/>
+                    </a:tc>
+                    <a:tc>
+                      <a:txBody>
+                        <a:bodyPr/>
+                        <a:lstStyle/>
+                        <a:p>
+                          <a:r>
+                            <a:rPr lang="en-US" dirty="0"/>
+                            <a:t>General Q &amp; A</a:t>
+                          </a:r>
+                        </a:p>
+                      </a:txBody>
+                      <a:tcPr/>
+                    </a:tc>
+                    <a:tc>
+                      <a:txBody>
+                        <a:bodyPr/>
+                        <a:lstStyle/>
+                        <a:p>
+                          <a:r>
+                            <a:rPr lang="en-US" dirty="0"/>
+                            <a:t>All</a:t>
+                          </a:r>
+                        </a:p>
+                      </a:txBody>
+                      <a:tcPr/>
+                    </a:tc>
+                    <a:extLst>
+                      <a:ext uri="{0D108BD9-81ED-4DB2-BD59-A6C34878D82A}">
+                        <a16:rowId xmlns:a16="http://schemas.microsoft.com/office/drawing/2014/main" val="3034331301"/>
+                      </a:ext>
+                    </a:extLst>
+                  </a:tr>
+                </a:tbl>
+              </a:graphicData>
+            </a:graphic>
+          </p:graphicFrame>
+        </mc:Fallback>
+      </mc:AlternateContent>
       <p:sp>
         <p:nvSpPr>
-          <p:cNvPr id="3" name="TextBox 2">
+          <p:cNvPr id="8" name="TextBox 7">
             <a:extLst>
               <a:ext uri="{FF2B5EF4-FFF2-40B4-BE49-F238E27FC236}">
-                <a16:creationId xmlns:a16="http://schemas.microsoft.com/office/drawing/2014/main" id="{CECA8CE2-1DD3-1AF4-39AE-4CEEF45CF3E5}"/>
+                <a16:creationId xmlns:a16="http://schemas.microsoft.com/office/drawing/2014/main" id="{F28B8DD3-5375-0C7E-D898-B9472317FF42}"/>
               </a:ext>
             </a:extLst>
           </p:cNvPr>
@@ -19210,7 +22047,7 @@
           <a:p>
             <a:r>
               <a:rPr lang="en-US" sz="2400" dirty="0"/>
-              <a:t>Sunday 15</a:t>
+              <a:t>Sunday 28</a:t>
             </a:r>
             <a:r>
               <a:rPr lang="en-US" sz="2400" baseline="30000" dirty="0"/>
@@ -19218,7 +22055,17 @@
             </a:r>
             <a:r>
               <a:rPr lang="en-US" sz="2400" dirty="0"/>
-              <a:t> of June, 9:00 to 12:30</a:t>
+              <a:t> of June, 8:35 to 12:</a:t>
+            </a:r>
+            <a:r>
+              <a:rPr lang="en-US" sz="2400" dirty="0">
+                <a:sym typeface="Wingdings" pitchFamily="2" charset="2"/>
+              </a:rPr>
+              <a:t>0</a:t>
+            </a:r>
+            <a:r>
+              <a:rPr lang="en-US" sz="2400" dirty="0"/>
+              <a:t>0</a:t>
             </a:r>
           </a:p>
         </p:txBody>
